--- a/Poster/Poster_Stenneth_499.pptx
+++ b/Poster/Poster_Stenneth_499.pptx
@@ -250,7 +250,7 @@
   </p:defaultTextStyle>
   <p:extLst>
     <p:ext uri="GoogleSlidesCustomDataVersion2">
-      <go:slidesCustomData xmlns:go="http://customooxmlschemas.google.com/" r:id="rId9" roundtripDataSignature="AMtx7mgJP12bY+aCz2SRizWIYpMq8EGxHQ=="/>
+      <go:slidesCustomData xmlns:go="http://customooxmlschemas.google.com/" r:id="rId9" roundtripDataSignature="AMtx7mhCBJqELAIWLkT4xqriz7rU0oyNRw=="/>
     </p:ext>
   </p:extLst>
 </p:presentation>
@@ -3058,7 +3058,7 @@
                 <a:cs typeface="Gill Sans"/>
                 <a:sym typeface="Gill Sans"/>
               </a:rPr>
-              <a:t>SLAM Map Comparison Study Between</a:t>
+              <a:t>A Comparative Study of SLAM Algorithms</a:t>
             </a:r>
             <a:endParaRPr b="1" sz="7200">
               <a:solidFill>
@@ -3098,7 +3098,7 @@
                 <a:cs typeface="Gill Sans"/>
                 <a:sym typeface="Gill Sans"/>
               </a:rPr>
-              <a:t>Slam Toolbox and Cartographer</a:t>
+              <a:t> for Robot Operating System</a:t>
             </a:r>
             <a:endParaRPr b="1" sz="7200">
               <a:solidFill>
@@ -3282,240 +3282,6 @@
             </a:endParaRPr>
           </a:p>
           <a:p>
-            <a:pPr indent="0" lvl="0" marL="914400" marR="0" rtl="0" algn="l">
-              <a:lnSpc>
-                <a:spcPct val="100000"/>
-              </a:lnSpc>
-              <a:spcBef>
-                <a:spcPts val="0"/>
-              </a:spcBef>
-              <a:spcAft>
-                <a:spcPts val="0"/>
-              </a:spcAft>
-              <a:buNone/>
-            </a:pPr>
-            <a:r>
-              <a:t/>
-            </a:r>
-            <a:endParaRPr sz="3200">
-              <a:solidFill>
-                <a:schemeClr val="dk1"/>
-              </a:solidFill>
-              <a:latin typeface="Times New Roman"/>
-              <a:ea typeface="Times New Roman"/>
-              <a:cs typeface="Times New Roman"/>
-              <a:sym typeface="Times New Roman"/>
-            </a:endParaRPr>
-          </a:p>
-          <a:p>
-            <a:pPr indent="0" lvl="0" marL="0" marR="0" rtl="0" algn="l">
-              <a:lnSpc>
-                <a:spcPct val="100000"/>
-              </a:lnSpc>
-              <a:spcBef>
-                <a:spcPts val="0"/>
-              </a:spcBef>
-              <a:spcAft>
-                <a:spcPts val="0"/>
-              </a:spcAft>
-              <a:buNone/>
-            </a:pPr>
-            <a:r>
-              <a:t/>
-            </a:r>
-            <a:endParaRPr sz="1900">
-              <a:solidFill>
-                <a:schemeClr val="dk1"/>
-              </a:solidFill>
-              <a:latin typeface="Times New Roman"/>
-              <a:ea typeface="Times New Roman"/>
-              <a:cs typeface="Times New Roman"/>
-              <a:sym typeface="Times New Roman"/>
-            </a:endParaRPr>
-          </a:p>
-          <a:p>
-            <a:pPr indent="0" lvl="0" marL="0" marR="0" rtl="0" algn="l">
-              <a:lnSpc>
-                <a:spcPct val="100000"/>
-              </a:lnSpc>
-              <a:spcBef>
-                <a:spcPts val="0"/>
-              </a:spcBef>
-              <a:spcAft>
-                <a:spcPts val="0"/>
-              </a:spcAft>
-              <a:buNone/>
-            </a:pPr>
-            <a:r>
-              <a:t/>
-            </a:r>
-            <a:endParaRPr sz="1900">
-              <a:solidFill>
-                <a:schemeClr val="dk1"/>
-              </a:solidFill>
-              <a:latin typeface="Times New Roman"/>
-              <a:ea typeface="Times New Roman"/>
-              <a:cs typeface="Times New Roman"/>
-              <a:sym typeface="Times New Roman"/>
-            </a:endParaRPr>
-          </a:p>
-          <a:p>
-            <a:pPr indent="0" lvl="0" marL="0" marR="0" rtl="0" algn="l">
-              <a:lnSpc>
-                <a:spcPct val="100000"/>
-              </a:lnSpc>
-              <a:spcBef>
-                <a:spcPts val="0"/>
-              </a:spcBef>
-              <a:spcAft>
-                <a:spcPts val="0"/>
-              </a:spcAft>
-              <a:buNone/>
-            </a:pPr>
-            <a:r>
-              <a:t/>
-            </a:r>
-            <a:endParaRPr sz="1900">
-              <a:solidFill>
-                <a:schemeClr val="dk1"/>
-              </a:solidFill>
-              <a:latin typeface="Times New Roman"/>
-              <a:ea typeface="Times New Roman"/>
-              <a:cs typeface="Times New Roman"/>
-              <a:sym typeface="Times New Roman"/>
-            </a:endParaRPr>
-          </a:p>
-          <a:p>
-            <a:pPr indent="0" lvl="0" marL="0" marR="0" rtl="0" algn="l">
-              <a:lnSpc>
-                <a:spcPct val="100000"/>
-              </a:lnSpc>
-              <a:spcBef>
-                <a:spcPts val="0"/>
-              </a:spcBef>
-              <a:spcAft>
-                <a:spcPts val="0"/>
-              </a:spcAft>
-              <a:buNone/>
-            </a:pPr>
-            <a:r>
-              <a:t/>
-            </a:r>
-            <a:endParaRPr sz="1900">
-              <a:solidFill>
-                <a:schemeClr val="dk1"/>
-              </a:solidFill>
-              <a:latin typeface="Times New Roman"/>
-              <a:ea typeface="Times New Roman"/>
-              <a:cs typeface="Times New Roman"/>
-              <a:sym typeface="Times New Roman"/>
-            </a:endParaRPr>
-          </a:p>
-          <a:p>
-            <a:pPr indent="0" lvl="0" marL="0" marR="0" rtl="0" algn="l">
-              <a:lnSpc>
-                <a:spcPct val="100000"/>
-              </a:lnSpc>
-              <a:spcBef>
-                <a:spcPts val="0"/>
-              </a:spcBef>
-              <a:spcAft>
-                <a:spcPts val="0"/>
-              </a:spcAft>
-              <a:buNone/>
-            </a:pPr>
-            <a:r>
-              <a:t/>
-            </a:r>
-            <a:endParaRPr sz="1900">
-              <a:solidFill>
-                <a:schemeClr val="dk1"/>
-              </a:solidFill>
-              <a:latin typeface="Times New Roman"/>
-              <a:ea typeface="Times New Roman"/>
-              <a:cs typeface="Times New Roman"/>
-              <a:sym typeface="Times New Roman"/>
-            </a:endParaRPr>
-          </a:p>
-          <a:p>
-            <a:pPr indent="0" lvl="0" marL="0" marR="0" rtl="0" algn="l">
-              <a:lnSpc>
-                <a:spcPct val="100000"/>
-              </a:lnSpc>
-              <a:spcBef>
-                <a:spcPts val="0"/>
-              </a:spcBef>
-              <a:spcAft>
-                <a:spcPts val="0"/>
-              </a:spcAft>
-              <a:buNone/>
-            </a:pPr>
-            <a:r>
-              <a:t/>
-            </a:r>
-            <a:endParaRPr sz="1900">
-              <a:solidFill>
-                <a:schemeClr val="dk1"/>
-              </a:solidFill>
-              <a:latin typeface="Times New Roman"/>
-              <a:ea typeface="Times New Roman"/>
-              <a:cs typeface="Times New Roman"/>
-              <a:sym typeface="Times New Roman"/>
-            </a:endParaRPr>
-          </a:p>
-          <a:p>
-            <a:pPr indent="0" lvl="0" marL="0" marR="0" rtl="0" algn="l">
-              <a:lnSpc>
-                <a:spcPct val="100000"/>
-              </a:lnSpc>
-              <a:spcBef>
-                <a:spcPts val="0"/>
-              </a:spcBef>
-              <a:spcAft>
-                <a:spcPts val="0"/>
-              </a:spcAft>
-              <a:buNone/>
-            </a:pPr>
-            <a:r>
-              <a:t/>
-            </a:r>
-            <a:endParaRPr sz="1900">
-              <a:solidFill>
-                <a:schemeClr val="dk1"/>
-              </a:solidFill>
-              <a:latin typeface="Times New Roman"/>
-              <a:ea typeface="Times New Roman"/>
-              <a:cs typeface="Times New Roman"/>
-              <a:sym typeface="Times New Roman"/>
-            </a:endParaRPr>
-          </a:p>
-          <a:p>
-            <a:pPr indent="0" lvl="0" marL="0" marR="0" rtl="0" algn="l">
-              <a:lnSpc>
-                <a:spcPct val="100000"/>
-              </a:lnSpc>
-              <a:spcBef>
-                <a:spcPts val="0"/>
-              </a:spcBef>
-              <a:spcAft>
-                <a:spcPts val="0"/>
-              </a:spcAft>
-              <a:buNone/>
-            </a:pPr>
-            <a:r>
-              <a:t/>
-            </a:r>
-            <a:endParaRPr sz="1900">
-              <a:solidFill>
-                <a:schemeClr val="dk1"/>
-              </a:solidFill>
-              <a:latin typeface="Times New Roman"/>
-              <a:ea typeface="Times New Roman"/>
-              <a:cs typeface="Times New Roman"/>
-              <a:sym typeface="Times New Roman"/>
-            </a:endParaRPr>
-          </a:p>
-          <a:p>
             <a:pPr indent="0" lvl="0" marL="0" marR="0" rtl="0" algn="l">
               <a:lnSpc>
                 <a:spcPct val="100000"/>
@@ -3588,7 +3354,7 @@
                   <a:schemeClr val="dk1"/>
                 </a:solidFill>
               </a:rPr>
-              <a:t>The TurtleBot 3 platform with ROS2 offers an ideal setup for testing and comparing modern SLAM algorithms. However, implementations such as Cartographer and SLAM Toolbox can generate maps of varying quality even under identical conditions.</a:t>
+              <a:t>TurtleBot3 with ROS2 provides an ideal testbed for evaluating SLAM algorithm accuracy and reliability in real-world robotics.</a:t>
             </a:r>
             <a:endParaRPr sz="1900">
               <a:solidFill>
@@ -3642,7 +3408,7 @@
                   <a:schemeClr val="dk1"/>
                 </a:solidFill>
               </a:rPr>
-              <a:t>This study is motivated by the need to evaluate and quantify these differences to determine which algorithm produces more consistent, geometrically accurate maps in both simulation and real-world environments. Understanding these variations will help improve future autonomous navigation projects that rely on precise localization and mapping.</a:t>
+              <a:t>SLAM Toolbox and Cartographer often produce maps of different geometric quality under identical conditions, affecting localization and navigation.</a:t>
             </a:r>
             <a:endParaRPr sz="1900">
               <a:solidFill>
@@ -3695,7 +3461,7 @@
                   <a:schemeClr val="dk1"/>
                 </a:solidFill>
               </a:rPr>
-              <a:t>By improving SLAM accuracy and reliability, we move closer to solving challenges such as loop closure, where a robot correctly recognizes and aligns previously visited areas. </a:t>
+              <a:t>Improving SLAM precision supports advanced applications such as autonomous exploration and loop-closure correction in dynamic environments.</a:t>
             </a:r>
             <a:endParaRPr sz="1900">
               <a:solidFill>
@@ -3704,22 +3470,65 @@
             </a:endParaRPr>
           </a:p>
           <a:p>
-            <a:pPr indent="0" lvl="0" marL="914400" marR="0" rtl="0" algn="l">
-              <a:lnSpc>
-                <a:spcPct val="100000"/>
-              </a:lnSpc>
-              <a:spcBef>
-                <a:spcPts val="0"/>
-              </a:spcBef>
-              <a:spcAft>
-                <a:spcPts val="0"/>
-              </a:spcAft>
-              <a:buNone/>
-            </a:pPr>
-            <a:r>
-              <a:t/>
-            </a:r>
-            <a:endParaRPr sz="1500">
+            <a:pPr indent="0" lvl="0" marL="0" marR="0" rtl="0" algn="l">
+              <a:lnSpc>
+                <a:spcPct val="100000"/>
+              </a:lnSpc>
+              <a:spcBef>
+                <a:spcPts val="0"/>
+              </a:spcBef>
+              <a:spcAft>
+                <a:spcPts val="0"/>
+              </a:spcAft>
+              <a:buNone/>
+            </a:pPr>
+            <a:r>
+              <a:t/>
+            </a:r>
+            <a:endParaRPr b="1" sz="1500">
+              <a:solidFill>
+                <a:schemeClr val="dk1"/>
+              </a:solidFill>
+            </a:endParaRPr>
+          </a:p>
+          <a:p>
+            <a:pPr indent="0" lvl="0" marL="0" marR="0" rtl="0" algn="ctr">
+              <a:lnSpc>
+                <a:spcPct val="100000"/>
+              </a:lnSpc>
+              <a:spcBef>
+                <a:spcPts val="0"/>
+              </a:spcBef>
+              <a:spcAft>
+                <a:spcPts val="0"/>
+              </a:spcAft>
+              <a:buNone/>
+            </a:pPr>
+            <a:r>
+              <a:rPr b="1" lang="en-US" sz="1500">
+                <a:solidFill>
+                  <a:schemeClr val="dk1"/>
+                </a:solidFill>
+              </a:rPr>
+              <a:t>Model of the </a:t>
+            </a:r>
+            <a:r>
+              <a:rPr b="1" lang="en-US" sz="1500">
+                <a:solidFill>
+                  <a:schemeClr val="dk1"/>
+                </a:solidFill>
+              </a:rPr>
+              <a:t>Turtlebot 3</a:t>
+            </a:r>
+            <a:r>
+              <a:rPr b="1" lang="en-US" sz="1500">
+                <a:solidFill>
+                  <a:schemeClr val="dk1"/>
+                </a:solidFill>
+              </a:rPr>
+              <a:t> test Environment</a:t>
+            </a:r>
+            <a:endParaRPr b="1" sz="1500">
               <a:solidFill>
                 <a:schemeClr val="dk1"/>
               </a:solidFill>
@@ -4308,8 +4117,8 @@
         </p:nvSpPr>
         <p:spPr>
           <a:xfrm>
-            <a:off x="24409800" y="5552640"/>
-            <a:ext cx="11513520" cy="11445480"/>
+            <a:off x="24409813" y="5565965"/>
+            <a:ext cx="11513400" cy="11445600"/>
           </a:xfrm>
           <a:prstGeom prst="rect">
             <a:avLst/>
@@ -4613,12 +4422,7 @@
               <a:buNone/>
             </a:pPr>
             <a:r>
-              <a:rPr lang="en-US" sz="1600">
-                <a:solidFill>
-                  <a:schemeClr val="dk1"/>
-                </a:solidFill>
-              </a:rPr>
-              <a:t>Table Comparing Our established ground truths and the map dimensions from Cartographer and SLAM Toolbox.</a:t>
+              <a:t/>
             </a:r>
             <a:endParaRPr sz="1600">
               <a:solidFill>
@@ -4627,10 +4431,7 @@
             </a:endParaRPr>
           </a:p>
           <a:p>
-            <a:pPr indent="0" lvl="0" marL="0" marR="0" rtl="0" algn="l">
-              <a:lnSpc>
-                <a:spcPct val="100000"/>
-              </a:lnSpc>
+            <a:pPr indent="0" lvl="0" marL="0" rtl="0" algn="l">
               <a:spcBef>
                 <a:spcPts val="0"/>
               </a:spcBef>
@@ -4649,7 +4450,252 @@
             </a:endParaRPr>
           </a:p>
           <a:p>
-            <a:pPr indent="-489130" lvl="1" marL="1028880" rtl="0" algn="l">
+            <a:pPr indent="0" lvl="0" marL="0" marR="0" rtl="0" algn="l">
+              <a:lnSpc>
+                <a:spcPct val="100000"/>
+              </a:lnSpc>
+              <a:spcBef>
+                <a:spcPts val="0"/>
+              </a:spcBef>
+              <a:spcAft>
+                <a:spcPts val="0"/>
+              </a:spcAft>
+              <a:buNone/>
+            </a:pPr>
+            <a:r>
+              <a:t/>
+            </a:r>
+            <a:endParaRPr sz="1900">
+              <a:solidFill>
+                <a:schemeClr val="dk1"/>
+              </a:solidFill>
+            </a:endParaRPr>
+          </a:p>
+          <a:p>
+            <a:pPr indent="0" lvl="0" marL="0" marR="0" rtl="0" algn="l">
+              <a:lnSpc>
+                <a:spcPct val="100000"/>
+              </a:lnSpc>
+              <a:spcBef>
+                <a:spcPts val="0"/>
+              </a:spcBef>
+              <a:spcAft>
+                <a:spcPts val="0"/>
+              </a:spcAft>
+              <a:buNone/>
+            </a:pPr>
+            <a:r>
+              <a:t/>
+            </a:r>
+            <a:endParaRPr sz="1900">
+              <a:solidFill>
+                <a:schemeClr val="dk1"/>
+              </a:solidFill>
+            </a:endParaRPr>
+          </a:p>
+          <a:p>
+            <a:pPr indent="0" lvl="0" marL="0" marR="0" rtl="0" algn="l">
+              <a:lnSpc>
+                <a:spcPct val="100000"/>
+              </a:lnSpc>
+              <a:spcBef>
+                <a:spcPts val="0"/>
+              </a:spcBef>
+              <a:spcAft>
+                <a:spcPts val="0"/>
+              </a:spcAft>
+              <a:buNone/>
+            </a:pPr>
+            <a:r>
+              <a:t/>
+            </a:r>
+            <a:endParaRPr sz="1900">
+              <a:solidFill>
+                <a:schemeClr val="dk1"/>
+              </a:solidFill>
+            </a:endParaRPr>
+          </a:p>
+          <a:p>
+            <a:pPr indent="0" lvl="0" marL="0" marR="0" rtl="0" algn="l">
+              <a:lnSpc>
+                <a:spcPct val="100000"/>
+              </a:lnSpc>
+              <a:spcBef>
+                <a:spcPts val="0"/>
+              </a:spcBef>
+              <a:spcAft>
+                <a:spcPts val="0"/>
+              </a:spcAft>
+              <a:buNone/>
+            </a:pPr>
+            <a:r>
+              <a:t/>
+            </a:r>
+            <a:endParaRPr sz="1900">
+              <a:solidFill>
+                <a:schemeClr val="dk1"/>
+              </a:solidFill>
+            </a:endParaRPr>
+          </a:p>
+          <a:p>
+            <a:pPr indent="0" lvl="0" marL="0" marR="0" rtl="0" algn="l">
+              <a:lnSpc>
+                <a:spcPct val="100000"/>
+              </a:lnSpc>
+              <a:spcBef>
+                <a:spcPts val="0"/>
+              </a:spcBef>
+              <a:spcAft>
+                <a:spcPts val="0"/>
+              </a:spcAft>
+              <a:buNone/>
+            </a:pPr>
+            <a:r>
+              <a:t/>
+            </a:r>
+            <a:endParaRPr sz="1900">
+              <a:solidFill>
+                <a:schemeClr val="dk1"/>
+              </a:solidFill>
+            </a:endParaRPr>
+          </a:p>
+          <a:p>
+            <a:pPr indent="0" lvl="0" marL="0" marR="0" rtl="0" algn="l">
+              <a:lnSpc>
+                <a:spcPct val="100000"/>
+              </a:lnSpc>
+              <a:spcBef>
+                <a:spcPts val="0"/>
+              </a:spcBef>
+              <a:spcAft>
+                <a:spcPts val="0"/>
+              </a:spcAft>
+              <a:buNone/>
+            </a:pPr>
+            <a:r>
+              <a:t/>
+            </a:r>
+            <a:endParaRPr sz="1900">
+              <a:solidFill>
+                <a:schemeClr val="dk1"/>
+              </a:solidFill>
+            </a:endParaRPr>
+          </a:p>
+          <a:p>
+            <a:pPr indent="0" lvl="0" marL="0" marR="0" rtl="0" algn="l">
+              <a:lnSpc>
+                <a:spcPct val="100000"/>
+              </a:lnSpc>
+              <a:spcBef>
+                <a:spcPts val="0"/>
+              </a:spcBef>
+              <a:spcAft>
+                <a:spcPts val="0"/>
+              </a:spcAft>
+              <a:buNone/>
+            </a:pPr>
+            <a:r>
+              <a:t/>
+            </a:r>
+            <a:endParaRPr sz="1900">
+              <a:solidFill>
+                <a:schemeClr val="dk1"/>
+              </a:solidFill>
+            </a:endParaRPr>
+          </a:p>
+          <a:p>
+            <a:pPr indent="0" lvl="0" marL="0" marR="0" rtl="0" algn="l">
+              <a:lnSpc>
+                <a:spcPct val="100000"/>
+              </a:lnSpc>
+              <a:spcBef>
+                <a:spcPts val="0"/>
+              </a:spcBef>
+              <a:spcAft>
+                <a:spcPts val="0"/>
+              </a:spcAft>
+              <a:buNone/>
+            </a:pPr>
+            <a:r>
+              <a:t/>
+            </a:r>
+            <a:endParaRPr sz="1900">
+              <a:solidFill>
+                <a:schemeClr val="dk1"/>
+              </a:solidFill>
+            </a:endParaRPr>
+          </a:p>
+          <a:p>
+            <a:pPr indent="0" lvl="0" marL="0" marR="0" rtl="0" algn="l">
+              <a:lnSpc>
+                <a:spcPct val="100000"/>
+              </a:lnSpc>
+              <a:spcBef>
+                <a:spcPts val="0"/>
+              </a:spcBef>
+              <a:spcAft>
+                <a:spcPts val="0"/>
+              </a:spcAft>
+              <a:buNone/>
+            </a:pPr>
+            <a:r>
+              <a:t/>
+            </a:r>
+            <a:endParaRPr sz="1900">
+              <a:solidFill>
+                <a:schemeClr val="dk1"/>
+              </a:solidFill>
+            </a:endParaRPr>
+          </a:p>
+          <a:p>
+            <a:pPr indent="0" lvl="0" marL="0" marR="0" rtl="0" algn="l">
+              <a:lnSpc>
+                <a:spcPct val="100000"/>
+              </a:lnSpc>
+              <a:spcBef>
+                <a:spcPts val="0"/>
+              </a:spcBef>
+              <a:spcAft>
+                <a:spcPts val="0"/>
+              </a:spcAft>
+              <a:buNone/>
+            </a:pPr>
+            <a:r>
+              <a:t/>
+            </a:r>
+            <a:endParaRPr sz="1900">
+              <a:solidFill>
+                <a:schemeClr val="dk1"/>
+              </a:solidFill>
+            </a:endParaRPr>
+          </a:p>
+          <a:p>
+            <a:pPr indent="0" lvl="0" marL="0" marR="0" rtl="0" algn="l">
+              <a:lnSpc>
+                <a:spcPct val="100000"/>
+              </a:lnSpc>
+              <a:spcBef>
+                <a:spcPts val="0"/>
+              </a:spcBef>
+              <a:spcAft>
+                <a:spcPts val="0"/>
+              </a:spcAft>
+              <a:buNone/>
+            </a:pPr>
+            <a:r>
+              <a:t/>
+            </a:r>
+            <a:endParaRPr sz="1900">
+              <a:solidFill>
+                <a:schemeClr val="dk1"/>
+              </a:solidFill>
+            </a:endParaRPr>
+          </a:p>
+          <a:p>
+            <a:pPr indent="-349250" lvl="0" marL="1200150" marR="0" rtl="0" algn="l">
+              <a:lnSpc>
+                <a:spcPct val="100000"/>
+              </a:lnSpc>
               <a:spcBef>
                 <a:spcPts val="0"/>
               </a:spcBef>
@@ -4657,27 +4703,22 @@
                 <a:spcPts val="0"/>
               </a:spcAft>
               <a:buClr>
-                <a:schemeClr val="dk1"/>
+                <a:srgbClr val="000000"/>
               </a:buClr>
               <a:buSzPts val="1900"/>
-              <a:buChar char="❑"/>
-            </a:pPr>
-            <a:r>
-              <a:rPr lang="en-US" sz="1900">
-                <a:solidFill>
-                  <a:schemeClr val="dk1"/>
-                </a:solidFill>
-              </a:rPr>
-              <a:t>Calculating the error in mapping area</a:t>
-            </a:r>
-            <a:endParaRPr sz="1900">
-              <a:solidFill>
-                <a:schemeClr val="dk1"/>
-              </a:solidFill>
-            </a:endParaRPr>
-          </a:p>
-          <a:p>
-            <a:pPr indent="-349250" lvl="2" marL="1371600" rtl="0" algn="l">
+              <a:buChar char="❏"/>
+            </a:pPr>
+            <a:r>
+              <a:rPr lang="en-US" sz="1900"/>
+              <a:t>SLAM Toolbox(the image on the right) produced sharper walls and more accurate alignment with ground-truth maze dimensions.</a:t>
+            </a:r>
+            <a:endParaRPr sz="1900"/>
+          </a:p>
+          <a:p>
+            <a:pPr indent="-349250" lvl="0" marL="1200150" marR="0" rtl="0" algn="l">
+              <a:lnSpc>
+                <a:spcPct val="100000"/>
+              </a:lnSpc>
               <a:spcBef>
                 <a:spcPts val="0"/>
               </a:spcBef>
@@ -4685,27 +4726,22 @@
                 <a:spcPts val="0"/>
               </a:spcAft>
               <a:buClr>
-                <a:schemeClr val="dk1"/>
+                <a:srgbClr val="000000"/>
               </a:buClr>
               <a:buSzPts val="1900"/>
-              <a:buChar char="■"/>
-            </a:pPr>
-            <a:r>
-              <a:rPr lang="en-US" sz="1900">
-                <a:solidFill>
-                  <a:schemeClr val="dk1"/>
-                </a:solidFill>
-              </a:rPr>
-              <a:t>Absolute Error = ∣Mapped−Ground Truth∣</a:t>
-            </a:r>
-            <a:endParaRPr sz="1900">
-              <a:solidFill>
-                <a:schemeClr val="dk1"/>
-              </a:solidFill>
-            </a:endParaRPr>
-          </a:p>
-          <a:p>
-            <a:pPr indent="-349250" lvl="2" marL="1371600" rtl="0" algn="l">
+              <a:buChar char="❏"/>
+            </a:pPr>
+            <a:r>
+              <a:rPr lang="en-US" sz="1900"/>
+              <a:t>Cartographer (the image on the left) generated smoother global maps but exhibited higher boundary deviation.</a:t>
+            </a:r>
+            <a:endParaRPr sz="1900"/>
+          </a:p>
+          <a:p>
+            <a:pPr indent="-349250" lvl="0" marL="1200150" marR="0" rtl="0" algn="l">
+              <a:lnSpc>
+                <a:spcPct val="100000"/>
+              </a:lnSpc>
               <a:spcBef>
                 <a:spcPts val="0"/>
               </a:spcBef>
@@ -4713,46 +4749,19 @@
                 <a:spcPts val="0"/>
               </a:spcAft>
               <a:buClr>
-                <a:schemeClr val="dk1"/>
+                <a:srgbClr val="000000"/>
               </a:buClr>
               <a:buSzPts val="1900"/>
-              <a:buChar char="■"/>
-            </a:pPr>
-            <a:r>
-              <a:rPr lang="en-US" sz="1900">
-                <a:solidFill>
-                  <a:schemeClr val="dk1"/>
-                </a:solidFill>
-              </a:rPr>
-              <a:t>Percent Error = (Error / Ground Truth) ×100</a:t>
-            </a:r>
-            <a:endParaRPr sz="1900">
-              <a:solidFill>
-                <a:schemeClr val="dk1"/>
-              </a:solidFill>
-            </a:endParaRPr>
-          </a:p>
-          <a:p>
-            <a:pPr indent="0" lvl="0" marL="1371600" rtl="0" algn="l">
-              <a:spcBef>
-                <a:spcPts val="0"/>
-              </a:spcBef>
-              <a:spcAft>
-                <a:spcPts val="0"/>
-              </a:spcAft>
-              <a:buNone/>
-            </a:pPr>
-            <a:r>
-              <a:t/>
-            </a:r>
-            <a:endParaRPr sz="1900">
-              <a:solidFill>
-                <a:schemeClr val="dk1"/>
-              </a:solidFill>
-            </a:endParaRPr>
-          </a:p>
-          <a:p>
-            <a:pPr indent="-349250" lvl="1" marL="914400" marR="0" rtl="0" algn="l">
+              <a:buChar char="❏"/>
+            </a:pPr>
+            <a:r>
+              <a:rPr lang="en-US" sz="1900"/>
+              <a:t>Quantitative analysis showed SLAM Toolbox achieved lower average map error, confirming higher geometric precision.</a:t>
+            </a:r>
+            <a:endParaRPr sz="1900"/>
+          </a:p>
+          <a:p>
+            <a:pPr indent="-349250" lvl="0" marL="1200150" marR="0" rtl="0" algn="l">
               <a:lnSpc>
                 <a:spcPct val="100000"/>
               </a:lnSpc>
@@ -4763,252 +4772,16 @@
                 <a:spcPts val="0"/>
               </a:spcAft>
               <a:buClr>
-                <a:schemeClr val="dk1"/>
+                <a:srgbClr val="000000"/>
               </a:buClr>
               <a:buSzPts val="1900"/>
-              <a:buChar char="❑"/>
-            </a:pPr>
-            <a:r>
-              <a:rPr lang="en-US" sz="1900">
-                <a:solidFill>
-                  <a:schemeClr val="dk1"/>
-                </a:solidFill>
-              </a:rPr>
-              <a:t>Slam Toolbox </a:t>
-            </a:r>
-            <a:endParaRPr sz="1900">
-              <a:solidFill>
-                <a:schemeClr val="dk1"/>
-              </a:solidFill>
-            </a:endParaRPr>
-          </a:p>
-          <a:p>
-            <a:pPr indent="-349250" lvl="2" marL="1371600" marR="0" rtl="0" algn="l">
-              <a:lnSpc>
-                <a:spcPct val="100000"/>
-              </a:lnSpc>
-              <a:spcBef>
-                <a:spcPts val="0"/>
-              </a:spcBef>
-              <a:spcAft>
-                <a:spcPts val="0"/>
-              </a:spcAft>
-              <a:buClr>
-                <a:schemeClr val="dk1"/>
-              </a:buClr>
-              <a:buSzPts val="1900"/>
-              <a:buChar char="■"/>
-            </a:pPr>
-            <a:r>
-              <a:rPr lang="en-US" sz="1900">
-                <a:solidFill>
-                  <a:schemeClr val="dk1"/>
-                </a:solidFill>
-              </a:rPr>
-              <a:t>The maze area error was 0.47%, showing high accuracy in large-scale mapping.</a:t>
-            </a:r>
-            <a:endParaRPr sz="1900">
-              <a:solidFill>
-                <a:schemeClr val="dk1"/>
-              </a:solidFill>
-            </a:endParaRPr>
-          </a:p>
-          <a:p>
-            <a:pPr indent="0" lvl="0" marL="1371600" marR="0" rtl="0" algn="l">
-              <a:lnSpc>
-                <a:spcPct val="100000"/>
-              </a:lnSpc>
-              <a:spcBef>
-                <a:spcPts val="0"/>
-              </a:spcBef>
-              <a:spcAft>
-                <a:spcPts val="0"/>
-              </a:spcAft>
-              <a:buNone/>
-            </a:pPr>
-            <a:r>
-              <a:t/>
-            </a:r>
-            <a:endParaRPr sz="1900">
-              <a:solidFill>
-                <a:schemeClr val="dk1"/>
-              </a:solidFill>
-            </a:endParaRPr>
-          </a:p>
-          <a:p>
-            <a:pPr indent="-349250" lvl="1" marL="914400" rtl="0" algn="l">
-              <a:spcBef>
-                <a:spcPts val="0"/>
-              </a:spcBef>
-              <a:spcAft>
-                <a:spcPts val="0"/>
-              </a:spcAft>
-              <a:buClr>
-                <a:schemeClr val="dk1"/>
-              </a:buClr>
-              <a:buSzPts val="1900"/>
-              <a:buChar char="❑"/>
-            </a:pPr>
-            <a:r>
-              <a:rPr lang="en-US" sz="1900">
-                <a:solidFill>
-                  <a:schemeClr val="dk1"/>
-                </a:solidFill>
-              </a:rPr>
-              <a:t>Cartographer</a:t>
-            </a:r>
-            <a:endParaRPr sz="1900">
-              <a:solidFill>
-                <a:schemeClr val="dk1"/>
-              </a:solidFill>
-            </a:endParaRPr>
-          </a:p>
-          <a:p>
-            <a:pPr indent="-349250" lvl="2" marL="1371600" rtl="0" algn="l">
-              <a:spcBef>
-                <a:spcPts val="0"/>
-              </a:spcBef>
-              <a:spcAft>
-                <a:spcPts val="0"/>
-              </a:spcAft>
-              <a:buClr>
-                <a:schemeClr val="dk1"/>
-              </a:buClr>
-              <a:buSzPts val="1900"/>
-              <a:buChar char="■"/>
-            </a:pPr>
-            <a:r>
-              <a:rPr lang="en-US" sz="1900">
-                <a:solidFill>
-                  <a:schemeClr val="dk1"/>
-                </a:solidFill>
-              </a:rPr>
-              <a:t> Boxes 1 and 2 errors were moderate (24% and 20%, respectively), suggesting shape distortion around smaller features.</a:t>
-            </a:r>
-            <a:endParaRPr sz="1900">
-              <a:solidFill>
-                <a:schemeClr val="dk1"/>
-              </a:solidFill>
-            </a:endParaRPr>
-          </a:p>
-          <a:p>
-            <a:pPr indent="-349250" lvl="2" marL="1371600" rtl="0" algn="l">
-              <a:spcBef>
-                <a:spcPts val="0"/>
-              </a:spcBef>
-              <a:spcAft>
-                <a:spcPts val="0"/>
-              </a:spcAft>
-              <a:buClr>
-                <a:schemeClr val="dk1"/>
-              </a:buClr>
-              <a:buSzPts val="1900"/>
-              <a:buChar char="■"/>
-            </a:pPr>
-            <a:r>
-              <a:rPr lang="en-US" sz="1900">
-                <a:solidFill>
-                  <a:schemeClr val="dk1"/>
-                </a:solidFill>
-              </a:rPr>
-              <a:t>Boxes 3 and 4 had higher deviations (35% and 50%), indicating rounding of edges and less geometric accuracy for compact structures.</a:t>
-            </a:r>
-            <a:endParaRPr sz="1900">
-              <a:solidFill>
-                <a:schemeClr val="dk1"/>
-              </a:solidFill>
-            </a:endParaRPr>
-          </a:p>
-          <a:p>
-            <a:pPr indent="0" lvl="0" marL="1371600" rtl="0" algn="l">
-              <a:spcBef>
-                <a:spcPts val="0"/>
-              </a:spcBef>
-              <a:spcAft>
-                <a:spcPts val="0"/>
-              </a:spcAft>
-              <a:buNone/>
-            </a:pPr>
-            <a:r>
-              <a:t/>
-            </a:r>
-            <a:endParaRPr sz="1900">
-              <a:solidFill>
-                <a:schemeClr val="dk1"/>
-              </a:solidFill>
-            </a:endParaRPr>
-          </a:p>
-          <a:p>
-            <a:pPr indent="-349250" lvl="1" marL="914400" rtl="0" algn="l">
-              <a:spcBef>
-                <a:spcPts val="0"/>
-              </a:spcBef>
-              <a:spcAft>
-                <a:spcPts val="0"/>
-              </a:spcAft>
-              <a:buClr>
-                <a:schemeClr val="dk1"/>
-              </a:buClr>
-              <a:buSzPts val="1900"/>
-              <a:buChar char="❑"/>
-            </a:pPr>
-            <a:r>
-              <a:rPr lang="en-US" sz="1900">
-                <a:solidFill>
-                  <a:schemeClr val="dk1"/>
-                </a:solidFill>
-              </a:rPr>
-              <a:t>SLAM Toolbox achieved a more accurate overall representation of the maze environment, with an average percent error of approximately 9%, compared to 27% for Cartographer. This performance difference reflects SLAM Toolbox’s superior geometric precision, particularly during LiDAR scans around Boxes 2 and 4, where object boundaries and corner geometries were more sharply preserved. In contrast, Cartographer generated a visually continuous and cohesive map with smoother transitions and fewer discontinuities, but it exhibited a tendency to overestimate smaller structural regions, as indicated by the higher percentage errors in Boxes 3 and 4.These results suggest that while Cartographer prioritizes global smoothness and visual uniformity, SLAM Toolbox demonstrates greater fidelity in local structural reconstruction and spatial accuracy.</a:t>
-            </a:r>
-            <a:endParaRPr sz="1900">
-              <a:solidFill>
-                <a:schemeClr val="dk1"/>
-              </a:solidFill>
-            </a:endParaRPr>
-          </a:p>
-          <a:p>
-            <a:pPr indent="0" lvl="0" marL="0" marR="0" rtl="0" algn="l">
-              <a:lnSpc>
-                <a:spcPct val="100000"/>
-              </a:lnSpc>
-              <a:spcBef>
-                <a:spcPts val="0"/>
-              </a:spcBef>
-              <a:spcAft>
-                <a:spcPts val="0"/>
-              </a:spcAft>
-              <a:buNone/>
-            </a:pPr>
-            <a:r>
-              <a:t/>
-            </a:r>
-            <a:endParaRPr sz="1900">
-              <a:solidFill>
-                <a:schemeClr val="dk1"/>
-              </a:solidFill>
-            </a:endParaRPr>
-          </a:p>
-          <a:p>
-            <a:pPr indent="0" lvl="0" marL="0" marR="0" rtl="0" algn="l">
-              <a:lnSpc>
-                <a:spcPct val="100000"/>
-              </a:lnSpc>
-              <a:spcBef>
-                <a:spcPts val="0"/>
-              </a:spcBef>
-              <a:spcAft>
-                <a:spcPts val="0"/>
-              </a:spcAft>
-              <a:buNone/>
-            </a:pPr>
-            <a:r>
-              <a:t/>
-            </a:r>
-            <a:endParaRPr i="0" sz="3200" u="none" cap="none" strike="noStrike">
-              <a:solidFill>
-                <a:srgbClr val="000000"/>
-              </a:solidFill>
-            </a:endParaRPr>
+              <a:buChar char="❏"/>
+            </a:pPr>
+            <a:r>
+              <a:rPr lang="en-US" sz="1900"/>
+              <a:t>Results indicate that algorithm design trade-offs affect local vs. global consistency in mapping.</a:t>
+            </a:r>
+            <a:endParaRPr sz="1900"/>
           </a:p>
           <a:p>
             <a:pPr indent="0" lvl="0" marL="0" marR="0" rtl="0" algn="l">
@@ -5452,104 +5225,102 @@
             </a:endParaRPr>
           </a:p>
           <a:p>
-            <a:pPr indent="-489130" lvl="1" marL="1028880" marR="0" rtl="0" algn="l">
-              <a:lnSpc>
-                <a:spcPct val="100000"/>
-              </a:lnSpc>
-              <a:spcBef>
-                <a:spcPts val="0"/>
-              </a:spcBef>
-              <a:spcAft>
-                <a:spcPts val="0"/>
-              </a:spcAft>
-              <a:buClr>
-                <a:srgbClr val="000000"/>
-              </a:buClr>
+            <a:pPr indent="-349250" lvl="0" marL="914400" marR="0" rtl="0" algn="l">
+              <a:lnSpc>
+                <a:spcPct val="100000"/>
+              </a:lnSpc>
+              <a:spcBef>
+                <a:spcPts val="0"/>
+              </a:spcBef>
+              <a:spcAft>
+                <a:spcPts val="0"/>
+              </a:spcAft>
               <a:buSzPts val="1900"/>
-              <a:buFont typeface="Noto Sans Symbols"/>
-              <a:buChar char="❑"/>
+              <a:buChar char="❏"/>
             </a:pPr>
             <a:r>
               <a:rPr lang="en-US" sz="1900"/>
-              <a:t>The goal of this experiment was to evaluate and compare the mapping accuracy, reliability, and consistency of two SLAM algorithms, Cartographer and SLAM Toolbox, using a controlled test environment.</a:t>
+              <a:t>Objective: Evaluate the mapping accuracy of Cartographer and SLAM Toolbox by generating and comparing maps under identical conditions.</a:t>
             </a:r>
             <a:endParaRPr sz="1900"/>
           </a:p>
           <a:p>
-            <a:pPr indent="0" lvl="0" marL="914400" marR="0" rtl="0" algn="l">
-              <a:lnSpc>
-                <a:spcPct val="100000"/>
-              </a:lnSpc>
-              <a:spcBef>
-                <a:spcPts val="0"/>
-              </a:spcBef>
-              <a:spcAft>
-                <a:spcPts val="0"/>
-              </a:spcAft>
-              <a:buNone/>
-            </a:pPr>
-            <a:r>
-              <a:t/>
+            <a:pPr indent="-349250" lvl="0" marL="914400" marR="0" rtl="0" algn="l">
+              <a:lnSpc>
+                <a:spcPct val="100000"/>
+              </a:lnSpc>
+              <a:spcBef>
+                <a:spcPts val="0"/>
+              </a:spcBef>
+              <a:spcAft>
+                <a:spcPts val="0"/>
+              </a:spcAft>
+              <a:buSzPts val="1900"/>
+              <a:buChar char="❏"/>
+            </a:pPr>
+            <a:r>
+              <a:rPr lang="en-US" sz="1900"/>
+              <a:t>Both algorithms were launched using the default packages and nodes from the ROBOTIS e-Manual (cartographer_bringup, slam_toolbox_bringup).</a:t>
             </a:r>
             <a:endParaRPr sz="1900"/>
           </a:p>
           <a:p>
-            <a:pPr indent="-489130" lvl="1" marL="1028880" marR="0" rtl="0" algn="l">
-              <a:lnSpc>
-                <a:spcPct val="100000"/>
-              </a:lnSpc>
-              <a:spcBef>
-                <a:spcPts val="0"/>
-              </a:spcBef>
-              <a:spcAft>
-                <a:spcPts val="0"/>
-              </a:spcAft>
-              <a:buClr>
-                <a:srgbClr val="000000"/>
-              </a:buClr>
+            <a:pPr indent="-349250" lvl="0" marL="914400" marR="0" rtl="0" algn="l">
+              <a:lnSpc>
+                <a:spcPct val="100000"/>
+              </a:lnSpc>
+              <a:spcBef>
+                <a:spcPts val="0"/>
+              </a:spcBef>
+              <a:spcAft>
+                <a:spcPts val="0"/>
+              </a:spcAft>
               <a:buSzPts val="1900"/>
-              <a:buFont typeface="Noto Sans Symbols"/>
-              <a:buChar char="❑"/>
+              <a:buChar char="❏"/>
             </a:pPr>
             <a:r>
               <a:rPr lang="en-US" sz="1900"/>
-              <a:t>SLAM ToolBox map</a:t>
+              <a:t>Tests were performed in the same maze environment to ensure repeatability and eliminate environmental bias.</a:t>
             </a:r>
             <a:endParaRPr sz="1900"/>
           </a:p>
           <a:p>
-            <a:pPr indent="0" lvl="0" marL="1371600" marR="0" rtl="0" algn="l">
-              <a:lnSpc>
-                <a:spcPct val="100000"/>
-              </a:lnSpc>
-              <a:spcBef>
-                <a:spcPts val="0"/>
-              </a:spcBef>
-              <a:spcAft>
-                <a:spcPts val="0"/>
-              </a:spcAft>
-              <a:buNone/>
-            </a:pPr>
-            <a:r>
-              <a:t/>
+            <a:pPr indent="-349250" lvl="0" marL="914400" marR="0" rtl="0" algn="l">
+              <a:lnSpc>
+                <a:spcPct val="100000"/>
+              </a:lnSpc>
+              <a:spcBef>
+                <a:spcPts val="0"/>
+              </a:spcBef>
+              <a:spcAft>
+                <a:spcPts val="0"/>
+              </a:spcAft>
+              <a:buSzPts val="1900"/>
+              <a:buChar char="❏"/>
+            </a:pPr>
+            <a:r>
+              <a:rPr lang="en-US" sz="1900"/>
+              <a:t>nav2_map_server package to ensure uniform output quality.</a:t>
             </a:r>
             <a:endParaRPr sz="1900"/>
           </a:p>
           <a:p>
-            <a:pPr indent="0" lvl="0" marL="0" marR="0" rtl="0" algn="l">
-              <a:lnSpc>
-                <a:spcPct val="100000"/>
-              </a:lnSpc>
-              <a:spcBef>
-                <a:spcPts val="0"/>
-              </a:spcBef>
-              <a:spcAft>
-                <a:spcPts val="0"/>
-              </a:spcAft>
-              <a:buNone/>
-            </a:pPr>
-            <a:r>
-              <a:t/>
+            <a:pPr indent="-349250" lvl="0" marL="914400" marR="0" rtl="0" algn="l">
+              <a:lnSpc>
+                <a:spcPct val="100000"/>
+              </a:lnSpc>
+              <a:spcBef>
+                <a:spcPts val="0"/>
+              </a:spcBef>
+              <a:spcAft>
+                <a:spcPts val="0"/>
+              </a:spcAft>
+              <a:buSzPts val="1900"/>
+              <a:buChar char="❏"/>
+            </a:pPr>
+            <a:r>
+              <a:rPr lang="en-US" sz="1900"/>
+              <a:t>Cartographer Map:</a:t>
             </a:r>
             <a:endParaRPr sz="1900"/>
           </a:p>
@@ -5752,20 +5523,22 @@
             <a:endParaRPr sz="1900"/>
           </a:p>
           <a:p>
-            <a:pPr indent="0" lvl="0" marL="0" marR="0" rtl="0" algn="l">
-              <a:lnSpc>
-                <a:spcPct val="100000"/>
-              </a:lnSpc>
-              <a:spcBef>
-                <a:spcPts val="0"/>
-              </a:spcBef>
-              <a:spcAft>
-                <a:spcPts val="0"/>
-              </a:spcAft>
-              <a:buNone/>
-            </a:pPr>
-            <a:r>
-              <a:t/>
+            <a:pPr indent="-349250" lvl="0" marL="914400" marR="0" rtl="0" algn="l">
+              <a:lnSpc>
+                <a:spcPct val="100000"/>
+              </a:lnSpc>
+              <a:spcBef>
+                <a:spcPts val="0"/>
+              </a:spcBef>
+              <a:spcAft>
+                <a:spcPts val="0"/>
+              </a:spcAft>
+              <a:buSzPts val="1900"/>
+              <a:buChar char="❏"/>
+            </a:pPr>
+            <a:r>
+              <a:rPr lang="en-US" sz="1900"/>
+              <a:t>SLAM Toolbox Map:</a:t>
             </a:r>
             <a:endParaRPr sz="1900"/>
           </a:p>
@@ -5878,7 +5651,97 @@
             <a:endParaRPr sz="1900"/>
           </a:p>
           <a:p>
-            <a:pPr indent="-489130" lvl="1" marL="1028880" marR="0" rtl="0" algn="l">
+            <a:pPr indent="0" lvl="0" marL="0" marR="0" rtl="0" algn="l">
+              <a:lnSpc>
+                <a:spcPct val="100000"/>
+              </a:lnSpc>
+              <a:spcBef>
+                <a:spcPts val="0"/>
+              </a:spcBef>
+              <a:spcAft>
+                <a:spcPts val="0"/>
+              </a:spcAft>
+              <a:buNone/>
+            </a:pPr>
+            <a:r>
+              <a:t/>
+            </a:r>
+            <a:endParaRPr sz="1900"/>
+          </a:p>
+          <a:p>
+            <a:pPr indent="0" lvl="0" marL="0" marR="0" rtl="0" algn="l">
+              <a:lnSpc>
+                <a:spcPct val="100000"/>
+              </a:lnSpc>
+              <a:spcBef>
+                <a:spcPts val="0"/>
+              </a:spcBef>
+              <a:spcAft>
+                <a:spcPts val="0"/>
+              </a:spcAft>
+              <a:buNone/>
+            </a:pPr>
+            <a:r>
+              <a:t/>
+            </a:r>
+            <a:endParaRPr sz="1900"/>
+          </a:p>
+          <a:p>
+            <a:pPr indent="0" lvl="0" marL="0" marR="0" rtl="0" algn="l">
+              <a:lnSpc>
+                <a:spcPct val="100000"/>
+              </a:lnSpc>
+              <a:spcBef>
+                <a:spcPts val="0"/>
+              </a:spcBef>
+              <a:spcAft>
+                <a:spcPts val="0"/>
+              </a:spcAft>
+              <a:buNone/>
+            </a:pPr>
+            <a:r>
+              <a:t/>
+            </a:r>
+            <a:endParaRPr sz="1900"/>
+          </a:p>
+          <a:p>
+            <a:pPr indent="0" lvl="0" marL="0" marR="0" rtl="0" algn="l">
+              <a:lnSpc>
+                <a:spcPct val="100000"/>
+              </a:lnSpc>
+              <a:spcBef>
+                <a:spcPts val="0"/>
+              </a:spcBef>
+              <a:spcAft>
+                <a:spcPts val="0"/>
+              </a:spcAft>
+              <a:buNone/>
+            </a:pPr>
+            <a:r>
+              <a:t/>
+            </a:r>
+            <a:endParaRPr sz="1900"/>
+          </a:p>
+          <a:p>
+            <a:pPr indent="0" lvl="0" marL="0" marR="0" rtl="0" algn="l">
+              <a:lnSpc>
+                <a:spcPct val="100000"/>
+              </a:lnSpc>
+              <a:spcBef>
+                <a:spcPts val="0"/>
+              </a:spcBef>
+              <a:spcAft>
+                <a:spcPts val="0"/>
+              </a:spcAft>
+              <a:buNone/>
+            </a:pPr>
+            <a:r>
+              <a:t/>
+            </a:r>
+            <a:endParaRPr sz="1900"/>
+          </a:p>
+          <a:p>
+            <a:pPr indent="-349250" lvl="0" marL="914400" marR="0" rtl="0" algn="l">
               <a:lnSpc>
                 <a:spcPct val="100000"/>
               </a:lnSpc>
@@ -5889,29 +5752,31 @@
                 <a:spcPts val="0"/>
               </a:spcAft>
               <a:buSzPts val="1900"/>
-              <a:buChar char="❑"/>
+              <a:buChar char="❏"/>
             </a:pPr>
             <a:r>
               <a:rPr lang="en-US" sz="1900"/>
-              <a:t>Cartographer map</a:t>
+              <a:t>All saved maps were resized to a fixed pixel dimension to maintain consistent scaling.</a:t>
             </a:r>
             <a:endParaRPr sz="1900"/>
           </a:p>
           <a:p>
-            <a:pPr indent="0" lvl="0" marL="0" marR="0" rtl="0" algn="l">
-              <a:lnSpc>
-                <a:spcPct val="100000"/>
-              </a:lnSpc>
-              <a:spcBef>
-                <a:spcPts val="0"/>
-              </a:spcBef>
-              <a:spcAft>
-                <a:spcPts val="0"/>
-              </a:spcAft>
-              <a:buNone/>
-            </a:pPr>
-            <a:r>
-              <a:t/>
+            <a:pPr indent="-349250" lvl="0" marL="914400" marR="0" rtl="0" algn="l">
+              <a:lnSpc>
+                <a:spcPct val="100000"/>
+              </a:lnSpc>
+              <a:spcBef>
+                <a:spcPts val="0"/>
+              </a:spcBef>
+              <a:spcAft>
+                <a:spcPts val="0"/>
+              </a:spcAft>
+              <a:buSzPts val="1900"/>
+              <a:buChar char="❏"/>
+            </a:pPr>
+            <a:r>
+              <a:rPr lang="en-US" sz="1900"/>
+              <a:t>A Python script was developed to overlay maps and visually align them for direct comparison.</a:t>
             </a:r>
             <a:endParaRPr sz="1900"/>
           </a:p>
@@ -6127,7 +5992,8 @@
               <a:buNone/>
             </a:pPr>
             <a:r>
-              <a:t/>
+              <a:rPr lang="en-US" sz="1900"/>
+              <a:t>+----</a:t>
             </a:r>
             <a:endParaRPr sz="1900"/>
           </a:p>
@@ -6222,7 +6088,25 @@
             <a:endParaRPr sz="1900"/>
           </a:p>
           <a:p>
-            <a:pPr indent="-349250" lvl="1" marL="914400" marR="0" rtl="0" algn="l">
+            <a:pPr indent="0" lvl="0" marL="0" marR="0" rtl="0" algn="l">
+              <a:lnSpc>
+                <a:spcPct val="100000"/>
+              </a:lnSpc>
+              <a:spcBef>
+                <a:spcPts val="0"/>
+              </a:spcBef>
+              <a:spcAft>
+                <a:spcPts val="0"/>
+              </a:spcAft>
+              <a:buNone/>
+            </a:pPr>
+            <a:r>
+              <a:t/>
+            </a:r>
+            <a:endParaRPr sz="1900"/>
+          </a:p>
+          <a:p>
+            <a:pPr indent="-349250" lvl="0" marL="914400" marR="0" rtl="0" algn="l">
               <a:lnSpc>
                 <a:spcPct val="100000"/>
               </a:lnSpc>
@@ -6233,7 +6117,7 @@
                 <a:spcPts val="0"/>
               </a:spcAft>
               <a:buSzPts val="1900"/>
-              <a:buChar char="❑"/>
+              <a:buChar char="❏"/>
             </a:pPr>
             <a:r>
               <a:rPr lang="en-US" sz="1900">
@@ -6241,39 +6125,336 @@
                   <a:schemeClr val="dk1"/>
                 </a:solidFill>
               </a:rPr>
-              <a:t>To minimize experimental error and ensure the collection of accurate, real-world data, a rectangular path was outlined within the maze to serve as a fixed route for the </a:t>
-            </a:r>
+              <a:t>The same script computed the map error by quantifying pixel-level deviations between the generated SLAM maps.</a:t>
+            </a:r>
+            <a:endParaRPr sz="1900">
+              <a:solidFill>
+                <a:schemeClr val="dk1"/>
+              </a:solidFill>
+            </a:endParaRPr>
+          </a:p>
+          <a:p>
+            <a:pPr indent="0" lvl="0" marL="0" marR="0" rtl="0" algn="l">
+              <a:lnSpc>
+                <a:spcPct val="100000"/>
+              </a:lnSpc>
+              <a:spcBef>
+                <a:spcPts val="0"/>
+              </a:spcBef>
+              <a:spcAft>
+                <a:spcPts val="0"/>
+              </a:spcAft>
+              <a:buNone/>
+            </a:pPr>
+            <a:r>
+              <a:t/>
+            </a:r>
+            <a:endParaRPr sz="1900">
+              <a:solidFill>
+                <a:schemeClr val="dk1"/>
+              </a:solidFill>
+            </a:endParaRPr>
+          </a:p>
+          <a:p>
+            <a:pPr indent="0" lvl="0" marL="0" marR="0" rtl="0" algn="l">
+              <a:lnSpc>
+                <a:spcPct val="100000"/>
+              </a:lnSpc>
+              <a:spcBef>
+                <a:spcPts val="0"/>
+              </a:spcBef>
+              <a:spcAft>
+                <a:spcPts val="0"/>
+              </a:spcAft>
+              <a:buNone/>
+            </a:pPr>
+            <a:r>
+              <a:t/>
+            </a:r>
+            <a:endParaRPr sz="1900">
+              <a:solidFill>
+                <a:schemeClr val="dk1"/>
+              </a:solidFill>
+            </a:endParaRPr>
+          </a:p>
+          <a:p>
+            <a:pPr indent="0" lvl="0" marL="0" marR="0" rtl="0" algn="l">
+              <a:lnSpc>
+                <a:spcPct val="100000"/>
+              </a:lnSpc>
+              <a:spcBef>
+                <a:spcPts val="0"/>
+              </a:spcBef>
+              <a:spcAft>
+                <a:spcPts val="0"/>
+              </a:spcAft>
+              <a:buNone/>
+            </a:pPr>
+            <a:r>
+              <a:t/>
+            </a:r>
+            <a:endParaRPr sz="1900">
+              <a:solidFill>
+                <a:schemeClr val="dk1"/>
+              </a:solidFill>
+            </a:endParaRPr>
+          </a:p>
+          <a:p>
+            <a:pPr indent="0" lvl="0" marL="0" marR="0" rtl="0" algn="l">
+              <a:lnSpc>
+                <a:spcPct val="100000"/>
+              </a:lnSpc>
+              <a:spcBef>
+                <a:spcPts val="0"/>
+              </a:spcBef>
+              <a:spcAft>
+                <a:spcPts val="0"/>
+              </a:spcAft>
+              <a:buNone/>
+            </a:pPr>
+            <a:r>
+              <a:t/>
+            </a:r>
+            <a:endParaRPr sz="1900">
+              <a:solidFill>
+                <a:schemeClr val="dk1"/>
+              </a:solidFill>
+            </a:endParaRPr>
+          </a:p>
+          <a:p>
+            <a:pPr indent="0" lvl="0" marL="0" marR="0" rtl="0" algn="l">
+              <a:lnSpc>
+                <a:spcPct val="100000"/>
+              </a:lnSpc>
+              <a:spcBef>
+                <a:spcPts val="0"/>
+              </a:spcBef>
+              <a:spcAft>
+                <a:spcPts val="0"/>
+              </a:spcAft>
+              <a:buNone/>
+            </a:pPr>
+            <a:r>
+              <a:t/>
+            </a:r>
+            <a:endParaRPr sz="1900">
+              <a:solidFill>
+                <a:schemeClr val="dk1"/>
+              </a:solidFill>
+            </a:endParaRPr>
+          </a:p>
+          <a:p>
+            <a:pPr indent="0" lvl="0" marL="0" marR="0" rtl="0" algn="l">
+              <a:lnSpc>
+                <a:spcPct val="100000"/>
+              </a:lnSpc>
+              <a:spcBef>
+                <a:spcPts val="0"/>
+              </a:spcBef>
+              <a:spcAft>
+                <a:spcPts val="0"/>
+              </a:spcAft>
+              <a:buNone/>
+            </a:pPr>
+            <a:r>
+              <a:t/>
+            </a:r>
+            <a:endParaRPr sz="1900">
+              <a:solidFill>
+                <a:schemeClr val="dk1"/>
+              </a:solidFill>
+            </a:endParaRPr>
+          </a:p>
+          <a:p>
+            <a:pPr indent="0" lvl="0" marL="0" marR="0" rtl="0" algn="l">
+              <a:lnSpc>
+                <a:spcPct val="100000"/>
+              </a:lnSpc>
+              <a:spcBef>
+                <a:spcPts val="0"/>
+              </a:spcBef>
+              <a:spcAft>
+                <a:spcPts val="0"/>
+              </a:spcAft>
+              <a:buNone/>
+            </a:pPr>
+            <a:r>
+              <a:t/>
+            </a:r>
+            <a:endParaRPr sz="1900">
+              <a:solidFill>
+                <a:schemeClr val="dk1"/>
+              </a:solidFill>
+            </a:endParaRPr>
+          </a:p>
+          <a:p>
+            <a:pPr indent="0" lvl="0" marL="0" marR="0" rtl="0" algn="l">
+              <a:lnSpc>
+                <a:spcPct val="100000"/>
+              </a:lnSpc>
+              <a:spcBef>
+                <a:spcPts val="0"/>
+              </a:spcBef>
+              <a:spcAft>
+                <a:spcPts val="0"/>
+              </a:spcAft>
+              <a:buNone/>
+            </a:pPr>
+            <a:r>
+              <a:t/>
+            </a:r>
+            <a:endParaRPr sz="1900">
+              <a:solidFill>
+                <a:schemeClr val="dk1"/>
+              </a:solidFill>
+            </a:endParaRPr>
+          </a:p>
+          <a:p>
+            <a:pPr indent="0" lvl="0" marL="0" marR="0" rtl="0" algn="l">
+              <a:lnSpc>
+                <a:spcPct val="100000"/>
+              </a:lnSpc>
+              <a:spcBef>
+                <a:spcPts val="0"/>
+              </a:spcBef>
+              <a:spcAft>
+                <a:spcPts val="0"/>
+              </a:spcAft>
+              <a:buNone/>
+            </a:pPr>
+            <a:r>
+              <a:t/>
+            </a:r>
+            <a:endParaRPr sz="1900">
+              <a:solidFill>
+                <a:schemeClr val="dk1"/>
+              </a:solidFill>
+            </a:endParaRPr>
+          </a:p>
+          <a:p>
+            <a:pPr indent="0" lvl="0" marL="0" marR="0" rtl="0" algn="l">
+              <a:lnSpc>
+                <a:spcPct val="100000"/>
+              </a:lnSpc>
+              <a:spcBef>
+                <a:spcPts val="0"/>
+              </a:spcBef>
+              <a:spcAft>
+                <a:spcPts val="0"/>
+              </a:spcAft>
+              <a:buNone/>
+            </a:pPr>
+            <a:r>
+              <a:t/>
+            </a:r>
+            <a:endParaRPr sz="1900">
+              <a:solidFill>
+                <a:schemeClr val="dk1"/>
+              </a:solidFill>
+            </a:endParaRPr>
+          </a:p>
+          <a:p>
+            <a:pPr indent="-349250" lvl="0" marL="914400" marR="0" rtl="0" algn="l">
+              <a:lnSpc>
+                <a:spcPct val="100000"/>
+              </a:lnSpc>
+              <a:spcBef>
+                <a:spcPts val="0"/>
+              </a:spcBef>
+              <a:spcAft>
+                <a:spcPts val="0"/>
+              </a:spcAft>
+              <a:buClr>
+                <a:schemeClr val="dk1"/>
+              </a:buClr>
+              <a:buSzPts val="1900"/>
+              <a:buChar char="❏"/>
+            </a:pPr>
             <a:r>
               <a:rPr lang="en-US" sz="1900">
                 <a:solidFill>
                   <a:schemeClr val="dk1"/>
                 </a:solidFill>
               </a:rPr>
-              <a:t>TurtleBot 3</a:t>
-            </a:r>
+              <a:t>The mapping error (eₘ) quantifies how closely the estimated map matches the ground-truth map.</a:t>
+            </a:r>
+            <a:endParaRPr sz="1900">
+              <a:solidFill>
+                <a:schemeClr val="dk1"/>
+              </a:solidFill>
+            </a:endParaRPr>
+          </a:p>
+          <a:p>
+            <a:pPr indent="-349250" lvl="0" marL="914400" marR="0" rtl="0" algn="l">
+              <a:lnSpc>
+                <a:spcPct val="100000"/>
+              </a:lnSpc>
+              <a:spcBef>
+                <a:spcPts val="0"/>
+              </a:spcBef>
+              <a:spcAft>
+                <a:spcPts val="0"/>
+              </a:spcAft>
+              <a:buClr>
+                <a:schemeClr val="dk1"/>
+              </a:buClr>
+              <a:buSzPts val="1900"/>
+              <a:buChar char="❏"/>
+            </a:pPr>
             <a:r>
               <a:rPr lang="en-US" sz="1900">
                 <a:solidFill>
                   <a:schemeClr val="dk1"/>
                 </a:solidFill>
               </a:rPr>
-              <a:t>. This setup allowed the robot to follow a consistent trajectory during each trial, reducing variability between runs. The robot was manually controlled by the operator using the </a:t>
-            </a:r>
-            <a:r>
-              <a:rPr i="1" lang="en-US" sz="1900">
-                <a:solidFill>
-                  <a:schemeClr val="dk1"/>
-                </a:solidFill>
-              </a:rPr>
-              <a:t>teleop</a:t>
-            </a:r>
+              <a:t>It is computed as the mean absolute error (MAE) between estimated and true positions.</a:t>
+            </a:r>
+            <a:endParaRPr sz="1900">
+              <a:solidFill>
+                <a:schemeClr val="dk1"/>
+              </a:solidFill>
+            </a:endParaRPr>
+          </a:p>
+          <a:p>
+            <a:pPr indent="-349250" lvl="0" marL="914400" marR="0" rtl="0" algn="l">
+              <a:lnSpc>
+                <a:spcPct val="100000"/>
+              </a:lnSpc>
+              <a:spcBef>
+                <a:spcPts val="0"/>
+              </a:spcBef>
+              <a:spcAft>
+                <a:spcPts val="0"/>
+              </a:spcAft>
+              <a:buClr>
+                <a:schemeClr val="dk1"/>
+              </a:buClr>
+              <a:buSzPts val="1900"/>
+              <a:buChar char="❏"/>
+            </a:pPr>
             <a:r>
               <a:rPr lang="en-US" sz="1900">
                 <a:solidFill>
                   <a:schemeClr val="dk1"/>
                 </a:solidFill>
               </a:rPr>
-              <a:t> program, ensuring that its movements remained steady and repeatable while the SLAM algorithms captured LiDAR data. This approach provided a controlled environment for generating reliable mapping results and improved the overall precision of the comparison between Cartographer and SLAM Toolbox.</a:t>
+              <a:t>Each point (xᵢ, yᵢ) represents a </a:t>
+            </a:r>
+            <a:r>
+              <a:rPr lang="en-US" sz="1900">
+                <a:solidFill>
+                  <a:schemeClr val="dk1"/>
+                </a:solidFill>
+              </a:rPr>
+              <a:t>feature</a:t>
+            </a:r>
+            <a:r>
+              <a:rPr lang="en-US" sz="1900">
+                <a:solidFill>
+                  <a:schemeClr val="dk1"/>
+                </a:solidFill>
+              </a:rPr>
+              <a:t> location (e.g., wall or trunk) in the generated map.</a:t>
             </a:r>
             <a:endParaRPr sz="1900">
               <a:solidFill>
@@ -6282,20 +6463,45 @@
             </a:endParaRPr>
           </a:p>
           <a:p>
-            <a:pPr indent="0" lvl="0" marL="914400" marR="0" rtl="0" algn="l">
-              <a:lnSpc>
-                <a:spcPct val="100000"/>
-              </a:lnSpc>
-              <a:spcBef>
-                <a:spcPts val="0"/>
-              </a:spcBef>
-              <a:spcAft>
-                <a:spcPts val="0"/>
-              </a:spcAft>
-              <a:buNone/>
-            </a:pPr>
-            <a:r>
-              <a:t/>
+            <a:pPr indent="-349250" lvl="0" marL="914400" marR="0" rtl="0" algn="l">
+              <a:lnSpc>
+                <a:spcPct val="100000"/>
+              </a:lnSpc>
+              <a:spcBef>
+                <a:spcPts val="0"/>
+              </a:spcBef>
+              <a:spcAft>
+                <a:spcPts val="0"/>
+              </a:spcAft>
+              <a:buClr>
+                <a:schemeClr val="dk1"/>
+              </a:buClr>
+              <a:buSzPts val="1900"/>
+              <a:buChar char="❏"/>
+            </a:pPr>
+            <a:r>
+              <a:rPr lang="en-US" sz="1900">
+                <a:solidFill>
+                  <a:schemeClr val="dk1"/>
+                </a:solidFill>
+              </a:rPr>
+              <a:t>Each (xᵢᴳᵀ, yᵢᴳᵀ) represents the corresponding </a:t>
+            </a:r>
+            <a:r>
+              <a:rPr lang="en-US" sz="1900">
+                <a:solidFill>
+                  <a:schemeClr val="dk1"/>
+                </a:solidFill>
+              </a:rPr>
+              <a:t>feature</a:t>
+            </a:r>
+            <a:r>
+              <a:rPr lang="en-US" sz="1900">
+                <a:solidFill>
+                  <a:schemeClr val="dk1"/>
+                </a:solidFill>
+              </a:rPr>
+              <a:t> position in the ground-truth map.</a:t>
             </a:r>
             <a:endParaRPr sz="1900">
               <a:solidFill>
@@ -6304,224 +6510,115 @@
             </a:endParaRPr>
           </a:p>
           <a:p>
-            <a:pPr indent="-349250" lvl="1" marL="914400" marR="0" rtl="0" algn="l">
-              <a:lnSpc>
-                <a:spcPct val="100000"/>
-              </a:lnSpc>
-              <a:spcBef>
-                <a:spcPts val="0"/>
-              </a:spcBef>
-              <a:spcAft>
-                <a:spcPts val="0"/>
-              </a:spcAft>
+            <a:pPr indent="-349250" lvl="0" marL="914400" marR="0" rtl="0" algn="l">
+              <a:lnSpc>
+                <a:spcPct val="100000"/>
+              </a:lnSpc>
+              <a:spcBef>
+                <a:spcPts val="0"/>
+              </a:spcBef>
+              <a:spcAft>
+                <a:spcPts val="0"/>
+              </a:spcAft>
+              <a:buClr>
+                <a:schemeClr val="dk1"/>
+              </a:buClr>
               <a:buSzPts val="1900"/>
-              <a:buChar char="❑"/>
-            </a:pPr>
-            <a:r>
-              <a:rPr lang="en-US" sz="1900"/>
-              <a:t>To successfully launch and operate both SLAM systems, several ROS2 packages and nodes were required to coordinate sensor data, motion control, and map visualization. The turtlebot3_bringup package was first launched to initialize the robot’s sensors, motors, and LiDAR scanner, providing access to essential topics such as /scan, /odom, and /cmd_vel. </a:t>
-            </a:r>
-            <a:endParaRPr sz="1900"/>
-          </a:p>
-          <a:p>
-            <a:pPr indent="0" lvl="0" marL="914400" marR="0" rtl="0" algn="l">
-              <a:lnSpc>
-                <a:spcPct val="100000"/>
-              </a:lnSpc>
-              <a:spcBef>
-                <a:spcPts val="0"/>
-              </a:spcBef>
-              <a:spcAft>
-                <a:spcPts val="0"/>
-              </a:spcAft>
-              <a:buNone/>
-            </a:pPr>
-            <a:r>
-              <a:t/>
-            </a:r>
-            <a:endParaRPr sz="1900"/>
-          </a:p>
-          <a:p>
-            <a:pPr indent="-349250" lvl="1" marL="914400" marR="0" rtl="0" algn="l">
-              <a:lnSpc>
-                <a:spcPct val="100000"/>
-              </a:lnSpc>
-              <a:spcBef>
-                <a:spcPts val="0"/>
-              </a:spcBef>
-              <a:spcAft>
-                <a:spcPts val="0"/>
-              </a:spcAft>
+              <a:buChar char="❏"/>
+            </a:pPr>
+            <a:r>
+              <a:rPr lang="en-US" sz="1900">
+                <a:solidFill>
+                  <a:schemeClr val="dk1"/>
+                </a:solidFill>
+              </a:rPr>
+              <a:t>The term inside the square root measures the Euclidean distance between estimated and true positions.</a:t>
+            </a:r>
+            <a:endParaRPr sz="1900">
+              <a:solidFill>
+                <a:schemeClr val="dk1"/>
+              </a:solidFill>
+            </a:endParaRPr>
+          </a:p>
+          <a:p>
+            <a:pPr indent="-349250" lvl="0" marL="914400" marR="0" rtl="0" algn="l">
+              <a:lnSpc>
+                <a:spcPct val="100000"/>
+              </a:lnSpc>
+              <a:spcBef>
+                <a:spcPts val="0"/>
+              </a:spcBef>
+              <a:spcAft>
+                <a:spcPts val="0"/>
+              </a:spcAft>
+              <a:buClr>
+                <a:schemeClr val="dk1"/>
+              </a:buClr>
               <a:buSzPts val="1900"/>
-              <a:buChar char="❑"/>
-            </a:pPr>
-            <a:r>
-              <a:rPr lang="en-US" sz="1900"/>
-              <a:t>The turtlebot3_description package supplied the robot’s URDF model, ensuring that sensor placement and frame transformations were accurately represented during mapping. </a:t>
-            </a:r>
-            <a:endParaRPr sz="1900"/>
-          </a:p>
-          <a:p>
-            <a:pPr indent="0" lvl="0" marL="914400" marR="0" rtl="0" algn="l">
-              <a:lnSpc>
-                <a:spcPct val="100000"/>
-              </a:lnSpc>
-              <a:spcBef>
-                <a:spcPts val="0"/>
-              </a:spcBef>
-              <a:spcAft>
-                <a:spcPts val="0"/>
-              </a:spcAft>
-              <a:buNone/>
-            </a:pPr>
-            <a:r>
-              <a:t/>
-            </a:r>
-            <a:endParaRPr sz="1900"/>
-          </a:p>
-          <a:p>
-            <a:pPr indent="-349250" lvl="1" marL="914400" marR="0" rtl="0" algn="l">
-              <a:lnSpc>
-                <a:spcPct val="100000"/>
-              </a:lnSpc>
-              <a:spcBef>
-                <a:spcPts val="0"/>
-              </a:spcBef>
-              <a:spcAft>
-                <a:spcPts val="0"/>
-              </a:spcAft>
+              <a:buChar char="❏"/>
+            </a:pPr>
+            <a:r>
+              <a:rPr lang="en-US" sz="1900">
+                <a:solidFill>
+                  <a:schemeClr val="dk1"/>
+                </a:solidFill>
+              </a:rPr>
+              <a:t>Dividing by N, the total number of points, gives the average positional deviation across the entire map.</a:t>
+            </a:r>
+            <a:endParaRPr sz="1900">
+              <a:solidFill>
+                <a:schemeClr val="dk1"/>
+              </a:solidFill>
+            </a:endParaRPr>
+          </a:p>
+          <a:p>
+            <a:pPr indent="-349250" lvl="0" marL="914400" marR="0" rtl="0" algn="l">
+              <a:lnSpc>
+                <a:spcPct val="100000"/>
+              </a:lnSpc>
+              <a:spcBef>
+                <a:spcPts val="0"/>
+              </a:spcBef>
+              <a:spcAft>
+                <a:spcPts val="0"/>
+              </a:spcAft>
+              <a:buClr>
+                <a:schemeClr val="dk1"/>
+              </a:buClr>
               <a:buSzPts val="1900"/>
-              <a:buChar char="❑"/>
-            </a:pPr>
-            <a:r>
-              <a:rPr lang="en-US" sz="1900"/>
-              <a:t>For SLAM Toolbox, the slam_toolbox_bringup package was used to start the main SLAM node responsible for real-time scan matching and pose graph optimization. </a:t>
-            </a:r>
-            <a:endParaRPr sz="1900"/>
-          </a:p>
-          <a:p>
-            <a:pPr indent="0" lvl="0" marL="914400" marR="0" rtl="0" algn="l">
-              <a:lnSpc>
-                <a:spcPct val="100000"/>
-              </a:lnSpc>
-              <a:spcBef>
-                <a:spcPts val="0"/>
-              </a:spcBef>
-              <a:spcAft>
-                <a:spcPts val="0"/>
-              </a:spcAft>
-              <a:buNone/>
-            </a:pPr>
-            <a:r>
-              <a:t/>
-            </a:r>
-            <a:endParaRPr sz="1900"/>
-          </a:p>
-          <a:p>
-            <a:pPr indent="-349250" lvl="1" marL="914400" marR="0" rtl="0" algn="l">
-              <a:lnSpc>
-                <a:spcPct val="100000"/>
-              </a:lnSpc>
-              <a:spcBef>
-                <a:spcPts val="0"/>
-              </a:spcBef>
-              <a:spcAft>
-                <a:spcPts val="0"/>
-              </a:spcAft>
-              <a:buSzPts val="1900"/>
-              <a:buChar char="❑"/>
-            </a:pPr>
-            <a:r>
-              <a:rPr lang="en-US" sz="1900"/>
-              <a:t>Cartographer relied on the cartographer_ros and cartographer_bringup packages to initialize its 2D SLAM node and occupancy grid conversion node, which together built and visualized the map. </a:t>
-            </a:r>
-            <a:endParaRPr sz="1900"/>
-          </a:p>
-          <a:p>
-            <a:pPr indent="0" lvl="0" marL="914400" marR="0" rtl="0" algn="l">
-              <a:lnSpc>
-                <a:spcPct val="100000"/>
-              </a:lnSpc>
-              <a:spcBef>
-                <a:spcPts val="0"/>
-              </a:spcBef>
-              <a:spcAft>
-                <a:spcPts val="0"/>
-              </a:spcAft>
-              <a:buNone/>
-            </a:pPr>
-            <a:r>
-              <a:t/>
-            </a:r>
-            <a:endParaRPr sz="1900"/>
-          </a:p>
-          <a:p>
-            <a:pPr indent="-349250" lvl="1" marL="914400" marR="0" rtl="0" algn="l">
-              <a:lnSpc>
-                <a:spcPct val="100000"/>
-              </a:lnSpc>
-              <a:spcBef>
-                <a:spcPts val="0"/>
-              </a:spcBef>
-              <a:spcAft>
-                <a:spcPts val="0"/>
-              </a:spcAft>
-              <a:buSzPts val="1900"/>
-              <a:buChar char="❑"/>
-            </a:pPr>
-            <a:r>
-              <a:rPr lang="en-US" sz="1900"/>
-              <a:t>RViz 2</a:t>
-            </a:r>
-            <a:r>
-              <a:rPr lang="en-US" sz="1900"/>
-              <a:t> served as the visualization tool, allowing live observation of LiDAR data and the evolving occupancy grid maps. Together, these packages and nodes enabled the </a:t>
-            </a:r>
-            <a:r>
-              <a:rPr lang="en-US" sz="1900"/>
-              <a:t>TurtleBot 3</a:t>
-            </a:r>
-            <a:r>
-              <a:rPr lang="en-US" sz="1900"/>
-              <a:t> to navigate, collect sensor data, and generate comparable maps for both SLAM algorithms under identical experimental conditions.</a:t>
-            </a:r>
-            <a:endParaRPr sz="1900"/>
-          </a:p>
-          <a:p>
-            <a:pPr indent="0" lvl="0" marL="0" marR="0" rtl="0" algn="l">
-              <a:lnSpc>
-                <a:spcPct val="100000"/>
-              </a:lnSpc>
-              <a:spcBef>
-                <a:spcPts val="0"/>
-              </a:spcBef>
-              <a:spcAft>
-                <a:spcPts val="0"/>
-              </a:spcAft>
-              <a:buNone/>
-            </a:pPr>
-            <a:r>
-              <a:t/>
-            </a:r>
-            <a:endParaRPr sz="3200"/>
-          </a:p>
-          <a:p>
-            <a:pPr indent="0" lvl="0" marL="0" marR="0" rtl="0" algn="l">
-              <a:lnSpc>
-                <a:spcPct val="100000"/>
-              </a:lnSpc>
-              <a:spcBef>
-                <a:spcPts val="0"/>
-              </a:spcBef>
-              <a:spcAft>
-                <a:spcPts val="0"/>
-              </a:spcAft>
-              <a:buNone/>
-            </a:pPr>
-            <a:r>
-              <a:t/>
-            </a:r>
-            <a:endParaRPr b="0" i="0" sz="3200" u="none" cap="none" strike="noStrike">
+              <a:buChar char="❏"/>
+            </a:pPr>
+            <a:r>
+              <a:rPr lang="en-US" sz="1900">
+                <a:solidFill>
+                  <a:schemeClr val="dk1"/>
+                </a:solidFill>
+              </a:rPr>
+              <a:t>Smaller eₘ values indicate a more accurate and consistent SLAM-generated map.</a:t>
+            </a:r>
+            <a:endParaRPr sz="1900">
+              <a:solidFill>
+                <a:schemeClr val="dk1"/>
+              </a:solidFill>
+            </a:endParaRPr>
+          </a:p>
+          <a:p>
+            <a:pPr indent="0" lvl="0" marL="0" marR="0" rtl="0" algn="l">
+              <a:lnSpc>
+                <a:spcPct val="100000"/>
+              </a:lnSpc>
+              <a:spcBef>
+                <a:spcPts val="0"/>
+              </a:spcBef>
+              <a:spcAft>
+                <a:spcPts val="0"/>
+              </a:spcAft>
+              <a:buNone/>
+            </a:pPr>
+            <a:r>
+              <a:t/>
+            </a:r>
+            <a:endParaRPr b="0" i="0" sz="1900" u="none" cap="none" strike="noStrike">
               <a:solidFill>
                 <a:srgbClr val="000000"/>
               </a:solidFill>
@@ -6547,7 +6644,7 @@
             <a:r>
               <a:t/>
             </a:r>
-            <a:endParaRPr b="0" i="0" sz="3200" u="none" cap="none" strike="noStrike">
+            <a:endParaRPr b="0" i="0" sz="1900" u="none" cap="none" strike="noStrike">
               <a:solidFill>
                 <a:srgbClr val="000000"/>
               </a:solidFill>
@@ -7691,7 +7788,7 @@
             </a:endParaRPr>
           </a:p>
           <a:p>
-            <a:pPr indent="-374650" lvl="1" marL="914400" marR="0" rtl="0" algn="l">
+            <a:pPr indent="-425450" lvl="1" marL="914400" marR="0" rtl="0" algn="l">
               <a:lnSpc>
                 <a:spcPct val="100000"/>
               </a:lnSpc>
@@ -7704,48 +7801,186 @@
               <a:buClr>
                 <a:srgbClr val="000000"/>
               </a:buClr>
-              <a:buSzPts val="1900"/>
+              <a:buSzPts val="2700"/>
               <a:buFont typeface="Noto Sans Symbols"/>
               <a:buChar char="❑"/>
             </a:pPr>
+            <a:r>
+              <a:rPr b="1" lang="en-US" sz="1900">
+                <a:solidFill>
+                  <a:schemeClr val="dk1"/>
+                </a:solidFill>
+              </a:rPr>
+              <a:t>Li &amp; Zhu (2024)</a:t>
+            </a:r>
             <a:r>
               <a:rPr lang="en-US" sz="1900">
                 <a:solidFill>
                   <a:schemeClr val="dk1"/>
                 </a:solidFill>
               </a:rPr>
-              <a:t>Over the summer, I expanded on this research by experimenting with another SLAM framework known as TinySLAM. During this phase, I conducted additional mapping tests and used Python’s Matplotlib library to visualize the LiDAR sensor data collected from the robot. This helped me better understand how different SLAM algorithms interpret spatial information and generate maps in real time.</a:t>
-            </a:r>
-            <a:endParaRPr i="0" sz="1900" u="none" cap="none" strike="noStrike">
-              <a:solidFill>
-                <a:srgbClr val="000000"/>
-              </a:solidFill>
-            </a:endParaRPr>
-          </a:p>
-          <a:p>
-            <a:pPr indent="0" lvl="0" marL="0" marR="0" rtl="0" algn="l">
-              <a:lnSpc>
-                <a:spcPct val="100000"/>
-              </a:lnSpc>
-              <a:spcBef>
-                <a:spcPts val="0"/>
-              </a:spcBef>
-              <a:spcAft>
-                <a:spcPts val="0"/>
-              </a:spcAft>
-              <a:buNone/>
-            </a:pPr>
-            <a:r>
-              <a:t/>
-            </a:r>
-            <a:endParaRPr b="0" i="0" sz="3200" u="none" cap="none" strike="noStrike">
-              <a:solidFill>
-                <a:srgbClr val="000000"/>
-              </a:solidFill>
-              <a:latin typeface="Arial"/>
-              <a:ea typeface="Arial"/>
-              <a:cs typeface="Arial"/>
-              <a:sym typeface="Arial"/>
+              <a:t> evaluated three 2D LiDAR SLAM algorithms Hector, GMapping, and Cartographer n simulated orchard environments using Gazebo.</a:t>
+            </a:r>
+            <a:endParaRPr sz="1900">
+              <a:solidFill>
+                <a:schemeClr val="dk1"/>
+              </a:solidFill>
+            </a:endParaRPr>
+          </a:p>
+          <a:p>
+            <a:pPr indent="-349250" lvl="2" marL="1371600" marR="0" rtl="0" algn="l">
+              <a:lnSpc>
+                <a:spcPct val="100000"/>
+              </a:lnSpc>
+              <a:spcBef>
+                <a:spcPts val="0"/>
+              </a:spcBef>
+              <a:spcAft>
+                <a:spcPts val="0"/>
+              </a:spcAft>
+              <a:buClr>
+                <a:schemeClr val="dk1"/>
+              </a:buClr>
+              <a:buSzPts val="1900"/>
+              <a:buChar char="■"/>
+            </a:pPr>
+            <a:r>
+              <a:rPr lang="en-US" sz="1900">
+                <a:solidFill>
+                  <a:schemeClr val="dk1"/>
+                </a:solidFill>
+              </a:rPr>
+              <a:t>Cartographer achieved the best localization and mapping accuracy (≈ 8 cm error at 4 cm resolution) but required more CPU and memory.</a:t>
+            </a:r>
+            <a:endParaRPr sz="1900">
+              <a:solidFill>
+                <a:schemeClr val="dk1"/>
+              </a:solidFill>
+            </a:endParaRPr>
+          </a:p>
+          <a:p>
+            <a:pPr indent="-349250" lvl="2" marL="1371600" marR="0" rtl="0" algn="l">
+              <a:lnSpc>
+                <a:spcPct val="100000"/>
+              </a:lnSpc>
+              <a:spcBef>
+                <a:spcPts val="0"/>
+              </a:spcBef>
+              <a:spcAft>
+                <a:spcPts val="0"/>
+              </a:spcAft>
+              <a:buClr>
+                <a:schemeClr val="dk1"/>
+              </a:buClr>
+              <a:buSzPts val="1900"/>
+              <a:buChar char="■"/>
+            </a:pPr>
+            <a:r>
+              <a:rPr lang="en-US" sz="1900">
+                <a:solidFill>
+                  <a:schemeClr val="dk1"/>
+                </a:solidFill>
+              </a:rPr>
+              <a:t>The paper’s findings established a controlled simulation framework and performance metrics (localization error RMSE, mapping error MAE, CPU/memory usage) that serve as a standard benchmark for later SLAM comparisons.</a:t>
+            </a:r>
+            <a:endParaRPr sz="1900">
+              <a:solidFill>
+                <a:schemeClr val="dk1"/>
+              </a:solidFill>
+            </a:endParaRPr>
+          </a:p>
+          <a:p>
+            <a:pPr indent="-349250" lvl="1" marL="914400" marR="0" rtl="0" algn="l">
+              <a:lnSpc>
+                <a:spcPct val="100000"/>
+              </a:lnSpc>
+              <a:spcBef>
+                <a:spcPts val="0"/>
+              </a:spcBef>
+              <a:spcAft>
+                <a:spcPts val="0"/>
+              </a:spcAft>
+              <a:buClr>
+                <a:schemeClr val="dk1"/>
+              </a:buClr>
+              <a:buSzPts val="1900"/>
+              <a:buChar char="❑"/>
+            </a:pPr>
+            <a:r>
+              <a:rPr lang="en-US" sz="1900">
+                <a:solidFill>
+                  <a:schemeClr val="dk1"/>
+                </a:solidFill>
+              </a:rPr>
+              <a:t>This project builds directly on Li &amp; Zhu’s work, applying their evaluation approach to real-world </a:t>
+            </a:r>
+            <a:r>
+              <a:rPr lang="en-US" sz="1900">
+                <a:solidFill>
+                  <a:schemeClr val="dk1"/>
+                </a:solidFill>
+              </a:rPr>
+              <a:t>TurtleBot 3</a:t>
+            </a:r>
+            <a:r>
+              <a:rPr lang="en-US" sz="1900">
+                <a:solidFill>
+                  <a:schemeClr val="dk1"/>
+                </a:solidFill>
+              </a:rPr>
+              <a:t> experiments in ROS 2, comparing SLAM Toolbox and Cartographer under identical maze conditions.</a:t>
+            </a:r>
+            <a:endParaRPr sz="1900">
+              <a:solidFill>
+                <a:schemeClr val="dk1"/>
+              </a:solidFill>
+            </a:endParaRPr>
+          </a:p>
+          <a:p>
+            <a:pPr indent="-349250" lvl="1" marL="914400" marR="0" rtl="0" algn="l">
+              <a:lnSpc>
+                <a:spcPct val="100000"/>
+              </a:lnSpc>
+              <a:spcBef>
+                <a:spcPts val="0"/>
+              </a:spcBef>
+              <a:spcAft>
+                <a:spcPts val="0"/>
+              </a:spcAft>
+              <a:buClr>
+                <a:schemeClr val="dk1"/>
+              </a:buClr>
+              <a:buSzPts val="1900"/>
+              <a:buChar char="❑"/>
+            </a:pPr>
+            <a:r>
+              <a:rPr lang="en-US" sz="1900">
+                <a:solidFill>
+                  <a:schemeClr val="dk1"/>
+                </a:solidFill>
+              </a:rPr>
+              <a:t>Over the summer, I expanded the research by experimenting with an additional framework, TinySLAM, to observe how lightweight, scan-matching-based algorithms handle real-time mapping. Using </a:t>
+            </a:r>
+            <a:r>
+              <a:rPr lang="en-US" sz="1900">
+                <a:solidFill>
+                  <a:schemeClr val="dk1"/>
+                </a:solidFill>
+              </a:rPr>
+              <a:t>Python</a:t>
+            </a:r>
+            <a:r>
+              <a:rPr lang="en-US" sz="1900">
+                <a:solidFill>
+                  <a:schemeClr val="dk1"/>
+                </a:solidFill>
+              </a:rPr>
+              <a:t> Matplotlib, I visualized raw LiDAR data to better understand how different SLAM algorithms interpret spatial information and generate occupancy grids in real time.</a:t>
+            </a:r>
+            <a:endParaRPr sz="1900">
+              <a:solidFill>
+                <a:schemeClr val="dk1"/>
+              </a:solidFill>
             </a:endParaRPr>
           </a:p>
           <a:p>
@@ -7990,9 +8225,9 @@
             </a:endParaRPr>
           </a:p>
           <a:p>
-            <a:pPr indent="457200" lvl="0" marL="0" rtl="0" algn="l">
-              <a:lnSpc>
-                <a:spcPct val="150000"/>
+            <a:pPr indent="0" lvl="0" marL="0" marR="0" rtl="0" algn="l">
+              <a:lnSpc>
+                <a:spcPct val="100000"/>
               </a:lnSpc>
               <a:spcBef>
                 <a:spcPts val="0"/>
@@ -8004,14 +8239,32 @@
             </a:pPr>
             <a:r>
               <a:rPr lang="en-US" sz="1900"/>
-              <a:t>The comparative analysis between Cartographer and SLAM Toolbox revealed that while both algorithms are capable of generating consistent maps, their approaches to spatial reconstruction differ in accuracy and structure. SLAM Toolbox demonstrated stronger local precision, capturing sharper edges and more geometrically accurate outlines of smaller features such as Boxes 2 and 4. This finding suggests that its pose-graph optimization technique provides higher fidelity in local scan alignment, especially when LiDAR reflections occur at short ranges.</a:t>
+              <a:t>The quantitative analysis further reinforces the visual findings: SLAM Toolbox achieved a lower mean map error of 18.19 px (≈ 94.56 cm) compared to Cartographer’s 32.46 px (≈ 162.29 cm), indicating substantially higher geometric precision relative to the ground-truth maze. This difference highlights SLAM Toolbox’s stronger local accuracy and its ability to preserve wall geometry during mapping, even when operating in confined environments with close-range LiDAR reflections.</a:t>
             </a:r>
             <a:endParaRPr sz="1900"/>
           </a:p>
           <a:p>
-            <a:pPr indent="457200" lvl="0" marL="0" rtl="0" algn="l">
-              <a:lnSpc>
-                <a:spcPct val="150000"/>
+            <a:pPr indent="0" lvl="0" marL="0" marR="0" rtl="0" algn="l">
+              <a:lnSpc>
+                <a:spcPct val="100000"/>
+              </a:lnSpc>
+              <a:spcBef>
+                <a:spcPts val="0"/>
+              </a:spcBef>
+              <a:spcAft>
+                <a:spcPts val="0"/>
+              </a:spcAft>
+              <a:buNone/>
+            </a:pPr>
+            <a:r>
+              <a:t/>
+            </a:r>
+            <a:endParaRPr sz="1900"/>
+          </a:p>
+          <a:p>
+            <a:pPr indent="0" lvl="0" marL="0" marR="0" rtl="0" algn="l">
+              <a:lnSpc>
+                <a:spcPct val="100000"/>
               </a:lnSpc>
               <a:spcBef>
                 <a:spcPts val="0"/>
@@ -8023,14 +8276,32 @@
             </a:pPr>
             <a:r>
               <a:rPr lang="en-US" sz="1900"/>
-              <a:t>Cartographer, on the other hand, produced smoother and more visually continuous maps. However, this global consistency came at the cost of over-generalizing small structures, resulting in larger percent errors for compact features. The algorithm’s scan-matching and loop-closure heuristics emphasize global map cohesion, which can cause rounding effects in confined spaces.</a:t>
+              <a:t>The correlation coefficients (0.068 for SLAM Toolbox vs –0.020 for Cartographer) suggest that the Toolbox’s output maintains slightly better spatial agreement with the ground truth, whereas Cartographer’s results diverge more in localized regions. These findings align with the qualitative observation that SLAM Toolbox produces sharper, better-defined boundaries, while Cartographer favors globally smooth but less detailed reconstructions.</a:t>
             </a:r>
             <a:endParaRPr sz="1900"/>
           </a:p>
           <a:p>
-            <a:pPr indent="457200" lvl="0" marL="0" rtl="0" algn="l">
-              <a:lnSpc>
-                <a:spcPct val="150000"/>
+            <a:pPr indent="0" lvl="0" marL="0" marR="0" rtl="0" algn="l">
+              <a:lnSpc>
+                <a:spcPct val="100000"/>
+              </a:lnSpc>
+              <a:spcBef>
+                <a:spcPts val="0"/>
+              </a:spcBef>
+              <a:spcAft>
+                <a:spcPts val="0"/>
+              </a:spcAft>
+              <a:buNone/>
+            </a:pPr>
+            <a:r>
+              <a:t/>
+            </a:r>
+            <a:endParaRPr sz="1900"/>
+          </a:p>
+          <a:p>
+            <a:pPr indent="0" lvl="0" marL="0" marR="0" rtl="0" algn="l">
+              <a:lnSpc>
+                <a:spcPct val="100000"/>
               </a:lnSpc>
               <a:spcBef>
                 <a:spcPts val="0"/>
@@ -8042,27 +8313,9 @@
             </a:pPr>
             <a:r>
               <a:rPr lang="en-US" sz="1900"/>
-              <a:t>In conclusion, every effort was made to minimize experimental error during data collection. The maze was hand-constructed, and the robot was manually guided along a fixed path marked with painter’s tape to maintain consistent distance from the walls during mapping. While small variations in driving precision and manual measurement may have introduced minor errors in the recorded dimensions, these discrepancies were minimal compared to the clear performance differences observed between the two SLAM algorithms.</a:t>
+              <a:t>Overall, the results confirm that algorithmic design trade-offs directly affect mapping fidelity. Cartographer’s smoothing heuristics promote global continuity but can blur finer structures, whereas SLAM Toolbox’s pose-graph optimization preserves local accuracy. The improved error computation and fine-alignment overlay introduced in this study provide a more objective framework for comparing SLAM performance, offering a reproducible method for future evaluations of mapping accuracy in ROS-based robotic systems.</a:t>
             </a:r>
             <a:endParaRPr sz="1900"/>
-          </a:p>
-          <a:p>
-            <a:pPr indent="0" lvl="0" marL="0" marR="0" rtl="0" algn="l">
-              <a:lnSpc>
-                <a:spcPct val="100000"/>
-              </a:lnSpc>
-              <a:spcBef>
-                <a:spcPts val="0"/>
-              </a:spcBef>
-              <a:spcAft>
-                <a:spcPts val="0"/>
-              </a:spcAft>
-              <a:buNone/>
-            </a:pPr>
-            <a:r>
-              <a:t/>
-            </a:r>
-            <a:endParaRPr sz="3200"/>
           </a:p>
           <a:p>
             <a:pPr indent="0" lvl="0" marL="0" marR="0" rtl="0" algn="l">
@@ -8176,7 +8429,7 @@
             </a:endParaRPr>
           </a:p>
           <a:p>
-            <a:pPr indent="-349250" lvl="0" marL="457200" marR="0" rtl="0" algn="l">
+            <a:pPr indent="-317500" lvl="0" marL="457200" marR="0" rtl="0" algn="l">
               <a:lnSpc>
                 <a:spcPct val="100000"/>
               </a:lnSpc>
@@ -8189,16 +8442,16 @@
               <a:buClr>
                 <a:srgbClr val="000000"/>
               </a:buClr>
-              <a:buSzPts val="1900"/>
+              <a:buSzPts val="1400"/>
               <a:buFont typeface="Arial"/>
               <a:buChar char="❏"/>
             </a:pPr>
             <a:r>
-              <a:rPr lang="en-US" sz="1900"/>
+              <a:rPr lang="en-US"/>
               <a:t>ROBOTIS. (n.d.). TurtleBot3 quick start guide. ROBOTIS e-Manual. Retrieved November 2, 2025, from </a:t>
             </a:r>
             <a:r>
-              <a:rPr lang="en-US" sz="1900" u="sng">
+              <a:rPr lang="en-US" u="sng">
                 <a:solidFill>
                   <a:schemeClr val="hlink"/>
                 </a:solidFill>
@@ -8206,28 +8459,28 @@
               </a:rPr>
               <a:t>https://emanual.robotis.com/docs/en/platform/turtlebot3/quick-start/</a:t>
             </a:r>
-            <a:endParaRPr sz="1900"/>
-          </a:p>
-          <a:p>
-            <a:pPr indent="-349250" lvl="0" marL="457200" marR="0" rtl="0" algn="l">
-              <a:lnSpc>
-                <a:spcPct val="100000"/>
-              </a:lnSpc>
-              <a:spcBef>
-                <a:spcPts val="0"/>
-              </a:spcBef>
-              <a:spcAft>
-                <a:spcPts val="0"/>
-              </a:spcAft>
-              <a:buSzPts val="1900"/>
+            <a:endParaRPr/>
+          </a:p>
+          <a:p>
+            <a:pPr indent="-317500" lvl="0" marL="457200" marR="0" rtl="0" algn="l">
+              <a:lnSpc>
+                <a:spcPct val="100000"/>
+              </a:lnSpc>
+              <a:spcBef>
+                <a:spcPts val="0"/>
+              </a:spcBef>
+              <a:spcAft>
+                <a:spcPts val="0"/>
+              </a:spcAft>
+              <a:buSzPts val="1400"/>
               <a:buChar char="❏"/>
             </a:pPr>
             <a:r>
-              <a:rPr lang="en-US" sz="1900"/>
+              <a:rPr lang="en-US"/>
               <a:t>Articulated Robotics. (n.d.). Getting ready to build a ROS robot. Retrieved November 2, 2025, from </a:t>
             </a:r>
             <a:r>
-              <a:rPr lang="en-US" sz="1900" u="sng">
+              <a:rPr lang="en-US" u="sng">
                 <a:solidFill>
                   <a:schemeClr val="hlink"/>
                 </a:solidFill>
@@ -8236,10 +8489,30 @@
               <a:t>https://articulatedrobotics.xyz/category/getting-ready-to-build-a-ros-robot</a:t>
             </a:r>
             <a:r>
-              <a:rPr lang="en-US" sz="1900"/>
+              <a:rPr lang="en-US"/>
               <a:t> </a:t>
             </a:r>
-            <a:endParaRPr sz="1900"/>
+            <a:endParaRPr/>
+          </a:p>
+          <a:p>
+            <a:pPr indent="-317500" lvl="0" marL="457200" marR="0" rtl="0" algn="l">
+              <a:lnSpc>
+                <a:spcPct val="100000"/>
+              </a:lnSpc>
+              <a:spcBef>
+                <a:spcPts val="0"/>
+              </a:spcBef>
+              <a:spcAft>
+                <a:spcPts val="0"/>
+              </a:spcAft>
+              <a:buSzPts val="1400"/>
+              <a:buChar char="❏"/>
+            </a:pPr>
+            <a:r>
+              <a:rPr lang="en-US"/>
+              <a:t>Li, Q., &amp; Zhu, H. (2024). Performance evaluation of 2D LiDAR SLAM algorithms in simulated orchard environments. Computers and Electronics in Agriculture, 221, 108994. https://doi.org/10.1016/j.compag.2024.108994</a:t>
+            </a:r>
+            <a:endParaRPr/>
           </a:p>
           <a:p>
             <a:pPr indent="0" lvl="0" marL="457200" marR="0" rtl="0" algn="l">
@@ -8335,17 +8608,21 @@
             </a:endParaRPr>
           </a:p>
           <a:p>
-            <a:pPr indent="0" lvl="0" marL="457200" marR="0" rtl="0" algn="l">
-              <a:lnSpc>
-                <a:spcPct val="100000"/>
-              </a:lnSpc>
-              <a:spcBef>
-                <a:spcPts val="0"/>
-              </a:spcBef>
-              <a:spcAft>
-                <a:spcPts val="0"/>
-              </a:spcAft>
-              <a:buNone/>
+            <a:pPr indent="-349250" lvl="0" marL="914400" marR="0" rtl="0" algn="l">
+              <a:lnSpc>
+                <a:spcPct val="100000"/>
+              </a:lnSpc>
+              <a:spcBef>
+                <a:spcPts val="0"/>
+              </a:spcBef>
+              <a:spcAft>
+                <a:spcPts val="0"/>
+              </a:spcAft>
+              <a:buClr>
+                <a:schemeClr val="dk1"/>
+              </a:buClr>
+              <a:buSzPts val="1900"/>
+              <a:buChar char="❏"/>
             </a:pPr>
             <a:r>
               <a:rPr lang="en-US" sz="1900">
@@ -8353,7 +8630,131 @@
                   <a:schemeClr val="dk1"/>
                 </a:solidFill>
               </a:rPr>
-              <a:t>The primary problem addressed in this project is determining which SLAM (Simultaneous Localization and Mapping) algorithm Cartographer or SLAM Toolbox produces more accurate and consistent maps under identical conditions. Both algorithms are widely used for autonomous navigation but often yield different results depending on factors such as sensor noise environment environment geometry. These variations can directly affect a robot’s ability to localize itself and navigate efficiently. Therefore, this study formulates the problem as a comparative analysis of mapping accuracy, reliability, and structural consistency between the two SLAM systems. By using a controlled maze environment with fixed ground-truth measurements, the experiment aims to quantify the deviations between generated maps and real-world dimensions, ultimately identifying which algorithm provides more precise geometric representation and better overall performance for </a:t>
+              <a:t>The study compares Cartographer and SLAM Toolbox to determine which SLAM algorithm generates more accurate and consistent maps under identical conditions.</a:t>
+            </a:r>
+            <a:endParaRPr sz="1900">
+              <a:solidFill>
+                <a:schemeClr val="dk1"/>
+              </a:solidFill>
+            </a:endParaRPr>
+          </a:p>
+          <a:p>
+            <a:pPr indent="-349250" lvl="0" marL="914400" marR="0" rtl="0" algn="l">
+              <a:lnSpc>
+                <a:spcPct val="100000"/>
+              </a:lnSpc>
+              <a:spcBef>
+                <a:spcPts val="0"/>
+              </a:spcBef>
+              <a:spcAft>
+                <a:spcPts val="0"/>
+              </a:spcAft>
+              <a:buClr>
+                <a:schemeClr val="dk1"/>
+              </a:buClr>
+              <a:buSzPts val="1900"/>
+              <a:buChar char="❏"/>
+            </a:pPr>
+            <a:r>
+              <a:rPr lang="en-US" sz="1900">
+                <a:solidFill>
+                  <a:schemeClr val="dk1"/>
+                </a:solidFill>
+              </a:rPr>
+              <a:t>Although both are widely used for autonomous navigation, performance differences arise from sensor noise, environment geometry, and algorithm design.</a:t>
+            </a:r>
+            <a:endParaRPr sz="1900">
+              <a:solidFill>
+                <a:schemeClr val="dk1"/>
+              </a:solidFill>
+            </a:endParaRPr>
+          </a:p>
+          <a:p>
+            <a:pPr indent="-349250" lvl="0" marL="914400" marR="0" rtl="0" algn="l">
+              <a:lnSpc>
+                <a:spcPct val="100000"/>
+              </a:lnSpc>
+              <a:spcBef>
+                <a:spcPts val="0"/>
+              </a:spcBef>
+              <a:spcAft>
+                <a:spcPts val="0"/>
+              </a:spcAft>
+              <a:buClr>
+                <a:schemeClr val="dk1"/>
+              </a:buClr>
+              <a:buSzPts val="1900"/>
+              <a:buChar char="❏"/>
+            </a:pPr>
+            <a:r>
+              <a:rPr lang="en-US" sz="1900">
+                <a:solidFill>
+                  <a:schemeClr val="dk1"/>
+                </a:solidFill>
+              </a:rPr>
+              <a:t>These variations directly influence a robot’s ability to localize and navigate effectively.</a:t>
+            </a:r>
+            <a:endParaRPr sz="1900">
+              <a:solidFill>
+                <a:schemeClr val="dk1"/>
+              </a:solidFill>
+            </a:endParaRPr>
+          </a:p>
+          <a:p>
+            <a:pPr indent="-349250" lvl="0" marL="914400" marR="0" rtl="0" algn="l">
+              <a:lnSpc>
+                <a:spcPct val="100000"/>
+              </a:lnSpc>
+              <a:spcBef>
+                <a:spcPts val="0"/>
+              </a:spcBef>
+              <a:spcAft>
+                <a:spcPts val="0"/>
+              </a:spcAft>
+              <a:buClr>
+                <a:schemeClr val="dk1"/>
+              </a:buClr>
+              <a:buSzPts val="1900"/>
+              <a:buChar char="❏"/>
+            </a:pPr>
+            <a:r>
+              <a:rPr lang="en-US" sz="1900">
+                <a:solidFill>
+                  <a:schemeClr val="dk1"/>
+                </a:solidFill>
+              </a:rPr>
+              <a:t>A controlled maze environment with fixed ground-truth dimensions was used to ensure fair testing and repeatable conditions.</a:t>
+            </a:r>
+            <a:endParaRPr sz="1900">
+              <a:solidFill>
+                <a:schemeClr val="dk1"/>
+              </a:solidFill>
+            </a:endParaRPr>
+          </a:p>
+          <a:p>
+            <a:pPr indent="-349250" lvl="0" marL="914400" marR="0" rtl="0" algn="l">
+              <a:lnSpc>
+                <a:spcPct val="100000"/>
+              </a:lnSpc>
+              <a:spcBef>
+                <a:spcPts val="0"/>
+              </a:spcBef>
+              <a:spcAft>
+                <a:spcPts val="0"/>
+              </a:spcAft>
+              <a:buClr>
+                <a:schemeClr val="dk1"/>
+              </a:buClr>
+              <a:buSzPts val="1900"/>
+              <a:buChar char="❏"/>
+            </a:pPr>
+            <a:r>
+              <a:rPr lang="en-US" sz="1900">
+                <a:solidFill>
+                  <a:schemeClr val="dk1"/>
+                </a:solidFill>
+              </a:rPr>
+              <a:t>The experiment quantifies mapping accuracy, reliability, and structural fidelity, identifying which algorithm provides superior geometric precision for the </a:t>
             </a:r>
             <a:r>
               <a:rPr lang="en-US" sz="1900">
@@ -8369,38 +8770,12 @@
                   <a:schemeClr val="dk1"/>
                 </a:solidFill>
               </a:rPr>
-              <a:t> applications.</a:t>
-            </a:r>
-            <a:endParaRPr i="0" sz="1900" u="none" cap="none" strike="noStrike">
-              <a:solidFill>
-                <a:srgbClr val="000000"/>
-              </a:solidFill>
-            </a:endParaRPr>
-          </a:p>
-          <a:p>
-            <a:pPr indent="0" lvl="0" marL="457200" marR="0" rtl="0" algn="l">
-              <a:lnSpc>
-                <a:spcPct val="100000"/>
-              </a:lnSpc>
-              <a:spcBef>
-                <a:spcPts val="0"/>
-              </a:spcBef>
-              <a:spcAft>
-                <a:spcPts val="0"/>
-              </a:spcAft>
-              <a:buNone/>
-            </a:pPr>
-            <a:r>
-              <a:t/>
-            </a:r>
-            <a:endParaRPr b="0" i="0" sz="3200" u="none" cap="none" strike="noStrike">
-              <a:solidFill>
-                <a:srgbClr val="000000"/>
-              </a:solidFill>
-              <a:latin typeface="Arial"/>
-              <a:ea typeface="Arial"/>
-              <a:cs typeface="Arial"/>
-              <a:sym typeface="Arial"/>
+              <a:t> platform.</a:t>
+            </a:r>
+            <a:endParaRPr sz="1900">
+              <a:solidFill>
+                <a:schemeClr val="dk1"/>
+              </a:solidFill>
             </a:endParaRPr>
           </a:p>
           <a:p>
@@ -8616,7 +8991,7 @@
       </p:pic>
       <p:pic>
         <p:nvPicPr>
-          <p:cNvPr id="30" name="Google Shape;30;p1" title="2025-11-02_15-05.png"/>
+          <p:cNvPr id="30" name="Google Shape;30;p1" title="turtlebot3_burger_components.png"/>
           <p:cNvPicPr preferRelativeResize="0"/>
           <p:nvPr/>
         </p:nvPicPr>
@@ -8630,8 +9005,8 @@
         </p:blipFill>
         <p:spPr>
           <a:xfrm>
-            <a:off x="2022162" y="6458675"/>
-            <a:ext cx="9002326" cy="5064700"/>
+            <a:off x="5148824" y="6458675"/>
+            <a:ext cx="2778616" cy="2544100"/>
           </a:xfrm>
           <a:prstGeom prst="rect">
             <a:avLst/>
@@ -8650,7 +9025,7 @@
       </p:pic>
       <p:pic>
         <p:nvPicPr>
-          <p:cNvPr id="31" name="Google Shape;31;p1" title="Screenshot from 2025-07-07 09-53-30.png"/>
+          <p:cNvPr id="31" name="Google Shape;31;p1" title="formula.png"/>
           <p:cNvPicPr preferRelativeResize="0"/>
           <p:nvPr/>
         </p:nvPicPr>
@@ -8664,14 +9039,14 @@
         </p:blipFill>
         <p:spPr>
           <a:xfrm>
-            <a:off x="2007837" y="19135925"/>
-            <a:ext cx="4787407" cy="2544100"/>
+            <a:off x="13428563" y="22316200"/>
+            <a:ext cx="10215875" cy="2133850"/>
           </a:xfrm>
           <a:prstGeom prst="rect">
             <a:avLst/>
           </a:prstGeom>
           <a:noFill/>
-          <a:ln cap="flat" cmpd="sng" w="9525">
+          <a:ln cap="flat" cmpd="sng" w="19050">
             <a:solidFill>
               <a:srgbClr val="595959"/>
             </a:solidFill>
@@ -8684,7 +9059,7 @@
       </p:pic>
       <p:pic>
         <p:nvPicPr>
-          <p:cNvPr id="32" name="Google Shape;32;p1" title="turtlebot3_burger_components.png"/>
+          <p:cNvPr id="32" name="Google Shape;32;p1" title="Black&amp;Wite_testEnv.png"/>
           <p:cNvPicPr preferRelativeResize="0"/>
           <p:nvPr/>
         </p:nvPicPr>
@@ -8698,14 +9073,76 @@
         </p:blipFill>
         <p:spPr>
           <a:xfrm>
-            <a:off x="8167324" y="19135925"/>
-            <a:ext cx="2778616" cy="2544100"/>
+            <a:off x="4087762" y="11940475"/>
+            <a:ext cx="4900750" cy="3267200"/>
           </a:xfrm>
           <a:prstGeom prst="rect">
             <a:avLst/>
           </a:prstGeom>
           <a:noFill/>
-          <a:ln cap="flat" cmpd="sng" w="9525">
+          <a:ln>
+            <a:noFill/>
+          </a:ln>
+        </p:spPr>
+      </p:pic>
+      <p:pic>
+        <p:nvPicPr>
+          <p:cNvPr id="33" name="Google Shape;33;p1" title="aligned_slam.png"/>
+          <p:cNvPicPr preferRelativeResize="0"/>
+          <p:nvPr/>
+        </p:nvPicPr>
+        <p:blipFill>
+          <a:blip r:embed="rId9">
+            <a:alphaModFix/>
+          </a:blip>
+          <a:stretch>
+            <a:fillRect/>
+          </a:stretch>
+        </p:blipFill>
+        <p:spPr>
+          <a:xfrm>
+            <a:off x="15981070" y="12447050"/>
+            <a:ext cx="4613515" cy="2837640"/>
+          </a:xfrm>
+          <a:prstGeom prst="rect">
+            <a:avLst/>
+          </a:prstGeom>
+          <a:noFill/>
+          <a:ln cap="flat" cmpd="sng" w="19050">
+            <a:solidFill>
+              <a:srgbClr val="595959"/>
+            </a:solidFill>
+            <a:prstDash val="solid"/>
+            <a:round/>
+            <a:headEnd len="sm" w="sm" type="none"/>
+            <a:tailEnd len="sm" w="sm" type="none"/>
+          </a:ln>
+        </p:spPr>
+      </p:pic>
+      <p:pic>
+        <p:nvPicPr>
+          <p:cNvPr id="34" name="Google Shape;34;p1" title="aligned_cartographer.png"/>
+          <p:cNvPicPr preferRelativeResize="0"/>
+          <p:nvPr/>
+        </p:nvPicPr>
+        <p:blipFill>
+          <a:blip r:embed="rId10">
+            <a:alphaModFix/>
+          </a:blip>
+          <a:stretch>
+            <a:fillRect/>
+          </a:stretch>
+        </p:blipFill>
+        <p:spPr>
+          <a:xfrm>
+            <a:off x="15981238" y="8939175"/>
+            <a:ext cx="4613500" cy="2933768"/>
+          </a:xfrm>
+          <a:prstGeom prst="rect">
+            <a:avLst/>
+          </a:prstGeom>
+          <a:noFill/>
+          <a:ln cap="flat" cmpd="sng" w="19050">
             <a:solidFill>
               <a:srgbClr val="595959"/>
             </a:solidFill>
@@ -8718,12 +9155,12 @@
       </p:pic>
       <p:graphicFrame>
         <p:nvGraphicFramePr>
-          <p:cNvPr id="33" name="Google Shape;33;p1"/>
+          <p:cNvPr id="35" name="Google Shape;35;p1"/>
           <p:cNvGraphicFramePr/>
           <p:nvPr/>
         </p:nvGraphicFramePr>
         <p:xfrm>
-          <a:off x="24623975" y="6321013"/>
+          <a:off x="24775350" y="6458675"/>
           <a:ext cx="3000000" cy="3000000"/>
         </p:xfrm>
         <a:graphic>
@@ -8731,17 +9168,15 @@
             <a:tbl>
               <a:tblPr>
                 <a:noFill/>
-                <a:tableStyleId>{7A4E7872-0812-4765-81A9-F5A6F7A6E2E7}</a:tableStyleId>
+                <a:tableStyleId>{45C8E1AD-17B0-4AE8-800A-B4D428C9FFEB}</a:tableStyleId>
               </a:tblPr>
               <a:tblGrid>
-                <a:gridCol w="1847525"/>
-                <a:gridCol w="1847525"/>
-                <a:gridCol w="1847525"/>
-                <a:gridCol w="1847525"/>
-                <a:gridCol w="1847525"/>
-                <a:gridCol w="1847525"/>
+                <a:gridCol w="2695600"/>
+                <a:gridCol w="2695600"/>
+                <a:gridCol w="2695600"/>
+                <a:gridCol w="2695600"/>
               </a:tblGrid>
-              <a:tr h="557775">
+              <a:tr h="921975">
                 <a:tc>
                   <a:txBody>
                     <a:bodyPr/>
@@ -8754,62 +9189,16 @@
                         <a:spcAft>
                           <a:spcPts val="0"/>
                         </a:spcAft>
-                        <a:buClr>
-                          <a:schemeClr val="dk1"/>
-                        </a:buClr>
-                        <a:buSzPts val="1100"/>
-                        <a:buFont typeface="Arial"/>
                         <a:buNone/>
                       </a:pPr>
                       <a:r>
-                        <a:rPr b="1" lang="en-US" sz="2000">
-                          <a:solidFill>
-                            <a:schemeClr val="dk1"/>
-                          </a:solidFill>
-                        </a:rPr>
-                        <a:t>Feature </a:t>
+                        <a:rPr b="1" lang="en-US" sz="2800"/>
+                        <a:t>Algorithm</a:t>
                       </a:r>
-                      <a:endParaRPr sz="2000"/>
+                      <a:endParaRPr b="1" sz="2800"/>
                     </a:p>
                   </a:txBody>
-                  <a:tcPr marT="91425" marB="91425" marR="91425" marL="91425">
-                    <a:lnL cap="flat" cmpd="sng" w="38100">
-                      <a:solidFill>
-                        <a:schemeClr val="dk1"/>
-                      </a:solidFill>
-                      <a:prstDash val="solid"/>
-                      <a:round/>
-                      <a:headEnd len="sm" w="sm" type="none"/>
-                      <a:tailEnd len="sm" w="sm" type="none"/>
-                    </a:lnL>
-                    <a:lnR cap="flat" cmpd="sng" w="38100">
-                      <a:solidFill>
-                        <a:schemeClr val="dk1"/>
-                      </a:solidFill>
-                      <a:prstDash val="solid"/>
-                      <a:round/>
-                      <a:headEnd len="sm" w="sm" type="none"/>
-                      <a:tailEnd len="sm" w="sm" type="none"/>
-                    </a:lnR>
-                    <a:lnT cap="flat" cmpd="sng" w="38100">
-                      <a:solidFill>
-                        <a:schemeClr val="dk1"/>
-                      </a:solidFill>
-                      <a:prstDash val="solid"/>
-                      <a:round/>
-                      <a:headEnd len="sm" w="sm" type="none"/>
-                      <a:tailEnd len="sm" w="sm" type="none"/>
-                    </a:lnT>
-                    <a:lnB cap="flat" cmpd="sng" w="38100">
-                      <a:solidFill>
-                        <a:schemeClr val="dk1"/>
-                      </a:solidFill>
-                      <a:prstDash val="solid"/>
-                      <a:round/>
-                      <a:headEnd len="sm" w="sm" type="none"/>
-                      <a:tailEnd len="sm" w="sm" type="none"/>
-                    </a:lnB>
-                  </a:tcPr>
+                  <a:tcPr marT="91425" marB="91425" marR="91425" marL="91425"/>
                 </a:tc>
                 <a:tc>
                   <a:txBody>
@@ -8823,62 +9212,16 @@
                         <a:spcAft>
                           <a:spcPts val="0"/>
                         </a:spcAft>
-                        <a:buClr>
-                          <a:schemeClr val="dk1"/>
-                        </a:buClr>
-                        <a:buSzPts val="1100"/>
-                        <a:buFont typeface="Arial"/>
                         <a:buNone/>
                       </a:pPr>
                       <a:r>
-                        <a:rPr b="1" lang="en-US" sz="2000">
-                          <a:solidFill>
-                            <a:schemeClr val="dk1"/>
-                          </a:solidFill>
-                        </a:rPr>
-                        <a:t>Ground Truth Area</a:t>
+                        <a:rPr b="1" lang="en-US" sz="2800"/>
+                        <a:t>Mean Map Error (px)</a:t>
                       </a:r>
-                      <a:endParaRPr sz="2000"/>
+                      <a:endParaRPr b="1" sz="2800"/>
                     </a:p>
                   </a:txBody>
-                  <a:tcPr marT="91425" marB="91425" marR="91425" marL="91425">
-                    <a:lnL cap="flat" cmpd="sng" w="38100">
-                      <a:solidFill>
-                        <a:schemeClr val="dk1"/>
-                      </a:solidFill>
-                      <a:prstDash val="solid"/>
-                      <a:round/>
-                      <a:headEnd len="sm" w="sm" type="none"/>
-                      <a:tailEnd len="sm" w="sm" type="none"/>
-                    </a:lnL>
-                    <a:lnR cap="flat" cmpd="sng" w="38100">
-                      <a:solidFill>
-                        <a:schemeClr val="dk1"/>
-                      </a:solidFill>
-                      <a:prstDash val="solid"/>
-                      <a:round/>
-                      <a:headEnd len="sm" w="sm" type="none"/>
-                      <a:tailEnd len="sm" w="sm" type="none"/>
-                    </a:lnR>
-                    <a:lnT cap="flat" cmpd="sng" w="38100">
-                      <a:solidFill>
-                        <a:schemeClr val="dk1"/>
-                      </a:solidFill>
-                      <a:prstDash val="solid"/>
-                      <a:round/>
-                      <a:headEnd len="sm" w="sm" type="none"/>
-                      <a:tailEnd len="sm" w="sm" type="none"/>
-                    </a:lnT>
-                    <a:lnB cap="flat" cmpd="sng" w="38100">
-                      <a:solidFill>
-                        <a:schemeClr val="dk1"/>
-                      </a:solidFill>
-                      <a:prstDash val="solid"/>
-                      <a:round/>
-                      <a:headEnd len="sm" w="sm" type="none"/>
-                      <a:tailEnd len="sm" w="sm" type="none"/>
-                    </a:lnB>
-                  </a:tcPr>
+                  <a:tcPr marT="91425" marB="91425" marR="91425" marL="91425"/>
                 </a:tc>
                 <a:tc>
                   <a:txBody>
@@ -8892,62 +9235,16 @@
                         <a:spcAft>
                           <a:spcPts val="0"/>
                         </a:spcAft>
-                        <a:buClr>
-                          <a:schemeClr val="dk1"/>
-                        </a:buClr>
-                        <a:buSzPts val="1100"/>
-                        <a:buFont typeface="Arial"/>
                         <a:buNone/>
                       </a:pPr>
                       <a:r>
-                        <a:rPr b="1" lang="en-US" sz="2000">
-                          <a:solidFill>
-                            <a:schemeClr val="dk1"/>
-                          </a:solidFill>
-                        </a:rPr>
-                        <a:t>Cartographer Area</a:t>
+                        <a:rPr b="1" lang="en-US" sz="2800"/>
+                        <a:t>Mean Map Error (cm)*</a:t>
                       </a:r>
-                      <a:endParaRPr sz="2000"/>
+                      <a:endParaRPr b="1" sz="2800"/>
                     </a:p>
                   </a:txBody>
-                  <a:tcPr marT="91425" marB="91425" marR="91425" marL="91425">
-                    <a:lnL cap="flat" cmpd="sng" w="38100">
-                      <a:solidFill>
-                        <a:schemeClr val="dk1"/>
-                      </a:solidFill>
-                      <a:prstDash val="solid"/>
-                      <a:round/>
-                      <a:headEnd len="sm" w="sm" type="none"/>
-                      <a:tailEnd len="sm" w="sm" type="none"/>
-                    </a:lnL>
-                    <a:lnR cap="flat" cmpd="sng" w="38100">
-                      <a:solidFill>
-                        <a:schemeClr val="dk1"/>
-                      </a:solidFill>
-                      <a:prstDash val="solid"/>
-                      <a:round/>
-                      <a:headEnd len="sm" w="sm" type="none"/>
-                      <a:tailEnd len="sm" w="sm" type="none"/>
-                    </a:lnR>
-                    <a:lnT cap="flat" cmpd="sng" w="38100">
-                      <a:solidFill>
-                        <a:schemeClr val="dk1"/>
-                      </a:solidFill>
-                      <a:prstDash val="solid"/>
-                      <a:round/>
-                      <a:headEnd len="sm" w="sm" type="none"/>
-                      <a:tailEnd len="sm" w="sm" type="none"/>
-                    </a:lnT>
-                    <a:lnB cap="flat" cmpd="sng" w="38100">
-                      <a:solidFill>
-                        <a:schemeClr val="dk1"/>
-                      </a:solidFill>
-                      <a:prstDash val="solid"/>
-                      <a:round/>
-                      <a:headEnd len="sm" w="sm" type="none"/>
-                      <a:tailEnd len="sm" w="sm" type="none"/>
-                    </a:lnB>
-                  </a:tcPr>
+                  <a:tcPr marT="91425" marB="91425" marR="91425" marL="91425"/>
                 </a:tc>
                 <a:tc>
                   <a:txBody>
@@ -8961,203 +9258,19 @@
                         <a:spcAft>
                           <a:spcPts val="0"/>
                         </a:spcAft>
-                        <a:buClr>
-                          <a:schemeClr val="dk1"/>
-                        </a:buClr>
-                        <a:buSzPts val="1100"/>
-                        <a:buFont typeface="Arial"/>
                         <a:buNone/>
                       </a:pPr>
                       <a:r>
-                        <a:rPr b="1" lang="en-US" sz="2000">
-                          <a:solidFill>
-                            <a:schemeClr val="dk1"/>
-                          </a:solidFill>
-                        </a:rPr>
-                        <a:t>% Error</a:t>
+                        <a:rPr b="1" lang="en-US" sz="2800"/>
+                        <a:t>Correlation Coefficient</a:t>
                       </a:r>
-                      <a:endParaRPr sz="2000"/>
+                      <a:endParaRPr b="1" sz="2800"/>
                     </a:p>
                   </a:txBody>
-                  <a:tcPr marT="91425" marB="91425" marR="91425" marL="91425">
-                    <a:lnL cap="flat" cmpd="sng" w="38100">
-                      <a:solidFill>
-                        <a:schemeClr val="dk1"/>
-                      </a:solidFill>
-                      <a:prstDash val="solid"/>
-                      <a:round/>
-                      <a:headEnd len="sm" w="sm" type="none"/>
-                      <a:tailEnd len="sm" w="sm" type="none"/>
-                    </a:lnL>
-                    <a:lnR cap="flat" cmpd="sng" w="38100">
-                      <a:solidFill>
-                        <a:schemeClr val="dk1"/>
-                      </a:solidFill>
-                      <a:prstDash val="solid"/>
-                      <a:round/>
-                      <a:headEnd len="sm" w="sm" type="none"/>
-                      <a:tailEnd len="sm" w="sm" type="none"/>
-                    </a:lnR>
-                    <a:lnT cap="flat" cmpd="sng" w="38100">
-                      <a:solidFill>
-                        <a:schemeClr val="dk1"/>
-                      </a:solidFill>
-                      <a:prstDash val="solid"/>
-                      <a:round/>
-                      <a:headEnd len="sm" w="sm" type="none"/>
-                      <a:tailEnd len="sm" w="sm" type="none"/>
-                    </a:lnT>
-                    <a:lnB cap="flat" cmpd="sng" w="38100">
-                      <a:solidFill>
-                        <a:schemeClr val="dk1"/>
-                      </a:solidFill>
-                      <a:prstDash val="solid"/>
-                      <a:round/>
-                      <a:headEnd len="sm" w="sm" type="none"/>
-                      <a:tailEnd len="sm" w="sm" type="none"/>
-                    </a:lnB>
-                  </a:tcPr>
-                </a:tc>
-                <a:tc>
-                  <a:txBody>
-                    <a:bodyPr/>
-                    <a:lstStyle/>
-                    <a:p>
-                      <a:pPr indent="0" lvl="0" marL="0" rtl="0" algn="ctr">
-                        <a:spcBef>
-                          <a:spcPts val="0"/>
-                        </a:spcBef>
-                        <a:spcAft>
-                          <a:spcPts val="0"/>
-                        </a:spcAft>
-                        <a:buClr>
-                          <a:schemeClr val="dk1"/>
-                        </a:buClr>
-                        <a:buSzPts val="1100"/>
-                        <a:buFont typeface="Arial"/>
-                        <a:buNone/>
-                      </a:pPr>
-                      <a:r>
-                        <a:rPr b="1" lang="en-US" sz="2000">
-                          <a:solidFill>
-                            <a:schemeClr val="dk1"/>
-                          </a:solidFill>
-                        </a:rPr>
-                        <a:t>Slam Toolbox Area</a:t>
-                      </a:r>
-                      <a:endParaRPr sz="2000"/>
-                    </a:p>
-                  </a:txBody>
-                  <a:tcPr marT="91425" marB="91425" marR="91425" marL="91425">
-                    <a:lnL cap="flat" cmpd="sng" w="38100">
-                      <a:solidFill>
-                        <a:schemeClr val="dk1"/>
-                      </a:solidFill>
-                      <a:prstDash val="solid"/>
-                      <a:round/>
-                      <a:headEnd len="sm" w="sm" type="none"/>
-                      <a:tailEnd len="sm" w="sm" type="none"/>
-                    </a:lnL>
-                    <a:lnR cap="flat" cmpd="sng" w="38100">
-                      <a:solidFill>
-                        <a:schemeClr val="dk1"/>
-                      </a:solidFill>
-                      <a:prstDash val="solid"/>
-                      <a:round/>
-                      <a:headEnd len="sm" w="sm" type="none"/>
-                      <a:tailEnd len="sm" w="sm" type="none"/>
-                    </a:lnR>
-                    <a:lnT cap="flat" cmpd="sng" w="38100">
-                      <a:solidFill>
-                        <a:schemeClr val="dk1"/>
-                      </a:solidFill>
-                      <a:prstDash val="solid"/>
-                      <a:round/>
-                      <a:headEnd len="sm" w="sm" type="none"/>
-                      <a:tailEnd len="sm" w="sm" type="none"/>
-                    </a:lnT>
-                    <a:lnB cap="flat" cmpd="sng" w="38100">
-                      <a:solidFill>
-                        <a:schemeClr val="dk1"/>
-                      </a:solidFill>
-                      <a:prstDash val="solid"/>
-                      <a:round/>
-                      <a:headEnd len="sm" w="sm" type="none"/>
-                      <a:tailEnd len="sm" w="sm" type="none"/>
-                    </a:lnB>
-                  </a:tcPr>
-                </a:tc>
-                <a:tc>
-                  <a:txBody>
-                    <a:bodyPr/>
-                    <a:lstStyle/>
-                    <a:p>
-                      <a:pPr indent="0" lvl="0" marL="0" rtl="0" algn="ctr">
-                        <a:spcBef>
-                          <a:spcPts val="0"/>
-                        </a:spcBef>
-                        <a:spcAft>
-                          <a:spcPts val="0"/>
-                        </a:spcAft>
-                        <a:buClr>
-                          <a:schemeClr val="dk1"/>
-                        </a:buClr>
-                        <a:buSzPts val="1100"/>
-                        <a:buFont typeface="Arial"/>
-                        <a:buNone/>
-                      </a:pPr>
-                      <a:r>
-                        <a:rPr b="1" lang="en-US" sz="2000">
-                          <a:solidFill>
-                            <a:schemeClr val="dk1"/>
-                          </a:solidFill>
-                        </a:rPr>
-                        <a:t>% Error</a:t>
-                      </a:r>
-                      <a:endParaRPr sz="2000"/>
-                    </a:p>
-                  </a:txBody>
-                  <a:tcPr marT="91425" marB="91425" marR="91425" marL="91425">
-                    <a:lnL cap="flat" cmpd="sng" w="38100">
-                      <a:solidFill>
-                        <a:schemeClr val="dk1"/>
-                      </a:solidFill>
-                      <a:prstDash val="solid"/>
-                      <a:round/>
-                      <a:headEnd len="sm" w="sm" type="none"/>
-                      <a:tailEnd len="sm" w="sm" type="none"/>
-                    </a:lnL>
-                    <a:lnR cap="flat" cmpd="sng" w="38100">
-                      <a:solidFill>
-                        <a:schemeClr val="dk1"/>
-                      </a:solidFill>
-                      <a:prstDash val="solid"/>
-                      <a:round/>
-                      <a:headEnd len="sm" w="sm" type="none"/>
-                      <a:tailEnd len="sm" w="sm" type="none"/>
-                    </a:lnR>
-                    <a:lnT cap="flat" cmpd="sng" w="38100">
-                      <a:solidFill>
-                        <a:schemeClr val="dk1"/>
-                      </a:solidFill>
-                      <a:prstDash val="solid"/>
-                      <a:round/>
-                      <a:headEnd len="sm" w="sm" type="none"/>
-                      <a:tailEnd len="sm" w="sm" type="none"/>
-                    </a:lnT>
-                    <a:lnB cap="flat" cmpd="sng" w="38100">
-                      <a:solidFill>
-                        <a:schemeClr val="dk1"/>
-                      </a:solidFill>
-                      <a:prstDash val="solid"/>
-                      <a:round/>
-                      <a:headEnd len="sm" w="sm" type="none"/>
-                      <a:tailEnd len="sm" w="sm" type="none"/>
-                    </a:lnB>
-                  </a:tcPr>
+                  <a:tcPr marT="91425" marB="91425" marR="91425" marL="91425"/>
                 </a:tc>
               </a:tr>
-              <a:tr h="529925">
+              <a:tr h="973300">
                 <a:tc>
                   <a:txBody>
                     <a:bodyPr/>
@@ -9174,217 +9287,12 @@
                       </a:pPr>
                       <a:r>
                         <a:rPr lang="en-US" sz="1900"/>
-                        <a:t>Maze </a:t>
+                        <a:t>SLAM Toolbox</a:t>
                       </a:r>
                       <a:endParaRPr sz="1900"/>
                     </a:p>
                   </a:txBody>
-                  <a:tcPr marT="91425" marB="91425" marR="91425" marL="91425">
-                    <a:lnL cap="flat" cmpd="sng" w="38100">
-                      <a:solidFill>
-                        <a:schemeClr val="dk1"/>
-                      </a:solidFill>
-                      <a:prstDash val="solid"/>
-                      <a:round/>
-                      <a:headEnd len="sm" w="sm" type="none"/>
-                      <a:tailEnd len="sm" w="sm" type="none"/>
-                    </a:lnL>
-                    <a:lnR cap="flat" cmpd="sng" w="38100">
-                      <a:solidFill>
-                        <a:schemeClr val="dk1"/>
-                      </a:solidFill>
-                      <a:prstDash val="solid"/>
-                      <a:round/>
-                      <a:headEnd len="sm" w="sm" type="none"/>
-                      <a:tailEnd len="sm" w="sm" type="none"/>
-                    </a:lnR>
-                    <a:lnT cap="flat" cmpd="sng" w="38100">
-                      <a:solidFill>
-                        <a:schemeClr val="dk1"/>
-                      </a:solidFill>
-                      <a:prstDash val="solid"/>
-                      <a:round/>
-                      <a:headEnd len="sm" w="sm" type="none"/>
-                      <a:tailEnd len="sm" w="sm" type="none"/>
-                    </a:lnT>
-                    <a:lnB cap="flat" cmpd="sng" w="38100">
-                      <a:solidFill>
-                        <a:schemeClr val="dk1"/>
-                      </a:solidFill>
-                      <a:prstDash val="solid"/>
-                      <a:round/>
-                      <a:headEnd len="sm" w="sm" type="none"/>
-                      <a:tailEnd len="sm" w="sm" type="none"/>
-                    </a:lnB>
-                  </a:tcPr>
-                </a:tc>
-                <a:tc>
-                  <a:txBody>
-                    <a:bodyPr/>
-                    <a:lstStyle/>
-                    <a:p>
-                      <a:pPr indent="0" lvl="0" marL="0" rtl="0" algn="l">
-                        <a:lnSpc>
-                          <a:spcPct val="115000"/>
-                        </a:lnSpc>
-                        <a:spcBef>
-                          <a:spcPts val="0"/>
-                        </a:spcBef>
-                        <a:spcAft>
-                          <a:spcPts val="0"/>
-                        </a:spcAft>
-                        <a:buClr>
-                          <a:schemeClr val="dk1"/>
-                        </a:buClr>
-                        <a:buSzPts val="1100"/>
-                        <a:buFont typeface="Arial"/>
-                        <a:buNone/>
-                      </a:pPr>
-                      <a:r>
-                        <a:rPr lang="en-US" sz="1900">
-                          <a:solidFill>
-                            <a:schemeClr val="dk1"/>
-                          </a:solidFill>
-                        </a:rPr>
-                        <a:t>3.344m</a:t>
-                      </a:r>
-                      <a:r>
-                        <a:rPr baseline="30000" lang="en-US" sz="1900">
-                          <a:solidFill>
-                            <a:schemeClr val="dk1"/>
-                          </a:solidFill>
-                        </a:rPr>
-                        <a:t>2</a:t>
-                      </a:r>
-                      <a:endParaRPr baseline="30000" sz="1900"/>
-                    </a:p>
-                  </a:txBody>
-                  <a:tcPr marT="91425" marB="91425" marR="91425" marL="91425">
-                    <a:lnL cap="flat" cmpd="sng" w="38100">
-                      <a:solidFill>
-                        <a:schemeClr val="dk1"/>
-                      </a:solidFill>
-                      <a:prstDash val="solid"/>
-                      <a:round/>
-                      <a:headEnd len="sm" w="sm" type="none"/>
-                      <a:tailEnd len="sm" w="sm" type="none"/>
-                    </a:lnL>
-                    <a:lnR cap="flat" cmpd="sng" w="38100">
-                      <a:solidFill>
-                        <a:schemeClr val="dk1"/>
-                      </a:solidFill>
-                      <a:prstDash val="solid"/>
-                      <a:round/>
-                      <a:headEnd len="sm" w="sm" type="none"/>
-                      <a:tailEnd len="sm" w="sm" type="none"/>
-                    </a:lnR>
-                    <a:lnT cap="flat" cmpd="sng" w="38100">
-                      <a:solidFill>
-                        <a:schemeClr val="dk1"/>
-                      </a:solidFill>
-                      <a:prstDash val="solid"/>
-                      <a:round/>
-                      <a:headEnd len="sm" w="sm" type="none"/>
-                      <a:tailEnd len="sm" w="sm" type="none"/>
-                    </a:lnT>
-                    <a:lnB cap="flat" cmpd="sng" w="38100">
-                      <a:solidFill>
-                        <a:schemeClr val="dk1"/>
-                      </a:solidFill>
-                      <a:prstDash val="solid"/>
-                      <a:round/>
-                      <a:headEnd len="sm" w="sm" type="none"/>
-                      <a:tailEnd len="sm" w="sm" type="none"/>
-                    </a:lnB>
-                  </a:tcPr>
-                </a:tc>
-                <a:tc>
-                  <a:txBody>
-                    <a:bodyPr/>
-                    <a:lstStyle/>
-                    <a:p>
-                      <a:pPr indent="0" lvl="0" marL="0" rtl="0" algn="l">
-                        <a:lnSpc>
-                          <a:spcPct val="115000"/>
-                        </a:lnSpc>
-                        <a:spcBef>
-                          <a:spcPts val="0"/>
-                        </a:spcBef>
-                        <a:spcAft>
-                          <a:spcPts val="0"/>
-                        </a:spcAft>
-                        <a:buClr>
-                          <a:schemeClr val="dk1"/>
-                        </a:buClr>
-                        <a:buSzPts val="1100"/>
-                        <a:buFont typeface="Arial"/>
-                        <a:buNone/>
-                      </a:pPr>
-                      <a:r>
-                        <a:rPr lang="en-US" sz="1900">
-                          <a:solidFill>
-                            <a:schemeClr val="dk1"/>
-                          </a:solidFill>
-                        </a:rPr>
-                        <a:t>3.675</a:t>
-                      </a:r>
-                      <a:r>
-                        <a:rPr lang="en-US" sz="1900">
-                          <a:solidFill>
-                            <a:schemeClr val="dk1"/>
-                          </a:solidFill>
-                        </a:rPr>
-                        <a:t>m</a:t>
-                      </a:r>
-                      <a:r>
-                        <a:rPr baseline="30000" lang="en-US" sz="1900">
-                          <a:solidFill>
-                            <a:schemeClr val="dk1"/>
-                          </a:solidFill>
-                        </a:rPr>
-                        <a:t>2</a:t>
-                      </a:r>
-                      <a:endParaRPr/>
-                    </a:p>
-                  </a:txBody>
-                  <a:tcPr marT="91425" marB="91425" marR="91425" marL="91425">
-                    <a:lnL cap="flat" cmpd="sng" w="38100">
-                      <a:solidFill>
-                        <a:schemeClr val="dk1"/>
-                      </a:solidFill>
-                      <a:prstDash val="solid"/>
-                      <a:round/>
-                      <a:headEnd len="sm" w="sm" type="none"/>
-                      <a:tailEnd len="sm" w="sm" type="none"/>
-                    </a:lnL>
-                    <a:lnR cap="flat" cmpd="sng" w="38100">
-                      <a:solidFill>
-                        <a:schemeClr val="dk1"/>
-                      </a:solidFill>
-                      <a:prstDash val="solid"/>
-                      <a:round/>
-                      <a:headEnd len="sm" w="sm" type="none"/>
-                      <a:tailEnd len="sm" w="sm" type="none"/>
-                    </a:lnR>
-                    <a:lnT cap="flat" cmpd="sng" w="38100">
-                      <a:solidFill>
-                        <a:schemeClr val="dk1"/>
-                      </a:solidFill>
-                      <a:prstDash val="solid"/>
-                      <a:round/>
-                      <a:headEnd len="sm" w="sm" type="none"/>
-                      <a:tailEnd len="sm" w="sm" type="none"/>
-                    </a:lnT>
-                    <a:lnB cap="flat" cmpd="sng" w="38100">
-                      <a:solidFill>
-                        <a:schemeClr val="dk1"/>
-                      </a:solidFill>
-                      <a:prstDash val="solid"/>
-                      <a:round/>
-                      <a:headEnd len="sm" w="sm" type="none"/>
-                      <a:tailEnd len="sm" w="sm" type="none"/>
-                    </a:lnB>
-                  </a:tcPr>
+                  <a:tcPr marT="91425" marB="91425" marR="91425" marL="91425"/>
                 </a:tc>
                 <a:tc>
                   <a:txBody>
@@ -9402,137 +9310,12 @@
                       </a:pPr>
                       <a:r>
                         <a:rPr lang="en-US" sz="1900"/>
-                        <a:t>9%</a:t>
+                        <a:t>18.19</a:t>
                       </a:r>
                       <a:endParaRPr sz="1900"/>
                     </a:p>
                   </a:txBody>
-                  <a:tcPr marT="91425" marB="91425" marR="91425" marL="91425">
-                    <a:lnL cap="flat" cmpd="sng" w="38100">
-                      <a:solidFill>
-                        <a:schemeClr val="dk1"/>
-                      </a:solidFill>
-                      <a:prstDash val="solid"/>
-                      <a:round/>
-                      <a:headEnd len="sm" w="sm" type="none"/>
-                      <a:tailEnd len="sm" w="sm" type="none"/>
-                    </a:lnL>
-                    <a:lnR cap="flat" cmpd="sng" w="38100">
-                      <a:solidFill>
-                        <a:schemeClr val="dk1"/>
-                      </a:solidFill>
-                      <a:prstDash val="solid"/>
-                      <a:round/>
-                      <a:headEnd len="sm" w="sm" type="none"/>
-                      <a:tailEnd len="sm" w="sm" type="none"/>
-                    </a:lnR>
-                    <a:lnT cap="flat" cmpd="sng" w="38100">
-                      <a:solidFill>
-                        <a:schemeClr val="dk1"/>
-                      </a:solidFill>
-                      <a:prstDash val="solid"/>
-                      <a:round/>
-                      <a:headEnd len="sm" w="sm" type="none"/>
-                      <a:tailEnd len="sm" w="sm" type="none"/>
-                    </a:lnT>
-                    <a:lnB cap="flat" cmpd="sng" w="38100">
-                      <a:solidFill>
-                        <a:schemeClr val="dk1"/>
-                      </a:solidFill>
-                      <a:prstDash val="solid"/>
-                      <a:round/>
-                      <a:headEnd len="sm" w="sm" type="none"/>
-                      <a:tailEnd len="sm" w="sm" type="none"/>
-                    </a:lnB>
-                  </a:tcPr>
-                </a:tc>
-                <a:tc>
-                  <a:txBody>
-                    <a:bodyPr/>
-                    <a:lstStyle/>
-                    <a:p>
-                      <a:pPr indent="0" lvl="0" marL="0" rtl="0" algn="l">
-                        <a:lnSpc>
-                          <a:spcPct val="115000"/>
-                        </a:lnSpc>
-                        <a:spcBef>
-                          <a:spcPts val="0"/>
-                        </a:spcBef>
-                        <a:spcAft>
-                          <a:spcPts val="0"/>
-                        </a:spcAft>
-                        <a:buClr>
-                          <a:schemeClr val="dk1"/>
-                        </a:buClr>
-                        <a:buSzPts val="1100"/>
-                        <a:buFont typeface="Arial"/>
-                        <a:buNone/>
-                      </a:pPr>
-                      <a:r>
-                        <a:rPr lang="en-US" sz="1900">
-                          <a:solidFill>
-                            <a:schemeClr val="dk1"/>
-                          </a:solidFill>
-                        </a:rPr>
-                        <a:t>3.36</a:t>
-                      </a:r>
-                      <a:r>
-                        <a:rPr lang="en-US" sz="1900">
-                          <a:solidFill>
-                            <a:schemeClr val="dk1"/>
-                          </a:solidFill>
-                        </a:rPr>
-                        <a:t>m</a:t>
-                      </a:r>
-                      <a:r>
-                        <a:rPr baseline="30000" lang="en-US" sz="1900">
-                          <a:solidFill>
-                            <a:schemeClr val="dk1"/>
-                          </a:solidFill>
-                        </a:rPr>
-                        <a:t>2</a:t>
-                      </a:r>
-                      <a:endParaRPr/>
-                    </a:p>
-                  </a:txBody>
-                  <a:tcPr marT="91425" marB="91425" marR="91425" marL="91425">
-                    <a:lnL cap="flat" cmpd="sng" w="38100">
-                      <a:solidFill>
-                        <a:schemeClr val="dk1"/>
-                      </a:solidFill>
-                      <a:prstDash val="solid"/>
-                      <a:round/>
-                      <a:headEnd len="sm" w="sm" type="none"/>
-                      <a:tailEnd len="sm" w="sm" type="none"/>
-                    </a:lnL>
-                    <a:lnR cap="flat" cmpd="sng" w="38100">
-                      <a:solidFill>
-                        <a:schemeClr val="dk1"/>
-                      </a:solidFill>
-                      <a:prstDash val="solid"/>
-                      <a:round/>
-                      <a:headEnd len="sm" w="sm" type="none"/>
-                      <a:tailEnd len="sm" w="sm" type="none"/>
-                    </a:lnR>
-                    <a:lnT cap="flat" cmpd="sng" w="38100">
-                      <a:solidFill>
-                        <a:schemeClr val="dk1"/>
-                      </a:solidFill>
-                      <a:prstDash val="solid"/>
-                      <a:round/>
-                      <a:headEnd len="sm" w="sm" type="none"/>
-                      <a:tailEnd len="sm" w="sm" type="none"/>
-                    </a:lnT>
-                    <a:lnB cap="flat" cmpd="sng" w="38100">
-                      <a:solidFill>
-                        <a:schemeClr val="dk1"/>
-                      </a:solidFill>
-                      <a:prstDash val="solid"/>
-                      <a:round/>
-                      <a:headEnd len="sm" w="sm" type="none"/>
-                      <a:tailEnd len="sm" w="sm" type="none"/>
-                    </a:lnB>
-                  </a:tcPr>
+                  <a:tcPr marT="91425" marB="91425" marR="91425" marL="91425"/>
                 </a:tc>
                 <a:tc>
                   <a:txBody>
@@ -9550,287 +9333,12 @@
                       </a:pPr>
                       <a:r>
                         <a:rPr lang="en-US" sz="1900"/>
-                        <a:t>0.47%</a:t>
+                        <a:t>94.56</a:t>
                       </a:r>
                       <a:endParaRPr sz="1900"/>
                     </a:p>
                   </a:txBody>
-                  <a:tcPr marT="91425" marB="91425" marR="91425" marL="91425">
-                    <a:lnL cap="flat" cmpd="sng" w="38100">
-                      <a:solidFill>
-                        <a:schemeClr val="dk1"/>
-                      </a:solidFill>
-                      <a:prstDash val="solid"/>
-                      <a:round/>
-                      <a:headEnd len="sm" w="sm" type="none"/>
-                      <a:tailEnd len="sm" w="sm" type="none"/>
-                    </a:lnL>
-                    <a:lnR cap="flat" cmpd="sng" w="38100">
-                      <a:solidFill>
-                        <a:schemeClr val="dk1"/>
-                      </a:solidFill>
-                      <a:prstDash val="solid"/>
-                      <a:round/>
-                      <a:headEnd len="sm" w="sm" type="none"/>
-                      <a:tailEnd len="sm" w="sm" type="none"/>
-                    </a:lnR>
-                    <a:lnT cap="flat" cmpd="sng" w="38100">
-                      <a:solidFill>
-                        <a:schemeClr val="dk1"/>
-                      </a:solidFill>
-                      <a:prstDash val="solid"/>
-                      <a:round/>
-                      <a:headEnd len="sm" w="sm" type="none"/>
-                      <a:tailEnd len="sm" w="sm" type="none"/>
-                    </a:lnT>
-                    <a:lnB cap="flat" cmpd="sng" w="38100">
-                      <a:solidFill>
-                        <a:schemeClr val="dk1"/>
-                      </a:solidFill>
-                      <a:prstDash val="solid"/>
-                      <a:round/>
-                      <a:headEnd len="sm" w="sm" type="none"/>
-                      <a:tailEnd len="sm" w="sm" type="none"/>
-                    </a:lnB>
-                  </a:tcPr>
-                </a:tc>
-              </a:tr>
-              <a:tr h="551075">
-                <a:tc>
-                  <a:txBody>
-                    <a:bodyPr/>
-                    <a:lstStyle/>
-                    <a:p>
-                      <a:pPr indent="0" lvl="0" marL="0" rtl="0" algn="l">
-                        <a:spcBef>
-                          <a:spcPts val="0"/>
-                        </a:spcBef>
-                        <a:spcAft>
-                          <a:spcPts val="0"/>
-                        </a:spcAft>
-                        <a:buNone/>
-                      </a:pPr>
-                      <a:r>
-                        <a:rPr lang="en-US" sz="1900"/>
-                        <a:t>Box 1 </a:t>
-                      </a:r>
-                      <a:endParaRPr sz="1900"/>
-                    </a:p>
-                  </a:txBody>
-                  <a:tcPr marT="91425" marB="91425" marR="91425" marL="91425">
-                    <a:lnL cap="flat" cmpd="sng" w="38100">
-                      <a:solidFill>
-                        <a:schemeClr val="dk1"/>
-                      </a:solidFill>
-                      <a:prstDash val="solid"/>
-                      <a:round/>
-                      <a:headEnd len="sm" w="sm" type="none"/>
-                      <a:tailEnd len="sm" w="sm" type="none"/>
-                    </a:lnL>
-                    <a:lnR cap="flat" cmpd="sng" w="38100">
-                      <a:solidFill>
-                        <a:schemeClr val="dk1"/>
-                      </a:solidFill>
-                      <a:prstDash val="solid"/>
-                      <a:round/>
-                      <a:headEnd len="sm" w="sm" type="none"/>
-                      <a:tailEnd len="sm" w="sm" type="none"/>
-                    </a:lnR>
-                    <a:lnT cap="flat" cmpd="sng" w="38100">
-                      <a:solidFill>
-                        <a:schemeClr val="dk1"/>
-                      </a:solidFill>
-                      <a:prstDash val="solid"/>
-                      <a:round/>
-                      <a:headEnd len="sm" w="sm" type="none"/>
-                      <a:tailEnd len="sm" w="sm" type="none"/>
-                    </a:lnT>
-                    <a:lnB cap="flat" cmpd="sng" w="38100">
-                      <a:solidFill>
-                        <a:schemeClr val="dk1"/>
-                      </a:solidFill>
-                      <a:prstDash val="solid"/>
-                      <a:round/>
-                      <a:headEnd len="sm" w="sm" type="none"/>
-                      <a:tailEnd len="sm" w="sm" type="none"/>
-                    </a:lnB>
-                  </a:tcPr>
-                </a:tc>
-                <a:tc>
-                  <a:txBody>
-                    <a:bodyPr/>
-                    <a:lstStyle/>
-                    <a:p>
-                      <a:pPr indent="0" lvl="0" marL="0" rtl="0" algn="l">
-                        <a:lnSpc>
-                          <a:spcPct val="115000"/>
-                        </a:lnSpc>
-                        <a:spcBef>
-                          <a:spcPts val="0"/>
-                        </a:spcBef>
-                        <a:spcAft>
-                          <a:spcPts val="0"/>
-                        </a:spcAft>
-                        <a:buClr>
-                          <a:schemeClr val="dk1"/>
-                        </a:buClr>
-                        <a:buSzPts val="1100"/>
-                        <a:buFont typeface="Arial"/>
-                        <a:buNone/>
-                      </a:pPr>
-                      <a:r>
-                        <a:rPr lang="en-US" sz="1900">
-                          <a:solidFill>
-                            <a:schemeClr val="dk1"/>
-                          </a:solidFill>
-                        </a:rPr>
-                        <a:t>0.1865</a:t>
-                      </a:r>
-                      <a:r>
-                        <a:rPr lang="en-US" sz="1900">
-                          <a:solidFill>
-                            <a:schemeClr val="dk1"/>
-                          </a:solidFill>
-                        </a:rPr>
-                        <a:t>m</a:t>
-                      </a:r>
-                      <a:r>
-                        <a:rPr baseline="30000" lang="en-US" sz="1900">
-                          <a:solidFill>
-                            <a:schemeClr val="dk1"/>
-                          </a:solidFill>
-                        </a:rPr>
-                        <a:t>2</a:t>
-                      </a:r>
-                      <a:endParaRPr sz="1900"/>
-                    </a:p>
-                  </a:txBody>
-                  <a:tcPr marT="91425" marB="91425" marR="91425" marL="91425">
-                    <a:lnL cap="flat" cmpd="sng" w="38100">
-                      <a:solidFill>
-                        <a:schemeClr val="dk1"/>
-                      </a:solidFill>
-                      <a:prstDash val="solid"/>
-                      <a:round/>
-                      <a:headEnd len="sm" w="sm" type="none"/>
-                      <a:tailEnd len="sm" w="sm" type="none"/>
-                    </a:lnL>
-                    <a:lnR cap="flat" cmpd="sng" w="38100">
-                      <a:solidFill>
-                        <a:schemeClr val="dk1"/>
-                      </a:solidFill>
-                      <a:prstDash val="solid"/>
-                      <a:round/>
-                      <a:headEnd len="sm" w="sm" type="none"/>
-                      <a:tailEnd len="sm" w="sm" type="none"/>
-                    </a:lnR>
-                    <a:lnT cap="flat" cmpd="sng" w="38100">
-                      <a:solidFill>
-                        <a:schemeClr val="dk1"/>
-                      </a:solidFill>
-                      <a:prstDash val="solid"/>
-                      <a:round/>
-                      <a:headEnd len="sm" w="sm" type="none"/>
-                      <a:tailEnd len="sm" w="sm" type="none"/>
-                    </a:lnT>
-                    <a:lnB cap="flat" cmpd="sng" w="38100">
-                      <a:solidFill>
-                        <a:schemeClr val="dk1"/>
-                      </a:solidFill>
-                      <a:prstDash val="solid"/>
-                      <a:round/>
-                      <a:headEnd len="sm" w="sm" type="none"/>
-                      <a:tailEnd len="sm" w="sm" type="none"/>
-                    </a:lnB>
-                  </a:tcPr>
-                </a:tc>
-                <a:tc>
-                  <a:txBody>
-                    <a:bodyPr/>
-                    <a:lstStyle/>
-                    <a:p>
-                      <a:pPr indent="0" lvl="0" marL="0" rtl="0" algn="l">
-                        <a:lnSpc>
-                          <a:spcPct val="115000"/>
-                        </a:lnSpc>
-                        <a:spcBef>
-                          <a:spcPts val="0"/>
-                        </a:spcBef>
-                        <a:spcAft>
-                          <a:spcPts val="0"/>
-                        </a:spcAft>
-                        <a:buClr>
-                          <a:schemeClr val="dk1"/>
-                        </a:buClr>
-                        <a:buSzPts val="1100"/>
-                        <a:buFont typeface="Arial"/>
-                        <a:buNone/>
-                      </a:pPr>
-                      <a:r>
-                        <a:rPr lang="en-US" sz="1900">
-                          <a:solidFill>
-                            <a:schemeClr val="dk1"/>
-                          </a:solidFill>
-                        </a:rPr>
-                        <a:t>0.14</a:t>
-                      </a:r>
-                      <a:r>
-                        <a:rPr lang="en-US" sz="1900">
-                          <a:solidFill>
-                            <a:schemeClr val="dk1"/>
-                          </a:solidFill>
-                        </a:rPr>
-                        <a:t>m</a:t>
-                      </a:r>
-                      <a:r>
-                        <a:rPr baseline="30000" lang="en-US" sz="1900">
-                          <a:solidFill>
-                            <a:schemeClr val="dk1"/>
-                          </a:solidFill>
-                        </a:rPr>
-                        <a:t>2</a:t>
-                      </a:r>
-                      <a:endParaRPr sz="1900"/>
-                    </a:p>
-                  </a:txBody>
-                  <a:tcPr marT="91425" marB="91425" marR="91425" marL="91425">
-                    <a:lnL cap="flat" cmpd="sng" w="38100">
-                      <a:solidFill>
-                        <a:schemeClr val="dk1"/>
-                      </a:solidFill>
-                      <a:prstDash val="solid"/>
-                      <a:round/>
-                      <a:headEnd len="sm" w="sm" type="none"/>
-                      <a:tailEnd len="sm" w="sm" type="none"/>
-                    </a:lnL>
-                    <a:lnR cap="flat" cmpd="sng" w="38100">
-                      <a:solidFill>
-                        <a:schemeClr val="dk1"/>
-                      </a:solidFill>
-                      <a:prstDash val="solid"/>
-                      <a:round/>
-                      <a:headEnd len="sm" w="sm" type="none"/>
-                      <a:tailEnd len="sm" w="sm" type="none"/>
-                    </a:lnR>
-                    <a:lnT cap="flat" cmpd="sng" w="38100">
-                      <a:solidFill>
-                        <a:schemeClr val="dk1"/>
-                      </a:solidFill>
-                      <a:prstDash val="solid"/>
-                      <a:round/>
-                      <a:headEnd len="sm" w="sm" type="none"/>
-                      <a:tailEnd len="sm" w="sm" type="none"/>
-                    </a:lnT>
-                    <a:lnB cap="flat" cmpd="sng" w="38100">
-                      <a:solidFill>
-                        <a:schemeClr val="dk1"/>
-                      </a:solidFill>
-                      <a:prstDash val="solid"/>
-                      <a:round/>
-                      <a:headEnd len="sm" w="sm" type="none"/>
-                      <a:tailEnd len="sm" w="sm" type="none"/>
-                    </a:lnB>
-                  </a:tcPr>
+                  <a:tcPr marT="91425" marB="91425" marR="91425" marL="91425"/>
                 </a:tc>
                 <a:tc>
                   <a:txBody>
@@ -9848,137 +9356,37 @@
                       </a:pPr>
                       <a:r>
                         <a:rPr lang="en-US" sz="1900"/>
-                        <a:t>24%</a:t>
+                        <a:t>0.068 </a:t>
                       </a:r>
                       <a:endParaRPr sz="1900"/>
                     </a:p>
                   </a:txBody>
-                  <a:tcPr marT="91425" marB="91425" marR="91425" marL="91425">
-                    <a:lnL cap="flat" cmpd="sng" w="38100">
-                      <a:solidFill>
-                        <a:schemeClr val="dk1"/>
-                      </a:solidFill>
-                      <a:prstDash val="solid"/>
-                      <a:round/>
-                      <a:headEnd len="sm" w="sm" type="none"/>
-                      <a:tailEnd len="sm" w="sm" type="none"/>
-                    </a:lnL>
-                    <a:lnR cap="flat" cmpd="sng" w="38100">
-                      <a:solidFill>
-                        <a:schemeClr val="dk1"/>
-                      </a:solidFill>
-                      <a:prstDash val="solid"/>
-                      <a:round/>
-                      <a:headEnd len="sm" w="sm" type="none"/>
-                      <a:tailEnd len="sm" w="sm" type="none"/>
-                    </a:lnR>
-                    <a:lnT cap="flat" cmpd="sng" w="38100">
-                      <a:solidFill>
-                        <a:schemeClr val="dk1"/>
-                      </a:solidFill>
-                      <a:prstDash val="solid"/>
-                      <a:round/>
-                      <a:headEnd len="sm" w="sm" type="none"/>
-                      <a:tailEnd len="sm" w="sm" type="none"/>
-                    </a:lnT>
-                    <a:lnB cap="flat" cmpd="sng" w="38100">
-                      <a:solidFill>
-                        <a:schemeClr val="dk1"/>
-                      </a:solidFill>
-                      <a:prstDash val="solid"/>
-                      <a:round/>
-                      <a:headEnd len="sm" w="sm" type="none"/>
-                      <a:tailEnd len="sm" w="sm" type="none"/>
-                    </a:lnB>
-                  </a:tcPr>
+                  <a:tcPr marT="91425" marB="91425" marR="91425" marL="91425"/>
                 </a:tc>
+              </a:tr>
+              <a:tr h="973300">
                 <a:tc>
                   <a:txBody>
                     <a:bodyPr/>
                     <a:lstStyle/>
                     <a:p>
                       <a:pPr indent="0" lvl="0" marL="0" rtl="0" algn="l">
-                        <a:lnSpc>
-                          <a:spcPct val="115000"/>
-                        </a:lnSpc>
                         <a:spcBef>
                           <a:spcPts val="0"/>
                         </a:spcBef>
                         <a:spcAft>
                           <a:spcPts val="0"/>
                         </a:spcAft>
-                        <a:buClr>
-                          <a:schemeClr val="dk1"/>
-                        </a:buClr>
-                        <a:buSzPts val="1100"/>
-                        <a:buFont typeface="Arial"/>
                         <a:buNone/>
                       </a:pPr>
                       <a:r>
-                        <a:rPr lang="en-US" sz="1900">
-                          <a:solidFill>
-                            <a:schemeClr val="dk1"/>
-                          </a:solidFill>
-                        </a:rPr>
-                        <a:t>0.18</a:t>
+                        <a:rPr lang="en-US" sz="1900"/>
+                        <a:t>Cartographer</a:t>
                       </a:r>
-                      <a:r>
-                        <a:rPr lang="en-US" sz="1900">
-                          <a:solidFill>
-                            <a:schemeClr val="dk1"/>
-                          </a:solidFill>
-                        </a:rPr>
-                        <a:t>m</a:t>
-                      </a:r>
-                      <a:r>
-                        <a:rPr baseline="30000" lang="en-US" sz="1900">
-                          <a:solidFill>
-                            <a:schemeClr val="dk1"/>
-                          </a:solidFill>
-                        </a:rPr>
-                        <a:t>2</a:t>
-                      </a:r>
-                      <a:endParaRPr/>
+                      <a:endParaRPr sz="1900"/>
                     </a:p>
                   </a:txBody>
-                  <a:tcPr marT="91425" marB="91425" marR="91425" marL="91425">
-                    <a:lnL cap="flat" cmpd="sng" w="38100">
-                      <a:solidFill>
-                        <a:schemeClr val="dk1"/>
-                      </a:solidFill>
-                      <a:prstDash val="solid"/>
-                      <a:round/>
-                      <a:headEnd len="sm" w="sm" type="none"/>
-                      <a:tailEnd len="sm" w="sm" type="none"/>
-                    </a:lnL>
-                    <a:lnR cap="flat" cmpd="sng" w="38100">
-                      <a:solidFill>
-                        <a:schemeClr val="dk1"/>
-                      </a:solidFill>
-                      <a:prstDash val="solid"/>
-                      <a:round/>
-                      <a:headEnd len="sm" w="sm" type="none"/>
-                      <a:tailEnd len="sm" w="sm" type="none"/>
-                    </a:lnR>
-                    <a:lnT cap="flat" cmpd="sng" w="38100">
-                      <a:solidFill>
-                        <a:schemeClr val="dk1"/>
-                      </a:solidFill>
-                      <a:prstDash val="solid"/>
-                      <a:round/>
-                      <a:headEnd len="sm" w="sm" type="none"/>
-                      <a:tailEnd len="sm" w="sm" type="none"/>
-                    </a:lnT>
-                    <a:lnB cap="flat" cmpd="sng" w="38100">
-                      <a:solidFill>
-                        <a:schemeClr val="dk1"/>
-                      </a:solidFill>
-                      <a:prstDash val="solid"/>
-                      <a:round/>
-                      <a:headEnd len="sm" w="sm" type="none"/>
-                      <a:tailEnd len="sm" w="sm" type="none"/>
-                    </a:lnB>
-                  </a:tcPr>
+                  <a:tcPr marT="91425" marB="91425" marR="91425" marL="91425"/>
                 </a:tc>
                 <a:tc>
                   <a:txBody>
@@ -9996,296 +9404,12 @@
                       </a:pPr>
                       <a:r>
                         <a:rPr lang="en-US" sz="1900"/>
-                        <a:t>3.5%</a:t>
+                        <a:t>32.46</a:t>
                       </a:r>
                       <a:endParaRPr sz="1900"/>
                     </a:p>
                   </a:txBody>
-                  <a:tcPr marT="91425" marB="91425" marR="91425" marL="91425">
-                    <a:lnL cap="flat" cmpd="sng" w="38100">
-                      <a:solidFill>
-                        <a:schemeClr val="dk1"/>
-                      </a:solidFill>
-                      <a:prstDash val="solid"/>
-                      <a:round/>
-                      <a:headEnd len="sm" w="sm" type="none"/>
-                      <a:tailEnd len="sm" w="sm" type="none"/>
-                    </a:lnL>
-                    <a:lnR cap="flat" cmpd="sng" w="38100">
-                      <a:solidFill>
-                        <a:schemeClr val="dk1"/>
-                      </a:solidFill>
-                      <a:prstDash val="solid"/>
-                      <a:round/>
-                      <a:headEnd len="sm" w="sm" type="none"/>
-                      <a:tailEnd len="sm" w="sm" type="none"/>
-                    </a:lnR>
-                    <a:lnT cap="flat" cmpd="sng" w="38100">
-                      <a:solidFill>
-                        <a:schemeClr val="dk1"/>
-                      </a:solidFill>
-                      <a:prstDash val="solid"/>
-                      <a:round/>
-                      <a:headEnd len="sm" w="sm" type="none"/>
-                      <a:tailEnd len="sm" w="sm" type="none"/>
-                    </a:lnT>
-                    <a:lnB cap="flat" cmpd="sng" w="38100">
-                      <a:solidFill>
-                        <a:schemeClr val="dk1"/>
-                      </a:solidFill>
-                      <a:prstDash val="solid"/>
-                      <a:round/>
-                      <a:headEnd len="sm" w="sm" type="none"/>
-                      <a:tailEnd len="sm" w="sm" type="none"/>
-                    </a:lnB>
-                  </a:tcPr>
-                </a:tc>
-              </a:tr>
-              <a:tr h="529925">
-                <a:tc>
-                  <a:txBody>
-                    <a:bodyPr/>
-                    <a:lstStyle/>
-                    <a:p>
-                      <a:pPr indent="0" lvl="0" marL="0" rtl="0" algn="l">
-                        <a:spcBef>
-                          <a:spcPts val="0"/>
-                        </a:spcBef>
-                        <a:spcAft>
-                          <a:spcPts val="0"/>
-                        </a:spcAft>
-                        <a:buClr>
-                          <a:schemeClr val="dk1"/>
-                        </a:buClr>
-                        <a:buSzPts val="1100"/>
-                        <a:buFont typeface="Arial"/>
-                        <a:buNone/>
-                      </a:pPr>
-                      <a:r>
-                        <a:rPr lang="en-US" sz="1900">
-                          <a:solidFill>
-                            <a:schemeClr val="dk1"/>
-                          </a:solidFill>
-                        </a:rPr>
-                        <a:t>Box 2 </a:t>
-                      </a:r>
-                      <a:endParaRPr sz="1900"/>
-                    </a:p>
-                  </a:txBody>
-                  <a:tcPr marT="91425" marB="91425" marR="91425" marL="91425">
-                    <a:lnL cap="flat" cmpd="sng" w="38100">
-                      <a:solidFill>
-                        <a:schemeClr val="dk1"/>
-                      </a:solidFill>
-                      <a:prstDash val="solid"/>
-                      <a:round/>
-                      <a:headEnd len="sm" w="sm" type="none"/>
-                      <a:tailEnd len="sm" w="sm" type="none"/>
-                    </a:lnL>
-                    <a:lnR cap="flat" cmpd="sng" w="38100">
-                      <a:solidFill>
-                        <a:schemeClr val="dk1"/>
-                      </a:solidFill>
-                      <a:prstDash val="solid"/>
-                      <a:round/>
-                      <a:headEnd len="sm" w="sm" type="none"/>
-                      <a:tailEnd len="sm" w="sm" type="none"/>
-                    </a:lnR>
-                    <a:lnT cap="flat" cmpd="sng" w="38100">
-                      <a:solidFill>
-                        <a:schemeClr val="dk1"/>
-                      </a:solidFill>
-                      <a:prstDash val="solid"/>
-                      <a:round/>
-                      <a:headEnd len="sm" w="sm" type="none"/>
-                      <a:tailEnd len="sm" w="sm" type="none"/>
-                    </a:lnT>
-                    <a:lnB cap="flat" cmpd="sng" w="38100">
-                      <a:solidFill>
-                        <a:schemeClr val="dk1"/>
-                      </a:solidFill>
-                      <a:prstDash val="solid"/>
-                      <a:round/>
-                      <a:headEnd len="sm" w="sm" type="none"/>
-                      <a:tailEnd len="sm" w="sm" type="none"/>
-                    </a:lnB>
-                  </a:tcPr>
-                </a:tc>
-                <a:tc>
-                  <a:txBody>
-                    <a:bodyPr/>
-                    <a:lstStyle/>
-                    <a:p>
-                      <a:pPr indent="0" lvl="0" marL="0" rtl="0" algn="l">
-                        <a:lnSpc>
-                          <a:spcPct val="115000"/>
-                        </a:lnSpc>
-                        <a:spcBef>
-                          <a:spcPts val="0"/>
-                        </a:spcBef>
-                        <a:spcAft>
-                          <a:spcPts val="0"/>
-                        </a:spcAft>
-                        <a:buClr>
-                          <a:schemeClr val="dk1"/>
-                        </a:buClr>
-                        <a:buSzPts val="1100"/>
-                        <a:buFont typeface="Arial"/>
-                        <a:buNone/>
-                      </a:pPr>
-                      <a:r>
-                        <a:rPr lang="en-US" sz="1900">
-                          <a:solidFill>
-                            <a:schemeClr val="dk1"/>
-                          </a:solidFill>
-                        </a:rPr>
-                        <a:t>0.</a:t>
-                      </a:r>
-                      <a:r>
-                        <a:rPr lang="en-US" sz="1900">
-                          <a:solidFill>
-                            <a:schemeClr val="dk1"/>
-                          </a:solidFill>
-                        </a:rPr>
-                        <a:t>1865m</a:t>
-                      </a:r>
-                      <a:r>
-                        <a:rPr baseline="30000" lang="en-US" sz="1900">
-                          <a:solidFill>
-                            <a:schemeClr val="dk1"/>
-                          </a:solidFill>
-                        </a:rPr>
-                        <a:t>2</a:t>
-                      </a:r>
-                      <a:endParaRPr sz="1900"/>
-                    </a:p>
-                  </a:txBody>
-                  <a:tcPr marT="91425" marB="91425" marR="91425" marL="91425">
-                    <a:lnL cap="flat" cmpd="sng" w="38100">
-                      <a:solidFill>
-                        <a:schemeClr val="dk1"/>
-                      </a:solidFill>
-                      <a:prstDash val="solid"/>
-                      <a:round/>
-                      <a:headEnd len="sm" w="sm" type="none"/>
-                      <a:tailEnd len="sm" w="sm" type="none"/>
-                    </a:lnL>
-                    <a:lnR cap="flat" cmpd="sng" w="38100">
-                      <a:solidFill>
-                        <a:schemeClr val="dk1"/>
-                      </a:solidFill>
-                      <a:prstDash val="solid"/>
-                      <a:round/>
-                      <a:headEnd len="sm" w="sm" type="none"/>
-                      <a:tailEnd len="sm" w="sm" type="none"/>
-                    </a:lnR>
-                    <a:lnT cap="flat" cmpd="sng" w="38100">
-                      <a:solidFill>
-                        <a:schemeClr val="dk1"/>
-                      </a:solidFill>
-                      <a:prstDash val="solid"/>
-                      <a:round/>
-                      <a:headEnd len="sm" w="sm" type="none"/>
-                      <a:tailEnd len="sm" w="sm" type="none"/>
-                    </a:lnT>
-                    <a:lnB cap="flat" cmpd="sng" w="38100">
-                      <a:solidFill>
-                        <a:schemeClr val="dk1"/>
-                      </a:solidFill>
-                      <a:prstDash val="solid"/>
-                      <a:round/>
-                      <a:headEnd len="sm" w="sm" type="none"/>
-                      <a:tailEnd len="sm" w="sm" type="none"/>
-                    </a:lnB>
-                  </a:tcPr>
-                </a:tc>
-                <a:tc>
-                  <a:txBody>
-                    <a:bodyPr/>
-                    <a:lstStyle/>
-                    <a:p>
-                      <a:pPr indent="0" lvl="0" marL="0" rtl="0" algn="l">
-                        <a:lnSpc>
-                          <a:spcPct val="115000"/>
-                        </a:lnSpc>
-                        <a:spcBef>
-                          <a:spcPts val="0"/>
-                        </a:spcBef>
-                        <a:spcAft>
-                          <a:spcPts val="0"/>
-                        </a:spcAft>
-                        <a:buClr>
-                          <a:schemeClr val="dk1"/>
-                        </a:buClr>
-                        <a:buSzPts val="1100"/>
-                        <a:buFont typeface="Arial"/>
-                        <a:buNone/>
-                      </a:pPr>
-                      <a:r>
-                        <a:rPr lang="en-US" sz="1900">
-                          <a:solidFill>
-                            <a:schemeClr val="dk1"/>
-                          </a:solidFill>
-                        </a:rPr>
-                        <a:t>0.225</a:t>
-                      </a:r>
-                      <a:r>
-                        <a:rPr lang="en-US" sz="1900">
-                          <a:solidFill>
-                            <a:schemeClr val="dk1"/>
-                          </a:solidFill>
-                        </a:rPr>
-                        <a:t>m</a:t>
-                      </a:r>
-                      <a:r>
-                        <a:rPr baseline="30000" lang="en-US" sz="1900">
-                          <a:solidFill>
-                            <a:schemeClr val="dk1"/>
-                          </a:solidFill>
-                        </a:rPr>
-                        <a:t>2</a:t>
-                      </a:r>
-                      <a:endParaRPr/>
-                    </a:p>
-                  </a:txBody>
-                  <a:tcPr marT="91425" marB="91425" marR="91425" marL="91425">
-                    <a:lnL cap="flat" cmpd="sng" w="38100">
-                      <a:solidFill>
-                        <a:schemeClr val="dk1"/>
-                      </a:solidFill>
-                      <a:prstDash val="solid"/>
-                      <a:round/>
-                      <a:headEnd len="sm" w="sm" type="none"/>
-                      <a:tailEnd len="sm" w="sm" type="none"/>
-                    </a:lnL>
-                    <a:lnR cap="flat" cmpd="sng" w="38100">
-                      <a:solidFill>
-                        <a:schemeClr val="dk1"/>
-                      </a:solidFill>
-                      <a:prstDash val="solid"/>
-                      <a:round/>
-                      <a:headEnd len="sm" w="sm" type="none"/>
-                      <a:tailEnd len="sm" w="sm" type="none"/>
-                    </a:lnR>
-                    <a:lnT cap="flat" cmpd="sng" w="38100">
-                      <a:solidFill>
-                        <a:schemeClr val="dk1"/>
-                      </a:solidFill>
-                      <a:prstDash val="solid"/>
-                      <a:round/>
-                      <a:headEnd len="sm" w="sm" type="none"/>
-                      <a:tailEnd len="sm" w="sm" type="none"/>
-                    </a:lnT>
-                    <a:lnB cap="flat" cmpd="sng" w="38100">
-                      <a:solidFill>
-                        <a:schemeClr val="dk1"/>
-                      </a:solidFill>
-                      <a:prstDash val="solid"/>
-                      <a:round/>
-                      <a:headEnd len="sm" w="sm" type="none"/>
-                      <a:tailEnd len="sm" w="sm" type="none"/>
-                    </a:lnB>
-                  </a:tcPr>
+                  <a:tcPr marT="91425" marB="91425" marR="91425" marL="91425"/>
                 </a:tc>
                 <a:tc>
                   <a:txBody>
@@ -10303,137 +9427,12 @@
                       </a:pPr>
                       <a:r>
                         <a:rPr lang="en-US" sz="1900"/>
-                        <a:t>20%</a:t>
+                        <a:t>162.29  </a:t>
                       </a:r>
                       <a:endParaRPr sz="1900"/>
                     </a:p>
                   </a:txBody>
-                  <a:tcPr marT="91425" marB="91425" marR="91425" marL="91425">
-                    <a:lnL cap="flat" cmpd="sng" w="38100">
-                      <a:solidFill>
-                        <a:schemeClr val="dk1"/>
-                      </a:solidFill>
-                      <a:prstDash val="solid"/>
-                      <a:round/>
-                      <a:headEnd len="sm" w="sm" type="none"/>
-                      <a:tailEnd len="sm" w="sm" type="none"/>
-                    </a:lnL>
-                    <a:lnR cap="flat" cmpd="sng" w="38100">
-                      <a:solidFill>
-                        <a:schemeClr val="dk1"/>
-                      </a:solidFill>
-                      <a:prstDash val="solid"/>
-                      <a:round/>
-                      <a:headEnd len="sm" w="sm" type="none"/>
-                      <a:tailEnd len="sm" w="sm" type="none"/>
-                    </a:lnR>
-                    <a:lnT cap="flat" cmpd="sng" w="38100">
-                      <a:solidFill>
-                        <a:schemeClr val="dk1"/>
-                      </a:solidFill>
-                      <a:prstDash val="solid"/>
-                      <a:round/>
-                      <a:headEnd len="sm" w="sm" type="none"/>
-                      <a:tailEnd len="sm" w="sm" type="none"/>
-                    </a:lnT>
-                    <a:lnB cap="flat" cmpd="sng" w="38100">
-                      <a:solidFill>
-                        <a:schemeClr val="dk1"/>
-                      </a:solidFill>
-                      <a:prstDash val="solid"/>
-                      <a:round/>
-                      <a:headEnd len="sm" w="sm" type="none"/>
-                      <a:tailEnd len="sm" w="sm" type="none"/>
-                    </a:lnB>
-                  </a:tcPr>
-                </a:tc>
-                <a:tc>
-                  <a:txBody>
-                    <a:bodyPr/>
-                    <a:lstStyle/>
-                    <a:p>
-                      <a:pPr indent="0" lvl="0" marL="0" rtl="0" algn="l">
-                        <a:lnSpc>
-                          <a:spcPct val="115000"/>
-                        </a:lnSpc>
-                        <a:spcBef>
-                          <a:spcPts val="0"/>
-                        </a:spcBef>
-                        <a:spcAft>
-                          <a:spcPts val="0"/>
-                        </a:spcAft>
-                        <a:buClr>
-                          <a:schemeClr val="dk1"/>
-                        </a:buClr>
-                        <a:buSzPts val="1100"/>
-                        <a:buFont typeface="Arial"/>
-                        <a:buNone/>
-                      </a:pPr>
-                      <a:r>
-                        <a:rPr lang="en-US" sz="1900">
-                          <a:solidFill>
-                            <a:schemeClr val="dk1"/>
-                          </a:solidFill>
-                        </a:rPr>
-                        <a:t>0.18</a:t>
-                      </a:r>
-                      <a:r>
-                        <a:rPr lang="en-US" sz="1900">
-                          <a:solidFill>
-                            <a:schemeClr val="dk1"/>
-                          </a:solidFill>
-                        </a:rPr>
-                        <a:t>m</a:t>
-                      </a:r>
-                      <a:r>
-                        <a:rPr baseline="30000" lang="en-US" sz="1900">
-                          <a:solidFill>
-                            <a:schemeClr val="dk1"/>
-                          </a:solidFill>
-                        </a:rPr>
-                        <a:t>2</a:t>
-                      </a:r>
-                      <a:endParaRPr/>
-                    </a:p>
-                  </a:txBody>
-                  <a:tcPr marT="91425" marB="91425" marR="91425" marL="91425">
-                    <a:lnL cap="flat" cmpd="sng" w="38100">
-                      <a:solidFill>
-                        <a:schemeClr val="dk1"/>
-                      </a:solidFill>
-                      <a:prstDash val="solid"/>
-                      <a:round/>
-                      <a:headEnd len="sm" w="sm" type="none"/>
-                      <a:tailEnd len="sm" w="sm" type="none"/>
-                    </a:lnL>
-                    <a:lnR cap="flat" cmpd="sng" w="38100">
-                      <a:solidFill>
-                        <a:schemeClr val="dk1"/>
-                      </a:solidFill>
-                      <a:prstDash val="solid"/>
-                      <a:round/>
-                      <a:headEnd len="sm" w="sm" type="none"/>
-                      <a:tailEnd len="sm" w="sm" type="none"/>
-                    </a:lnR>
-                    <a:lnT cap="flat" cmpd="sng" w="38100">
-                      <a:solidFill>
-                        <a:schemeClr val="dk1"/>
-                      </a:solidFill>
-                      <a:prstDash val="solid"/>
-                      <a:round/>
-                      <a:headEnd len="sm" w="sm" type="none"/>
-                      <a:tailEnd len="sm" w="sm" type="none"/>
-                    </a:lnT>
-                    <a:lnB cap="flat" cmpd="sng" w="38100">
-                      <a:solidFill>
-                        <a:schemeClr val="dk1"/>
-                      </a:solidFill>
-                      <a:prstDash val="solid"/>
-                      <a:round/>
-                      <a:headEnd len="sm" w="sm" type="none"/>
-                      <a:tailEnd len="sm" w="sm" type="none"/>
-                    </a:lnB>
-                  </a:tcPr>
+                  <a:tcPr marT="91425" marB="91425" marR="91425" marL="91425"/>
                 </a:tc>
                 <a:tc>
                   <a:txBody>
@@ -10451,959 +9450,12 @@
                       </a:pPr>
                       <a:r>
                         <a:rPr lang="en-US" sz="1900"/>
-                        <a:t>3.5%</a:t>
+                        <a:t>-0.020  </a:t>
                       </a:r>
                       <a:endParaRPr sz="1900"/>
                     </a:p>
                   </a:txBody>
-                  <a:tcPr marT="91425" marB="91425" marR="91425" marL="91425">
-                    <a:lnL cap="flat" cmpd="sng" w="38100">
-                      <a:solidFill>
-                        <a:schemeClr val="dk1"/>
-                      </a:solidFill>
-                      <a:prstDash val="solid"/>
-                      <a:round/>
-                      <a:headEnd len="sm" w="sm" type="none"/>
-                      <a:tailEnd len="sm" w="sm" type="none"/>
-                    </a:lnL>
-                    <a:lnR cap="flat" cmpd="sng" w="38100">
-                      <a:solidFill>
-                        <a:schemeClr val="dk1"/>
-                      </a:solidFill>
-                      <a:prstDash val="solid"/>
-                      <a:round/>
-                      <a:headEnd len="sm" w="sm" type="none"/>
-                      <a:tailEnd len="sm" w="sm" type="none"/>
-                    </a:lnR>
-                    <a:lnT cap="flat" cmpd="sng" w="38100">
-                      <a:solidFill>
-                        <a:schemeClr val="dk1"/>
-                      </a:solidFill>
-                      <a:prstDash val="solid"/>
-                      <a:round/>
-                      <a:headEnd len="sm" w="sm" type="none"/>
-                      <a:tailEnd len="sm" w="sm" type="none"/>
-                    </a:lnT>
-                    <a:lnB cap="flat" cmpd="sng" w="38100">
-                      <a:solidFill>
-                        <a:schemeClr val="dk1"/>
-                      </a:solidFill>
-                      <a:prstDash val="solid"/>
-                      <a:round/>
-                      <a:headEnd len="sm" w="sm" type="none"/>
-                      <a:tailEnd len="sm" w="sm" type="none"/>
-                    </a:lnB>
-                  </a:tcPr>
-                </a:tc>
-              </a:tr>
-              <a:tr h="529925">
-                <a:tc>
-                  <a:txBody>
-                    <a:bodyPr/>
-                    <a:lstStyle/>
-                    <a:p>
-                      <a:pPr indent="0" lvl="0" marL="0" rtl="0" algn="l">
-                        <a:spcBef>
-                          <a:spcPts val="0"/>
-                        </a:spcBef>
-                        <a:spcAft>
-                          <a:spcPts val="0"/>
-                        </a:spcAft>
-                        <a:buClr>
-                          <a:schemeClr val="dk1"/>
-                        </a:buClr>
-                        <a:buSzPts val="1100"/>
-                        <a:buFont typeface="Arial"/>
-                        <a:buNone/>
-                      </a:pPr>
-                      <a:r>
-                        <a:rPr lang="en-US" sz="1900">
-                          <a:solidFill>
-                            <a:schemeClr val="dk1"/>
-                          </a:solidFill>
-                        </a:rPr>
-                        <a:t>Box 3</a:t>
-                      </a:r>
-                      <a:endParaRPr sz="1900"/>
-                    </a:p>
-                  </a:txBody>
-                  <a:tcPr marT="91425" marB="91425" marR="91425" marL="91425">
-                    <a:lnL cap="flat" cmpd="sng" w="38100">
-                      <a:solidFill>
-                        <a:schemeClr val="dk1"/>
-                      </a:solidFill>
-                      <a:prstDash val="solid"/>
-                      <a:round/>
-                      <a:headEnd len="sm" w="sm" type="none"/>
-                      <a:tailEnd len="sm" w="sm" type="none"/>
-                    </a:lnL>
-                    <a:lnR cap="flat" cmpd="sng" w="38100">
-                      <a:solidFill>
-                        <a:schemeClr val="dk1"/>
-                      </a:solidFill>
-                      <a:prstDash val="solid"/>
-                      <a:round/>
-                      <a:headEnd len="sm" w="sm" type="none"/>
-                      <a:tailEnd len="sm" w="sm" type="none"/>
-                    </a:lnR>
-                    <a:lnT cap="flat" cmpd="sng" w="38100">
-                      <a:solidFill>
-                        <a:schemeClr val="dk1"/>
-                      </a:solidFill>
-                      <a:prstDash val="solid"/>
-                      <a:round/>
-                      <a:headEnd len="sm" w="sm" type="none"/>
-                      <a:tailEnd len="sm" w="sm" type="none"/>
-                    </a:lnT>
-                    <a:lnB cap="flat" cmpd="sng" w="38100">
-                      <a:solidFill>
-                        <a:schemeClr val="dk1"/>
-                      </a:solidFill>
-                      <a:prstDash val="solid"/>
-                      <a:round/>
-                      <a:headEnd len="sm" w="sm" type="none"/>
-                      <a:tailEnd len="sm" w="sm" type="none"/>
-                    </a:lnB>
-                  </a:tcPr>
-                </a:tc>
-                <a:tc>
-                  <a:txBody>
-                    <a:bodyPr/>
-                    <a:lstStyle/>
-                    <a:p>
-                      <a:pPr indent="0" lvl="0" marL="0" rtl="0" algn="l">
-                        <a:lnSpc>
-                          <a:spcPct val="115000"/>
-                        </a:lnSpc>
-                        <a:spcBef>
-                          <a:spcPts val="0"/>
-                        </a:spcBef>
-                        <a:spcAft>
-                          <a:spcPts val="0"/>
-                        </a:spcAft>
-                        <a:buClr>
-                          <a:schemeClr val="dk1"/>
-                        </a:buClr>
-                        <a:buSzPts val="1100"/>
-                        <a:buFont typeface="Arial"/>
-                        <a:buNone/>
-                      </a:pPr>
-                      <a:r>
-                        <a:rPr lang="en-US" sz="1900">
-                          <a:solidFill>
-                            <a:schemeClr val="dk1"/>
-                          </a:solidFill>
-                        </a:rPr>
-                        <a:t>0.1073</a:t>
-                      </a:r>
-                      <a:r>
-                        <a:rPr lang="en-US" sz="1900">
-                          <a:solidFill>
-                            <a:schemeClr val="dk1"/>
-                          </a:solidFill>
-                        </a:rPr>
-                        <a:t>m</a:t>
-                      </a:r>
-                      <a:r>
-                        <a:rPr baseline="30000" lang="en-US" sz="1900">
-                          <a:solidFill>
-                            <a:schemeClr val="dk1"/>
-                          </a:solidFill>
-                        </a:rPr>
-                        <a:t>2</a:t>
-                      </a:r>
-                      <a:endParaRPr sz="1900"/>
-                    </a:p>
-                  </a:txBody>
-                  <a:tcPr marT="91425" marB="91425" marR="91425" marL="91425">
-                    <a:lnL cap="flat" cmpd="sng" w="38100">
-                      <a:solidFill>
-                        <a:schemeClr val="dk1"/>
-                      </a:solidFill>
-                      <a:prstDash val="solid"/>
-                      <a:round/>
-                      <a:headEnd len="sm" w="sm" type="none"/>
-                      <a:tailEnd len="sm" w="sm" type="none"/>
-                    </a:lnL>
-                    <a:lnR cap="flat" cmpd="sng" w="38100">
-                      <a:solidFill>
-                        <a:schemeClr val="dk1"/>
-                      </a:solidFill>
-                      <a:prstDash val="solid"/>
-                      <a:round/>
-                      <a:headEnd len="sm" w="sm" type="none"/>
-                      <a:tailEnd len="sm" w="sm" type="none"/>
-                    </a:lnR>
-                    <a:lnT cap="flat" cmpd="sng" w="38100">
-                      <a:solidFill>
-                        <a:schemeClr val="dk1"/>
-                      </a:solidFill>
-                      <a:prstDash val="solid"/>
-                      <a:round/>
-                      <a:headEnd len="sm" w="sm" type="none"/>
-                      <a:tailEnd len="sm" w="sm" type="none"/>
-                    </a:lnT>
-                    <a:lnB cap="flat" cmpd="sng" w="38100">
-                      <a:solidFill>
-                        <a:schemeClr val="dk1"/>
-                      </a:solidFill>
-                      <a:prstDash val="solid"/>
-                      <a:round/>
-                      <a:headEnd len="sm" w="sm" type="none"/>
-                      <a:tailEnd len="sm" w="sm" type="none"/>
-                    </a:lnB>
-                  </a:tcPr>
-                </a:tc>
-                <a:tc>
-                  <a:txBody>
-                    <a:bodyPr/>
-                    <a:lstStyle/>
-                    <a:p>
-                      <a:pPr indent="0" lvl="0" marL="0" rtl="0" algn="l">
-                        <a:lnSpc>
-                          <a:spcPct val="115000"/>
-                        </a:lnSpc>
-                        <a:spcBef>
-                          <a:spcPts val="0"/>
-                        </a:spcBef>
-                        <a:spcAft>
-                          <a:spcPts val="0"/>
-                        </a:spcAft>
-                        <a:buClr>
-                          <a:schemeClr val="dk1"/>
-                        </a:buClr>
-                        <a:buSzPts val="1100"/>
-                        <a:buFont typeface="Arial"/>
-                        <a:buNone/>
-                      </a:pPr>
-                      <a:r>
-                        <a:rPr lang="en-US" sz="1900">
-                          <a:solidFill>
-                            <a:schemeClr val="dk1"/>
-                          </a:solidFill>
-                        </a:rPr>
-                        <a:t>0.135</a:t>
-                      </a:r>
-                      <a:r>
-                        <a:rPr lang="en-US" sz="1900">
-                          <a:solidFill>
-                            <a:schemeClr val="dk1"/>
-                          </a:solidFill>
-                        </a:rPr>
-                        <a:t>m</a:t>
-                      </a:r>
-                      <a:r>
-                        <a:rPr baseline="30000" lang="en-US" sz="1900">
-                          <a:solidFill>
-                            <a:schemeClr val="dk1"/>
-                          </a:solidFill>
-                        </a:rPr>
-                        <a:t>2</a:t>
-                      </a:r>
-                      <a:endParaRPr/>
-                    </a:p>
-                  </a:txBody>
-                  <a:tcPr marT="91425" marB="91425" marR="91425" marL="91425">
-                    <a:lnL cap="flat" cmpd="sng" w="38100">
-                      <a:solidFill>
-                        <a:schemeClr val="dk1"/>
-                      </a:solidFill>
-                      <a:prstDash val="solid"/>
-                      <a:round/>
-                      <a:headEnd len="sm" w="sm" type="none"/>
-                      <a:tailEnd len="sm" w="sm" type="none"/>
-                    </a:lnL>
-                    <a:lnR cap="flat" cmpd="sng" w="38100">
-                      <a:solidFill>
-                        <a:schemeClr val="dk1"/>
-                      </a:solidFill>
-                      <a:prstDash val="solid"/>
-                      <a:round/>
-                      <a:headEnd len="sm" w="sm" type="none"/>
-                      <a:tailEnd len="sm" w="sm" type="none"/>
-                    </a:lnR>
-                    <a:lnT cap="flat" cmpd="sng" w="38100">
-                      <a:solidFill>
-                        <a:schemeClr val="dk1"/>
-                      </a:solidFill>
-                      <a:prstDash val="solid"/>
-                      <a:round/>
-                      <a:headEnd len="sm" w="sm" type="none"/>
-                      <a:tailEnd len="sm" w="sm" type="none"/>
-                    </a:lnT>
-                    <a:lnB cap="flat" cmpd="sng" w="38100">
-                      <a:solidFill>
-                        <a:schemeClr val="dk1"/>
-                      </a:solidFill>
-                      <a:prstDash val="solid"/>
-                      <a:round/>
-                      <a:headEnd len="sm" w="sm" type="none"/>
-                      <a:tailEnd len="sm" w="sm" type="none"/>
-                    </a:lnB>
-                  </a:tcPr>
-                </a:tc>
-                <a:tc>
-                  <a:txBody>
-                    <a:bodyPr/>
-                    <a:lstStyle/>
-                    <a:p>
-                      <a:pPr indent="0" lvl="0" marL="0" rtl="0" algn="l">
-                        <a:spcBef>
-                          <a:spcPts val="0"/>
-                        </a:spcBef>
-                        <a:spcAft>
-                          <a:spcPts val="0"/>
-                        </a:spcAft>
-                        <a:buNone/>
-                      </a:pPr>
-                      <a:r>
-                        <a:rPr lang="en-US" sz="1900"/>
-                        <a:t>35%</a:t>
-                      </a:r>
-                      <a:endParaRPr sz="1900"/>
-                    </a:p>
-                  </a:txBody>
-                  <a:tcPr marT="91425" marB="91425" marR="91425" marL="91425">
-                    <a:lnL cap="flat" cmpd="sng" w="38100">
-                      <a:solidFill>
-                        <a:schemeClr val="dk1"/>
-                      </a:solidFill>
-                      <a:prstDash val="solid"/>
-                      <a:round/>
-                      <a:headEnd len="sm" w="sm" type="none"/>
-                      <a:tailEnd len="sm" w="sm" type="none"/>
-                    </a:lnL>
-                    <a:lnR cap="flat" cmpd="sng" w="38100">
-                      <a:solidFill>
-                        <a:schemeClr val="dk1"/>
-                      </a:solidFill>
-                      <a:prstDash val="solid"/>
-                      <a:round/>
-                      <a:headEnd len="sm" w="sm" type="none"/>
-                      <a:tailEnd len="sm" w="sm" type="none"/>
-                    </a:lnR>
-                    <a:lnT cap="flat" cmpd="sng" w="38100">
-                      <a:solidFill>
-                        <a:schemeClr val="dk1"/>
-                      </a:solidFill>
-                      <a:prstDash val="solid"/>
-                      <a:round/>
-                      <a:headEnd len="sm" w="sm" type="none"/>
-                      <a:tailEnd len="sm" w="sm" type="none"/>
-                    </a:lnT>
-                    <a:lnB cap="flat" cmpd="sng" w="38100">
-                      <a:solidFill>
-                        <a:schemeClr val="dk1"/>
-                      </a:solidFill>
-                      <a:prstDash val="solid"/>
-                      <a:round/>
-                      <a:headEnd len="sm" w="sm" type="none"/>
-                      <a:tailEnd len="sm" w="sm" type="none"/>
-                    </a:lnB>
-                  </a:tcPr>
-                </a:tc>
-                <a:tc>
-                  <a:txBody>
-                    <a:bodyPr/>
-                    <a:lstStyle/>
-                    <a:p>
-                      <a:pPr indent="0" lvl="0" marL="0" rtl="0" algn="l">
-                        <a:lnSpc>
-                          <a:spcPct val="115000"/>
-                        </a:lnSpc>
-                        <a:spcBef>
-                          <a:spcPts val="0"/>
-                        </a:spcBef>
-                        <a:spcAft>
-                          <a:spcPts val="0"/>
-                        </a:spcAft>
-                        <a:buClr>
-                          <a:schemeClr val="dk1"/>
-                        </a:buClr>
-                        <a:buSzPts val="1100"/>
-                        <a:buFont typeface="Arial"/>
-                        <a:buNone/>
-                      </a:pPr>
-                      <a:r>
-                        <a:rPr lang="en-US" sz="1900">
-                          <a:solidFill>
-                            <a:schemeClr val="dk1"/>
-                          </a:solidFill>
-                        </a:rPr>
-                        <a:t>0.124</a:t>
-                      </a:r>
-                      <a:r>
-                        <a:rPr lang="en-US" sz="1900">
-                          <a:solidFill>
-                            <a:schemeClr val="dk1"/>
-                          </a:solidFill>
-                        </a:rPr>
-                        <a:t>m</a:t>
-                      </a:r>
-                      <a:r>
-                        <a:rPr baseline="30000" lang="en-US" sz="1900">
-                          <a:solidFill>
-                            <a:schemeClr val="dk1"/>
-                          </a:solidFill>
-                        </a:rPr>
-                        <a:t>2</a:t>
-                      </a:r>
-                      <a:endParaRPr/>
-                    </a:p>
-                  </a:txBody>
-                  <a:tcPr marT="91425" marB="91425" marR="91425" marL="91425">
-                    <a:lnL cap="flat" cmpd="sng" w="38100">
-                      <a:solidFill>
-                        <a:schemeClr val="dk1"/>
-                      </a:solidFill>
-                      <a:prstDash val="solid"/>
-                      <a:round/>
-                      <a:headEnd len="sm" w="sm" type="none"/>
-                      <a:tailEnd len="sm" w="sm" type="none"/>
-                    </a:lnL>
-                    <a:lnR cap="flat" cmpd="sng" w="38100">
-                      <a:solidFill>
-                        <a:schemeClr val="dk1"/>
-                      </a:solidFill>
-                      <a:prstDash val="solid"/>
-                      <a:round/>
-                      <a:headEnd len="sm" w="sm" type="none"/>
-                      <a:tailEnd len="sm" w="sm" type="none"/>
-                    </a:lnR>
-                    <a:lnT cap="flat" cmpd="sng" w="38100">
-                      <a:solidFill>
-                        <a:schemeClr val="dk1"/>
-                      </a:solidFill>
-                      <a:prstDash val="solid"/>
-                      <a:round/>
-                      <a:headEnd len="sm" w="sm" type="none"/>
-                      <a:tailEnd len="sm" w="sm" type="none"/>
-                    </a:lnT>
-                    <a:lnB cap="flat" cmpd="sng" w="38100">
-                      <a:solidFill>
-                        <a:schemeClr val="dk1"/>
-                      </a:solidFill>
-                      <a:prstDash val="solid"/>
-                      <a:round/>
-                      <a:headEnd len="sm" w="sm" type="none"/>
-                      <a:tailEnd len="sm" w="sm" type="none"/>
-                    </a:lnB>
-                  </a:tcPr>
-                </a:tc>
-                <a:tc>
-                  <a:txBody>
-                    <a:bodyPr/>
-                    <a:lstStyle/>
-                    <a:p>
-                      <a:pPr indent="0" lvl="0" marL="0" rtl="0" algn="l">
-                        <a:spcBef>
-                          <a:spcPts val="0"/>
-                        </a:spcBef>
-                        <a:spcAft>
-                          <a:spcPts val="0"/>
-                        </a:spcAft>
-                        <a:buNone/>
-                      </a:pPr>
-                      <a:r>
-                        <a:rPr lang="en-US" sz="1900"/>
-                        <a:t>15%</a:t>
-                      </a:r>
-                      <a:endParaRPr sz="1900"/>
-                    </a:p>
-                  </a:txBody>
-                  <a:tcPr marT="91425" marB="91425" marR="91425" marL="91425">
-                    <a:lnL cap="flat" cmpd="sng" w="38100">
-                      <a:solidFill>
-                        <a:schemeClr val="dk1"/>
-                      </a:solidFill>
-                      <a:prstDash val="solid"/>
-                      <a:round/>
-                      <a:headEnd len="sm" w="sm" type="none"/>
-                      <a:tailEnd len="sm" w="sm" type="none"/>
-                    </a:lnL>
-                    <a:lnR cap="flat" cmpd="sng" w="38100">
-                      <a:solidFill>
-                        <a:schemeClr val="dk1"/>
-                      </a:solidFill>
-                      <a:prstDash val="solid"/>
-                      <a:round/>
-                      <a:headEnd len="sm" w="sm" type="none"/>
-                      <a:tailEnd len="sm" w="sm" type="none"/>
-                    </a:lnR>
-                    <a:lnT cap="flat" cmpd="sng" w="38100">
-                      <a:solidFill>
-                        <a:schemeClr val="dk1"/>
-                      </a:solidFill>
-                      <a:prstDash val="solid"/>
-                      <a:round/>
-                      <a:headEnd len="sm" w="sm" type="none"/>
-                      <a:tailEnd len="sm" w="sm" type="none"/>
-                    </a:lnT>
-                    <a:lnB cap="flat" cmpd="sng" w="38100">
-                      <a:solidFill>
-                        <a:schemeClr val="dk1"/>
-                      </a:solidFill>
-                      <a:prstDash val="solid"/>
-                      <a:round/>
-                      <a:headEnd len="sm" w="sm" type="none"/>
-                      <a:tailEnd len="sm" w="sm" type="none"/>
-                    </a:lnB>
-                  </a:tcPr>
-                </a:tc>
-              </a:tr>
-              <a:tr h="529925">
-                <a:tc>
-                  <a:txBody>
-                    <a:bodyPr/>
-                    <a:lstStyle/>
-                    <a:p>
-                      <a:pPr indent="0" lvl="0" marL="0" rtl="0" algn="l">
-                        <a:spcBef>
-                          <a:spcPts val="0"/>
-                        </a:spcBef>
-                        <a:spcAft>
-                          <a:spcPts val="0"/>
-                        </a:spcAft>
-                        <a:buClr>
-                          <a:schemeClr val="dk1"/>
-                        </a:buClr>
-                        <a:buSzPts val="1100"/>
-                        <a:buFont typeface="Arial"/>
-                        <a:buNone/>
-                      </a:pPr>
-                      <a:r>
-                        <a:rPr lang="en-US" sz="1900">
-                          <a:solidFill>
-                            <a:schemeClr val="dk1"/>
-                          </a:solidFill>
-                        </a:rPr>
-                        <a:t>Box 4</a:t>
-                      </a:r>
-                      <a:endParaRPr sz="1900"/>
-                    </a:p>
-                  </a:txBody>
-                  <a:tcPr marT="91425" marB="91425" marR="91425" marL="91425">
-                    <a:lnL cap="flat" cmpd="sng" w="38100">
-                      <a:solidFill>
-                        <a:schemeClr val="dk1"/>
-                      </a:solidFill>
-                      <a:prstDash val="solid"/>
-                      <a:round/>
-                      <a:headEnd len="sm" w="sm" type="none"/>
-                      <a:tailEnd len="sm" w="sm" type="none"/>
-                    </a:lnL>
-                    <a:lnR cap="flat" cmpd="sng" w="38100">
-                      <a:solidFill>
-                        <a:schemeClr val="dk1"/>
-                      </a:solidFill>
-                      <a:prstDash val="solid"/>
-                      <a:round/>
-                      <a:headEnd len="sm" w="sm" type="none"/>
-                      <a:tailEnd len="sm" w="sm" type="none"/>
-                    </a:lnR>
-                    <a:lnT cap="flat" cmpd="sng" w="38100">
-                      <a:solidFill>
-                        <a:schemeClr val="dk1"/>
-                      </a:solidFill>
-                      <a:prstDash val="solid"/>
-                      <a:round/>
-                      <a:headEnd len="sm" w="sm" type="none"/>
-                      <a:tailEnd len="sm" w="sm" type="none"/>
-                    </a:lnT>
-                    <a:lnB cap="flat" cmpd="sng" w="38100">
-                      <a:solidFill>
-                        <a:schemeClr val="dk1"/>
-                      </a:solidFill>
-                      <a:prstDash val="solid"/>
-                      <a:round/>
-                      <a:headEnd len="sm" w="sm" type="none"/>
-                      <a:tailEnd len="sm" w="sm" type="none"/>
-                    </a:lnB>
-                  </a:tcPr>
-                </a:tc>
-                <a:tc>
-                  <a:txBody>
-                    <a:bodyPr/>
-                    <a:lstStyle/>
-                    <a:p>
-                      <a:pPr indent="0" lvl="0" marL="0" rtl="0" algn="l">
-                        <a:lnSpc>
-                          <a:spcPct val="115000"/>
-                        </a:lnSpc>
-                        <a:spcBef>
-                          <a:spcPts val="0"/>
-                        </a:spcBef>
-                        <a:spcAft>
-                          <a:spcPts val="0"/>
-                        </a:spcAft>
-                        <a:buClr>
-                          <a:schemeClr val="dk1"/>
-                        </a:buClr>
-                        <a:buSzPts val="1100"/>
-                        <a:buFont typeface="Arial"/>
-                        <a:buNone/>
-                      </a:pPr>
-                      <a:r>
-                        <a:rPr lang="en-US" sz="1900">
-                          <a:solidFill>
-                            <a:schemeClr val="dk1"/>
-                          </a:solidFill>
-                        </a:rPr>
-                        <a:t>0.07</a:t>
-                      </a:r>
-                      <a:r>
-                        <a:rPr lang="en-US" sz="1900">
-                          <a:solidFill>
-                            <a:schemeClr val="dk1"/>
-                          </a:solidFill>
-                        </a:rPr>
-                        <a:t>m</a:t>
-                      </a:r>
-                      <a:r>
-                        <a:rPr baseline="30000" lang="en-US" sz="1900">
-                          <a:solidFill>
-                            <a:schemeClr val="dk1"/>
-                          </a:solidFill>
-                        </a:rPr>
-                        <a:t>2</a:t>
-                      </a:r>
-                      <a:endParaRPr sz="1900"/>
-                    </a:p>
-                  </a:txBody>
-                  <a:tcPr marT="91425" marB="91425" marR="91425" marL="91425">
-                    <a:lnL cap="flat" cmpd="sng" w="38100">
-                      <a:solidFill>
-                        <a:schemeClr val="dk1"/>
-                      </a:solidFill>
-                      <a:prstDash val="solid"/>
-                      <a:round/>
-                      <a:headEnd len="sm" w="sm" type="none"/>
-                      <a:tailEnd len="sm" w="sm" type="none"/>
-                    </a:lnL>
-                    <a:lnR cap="flat" cmpd="sng" w="38100">
-                      <a:solidFill>
-                        <a:schemeClr val="dk1"/>
-                      </a:solidFill>
-                      <a:prstDash val="solid"/>
-                      <a:round/>
-                      <a:headEnd len="sm" w="sm" type="none"/>
-                      <a:tailEnd len="sm" w="sm" type="none"/>
-                    </a:lnR>
-                    <a:lnT cap="flat" cmpd="sng" w="38100">
-                      <a:solidFill>
-                        <a:schemeClr val="dk1"/>
-                      </a:solidFill>
-                      <a:prstDash val="solid"/>
-                      <a:round/>
-                      <a:headEnd len="sm" w="sm" type="none"/>
-                      <a:tailEnd len="sm" w="sm" type="none"/>
-                    </a:lnT>
-                    <a:lnB cap="flat" cmpd="sng" w="38100">
-                      <a:solidFill>
-                        <a:schemeClr val="dk1"/>
-                      </a:solidFill>
-                      <a:prstDash val="solid"/>
-                      <a:round/>
-                      <a:headEnd len="sm" w="sm" type="none"/>
-                      <a:tailEnd len="sm" w="sm" type="none"/>
-                    </a:lnB>
-                  </a:tcPr>
-                </a:tc>
-                <a:tc>
-                  <a:txBody>
-                    <a:bodyPr/>
-                    <a:lstStyle/>
-                    <a:p>
-                      <a:pPr indent="0" lvl="0" marL="0" rtl="0" algn="l">
-                        <a:lnSpc>
-                          <a:spcPct val="115000"/>
-                        </a:lnSpc>
-                        <a:spcBef>
-                          <a:spcPts val="0"/>
-                        </a:spcBef>
-                        <a:spcAft>
-                          <a:spcPts val="0"/>
-                        </a:spcAft>
-                        <a:buClr>
-                          <a:schemeClr val="dk1"/>
-                        </a:buClr>
-                        <a:buSzPts val="1100"/>
-                        <a:buFont typeface="Arial"/>
-                        <a:buNone/>
-                      </a:pPr>
-                      <a:r>
-                        <a:rPr lang="en-US" sz="1900">
-                          <a:solidFill>
-                            <a:schemeClr val="dk1"/>
-                          </a:solidFill>
-                        </a:rPr>
-                        <a:t>0.105</a:t>
-                      </a:r>
-                      <a:r>
-                        <a:rPr lang="en-US" sz="1900">
-                          <a:solidFill>
-                            <a:schemeClr val="dk1"/>
-                          </a:solidFill>
-                        </a:rPr>
-                        <a:t>m</a:t>
-                      </a:r>
-                      <a:r>
-                        <a:rPr baseline="30000" lang="en-US" sz="1900">
-                          <a:solidFill>
-                            <a:schemeClr val="dk1"/>
-                          </a:solidFill>
-                        </a:rPr>
-                        <a:t>2</a:t>
-                      </a:r>
-                      <a:endParaRPr/>
-                    </a:p>
-                  </a:txBody>
-                  <a:tcPr marT="91425" marB="91425" marR="91425" marL="91425">
-                    <a:lnL cap="flat" cmpd="sng" w="38100">
-                      <a:solidFill>
-                        <a:schemeClr val="dk1"/>
-                      </a:solidFill>
-                      <a:prstDash val="solid"/>
-                      <a:round/>
-                      <a:headEnd len="sm" w="sm" type="none"/>
-                      <a:tailEnd len="sm" w="sm" type="none"/>
-                    </a:lnL>
-                    <a:lnR cap="flat" cmpd="sng" w="38100">
-                      <a:solidFill>
-                        <a:schemeClr val="dk1"/>
-                      </a:solidFill>
-                      <a:prstDash val="solid"/>
-                      <a:round/>
-                      <a:headEnd len="sm" w="sm" type="none"/>
-                      <a:tailEnd len="sm" w="sm" type="none"/>
-                    </a:lnR>
-                    <a:lnT cap="flat" cmpd="sng" w="38100">
-                      <a:solidFill>
-                        <a:schemeClr val="dk1"/>
-                      </a:solidFill>
-                      <a:prstDash val="solid"/>
-                      <a:round/>
-                      <a:headEnd len="sm" w="sm" type="none"/>
-                      <a:tailEnd len="sm" w="sm" type="none"/>
-                    </a:lnT>
-                    <a:lnB cap="flat" cmpd="sng" w="38100">
-                      <a:solidFill>
-                        <a:schemeClr val="dk1"/>
-                      </a:solidFill>
-                      <a:prstDash val="solid"/>
-                      <a:round/>
-                      <a:headEnd len="sm" w="sm" type="none"/>
-                      <a:tailEnd len="sm" w="sm" type="none"/>
-                    </a:lnB>
-                  </a:tcPr>
-                </a:tc>
-                <a:tc>
-                  <a:txBody>
-                    <a:bodyPr/>
-                    <a:lstStyle/>
-                    <a:p>
-                      <a:pPr indent="0" lvl="0" marL="0" rtl="0" algn="l">
-                        <a:spcBef>
-                          <a:spcPts val="0"/>
-                        </a:spcBef>
-                        <a:spcAft>
-                          <a:spcPts val="0"/>
-                        </a:spcAft>
-                        <a:buNone/>
-                      </a:pPr>
-                      <a:r>
-                        <a:rPr lang="en-US" sz="1900"/>
-                        <a:t>50%</a:t>
-                      </a:r>
-                      <a:endParaRPr sz="1900"/>
-                    </a:p>
-                  </a:txBody>
-                  <a:tcPr marT="91425" marB="91425" marR="91425" marL="91425">
-                    <a:lnL cap="flat" cmpd="sng" w="38100">
-                      <a:solidFill>
-                        <a:schemeClr val="dk1"/>
-                      </a:solidFill>
-                      <a:prstDash val="solid"/>
-                      <a:round/>
-                      <a:headEnd len="sm" w="sm" type="none"/>
-                      <a:tailEnd len="sm" w="sm" type="none"/>
-                    </a:lnL>
-                    <a:lnR cap="flat" cmpd="sng" w="38100">
-                      <a:solidFill>
-                        <a:schemeClr val="dk1"/>
-                      </a:solidFill>
-                      <a:prstDash val="solid"/>
-                      <a:round/>
-                      <a:headEnd len="sm" w="sm" type="none"/>
-                      <a:tailEnd len="sm" w="sm" type="none"/>
-                    </a:lnR>
-                    <a:lnT cap="flat" cmpd="sng" w="38100">
-                      <a:solidFill>
-                        <a:schemeClr val="dk1"/>
-                      </a:solidFill>
-                      <a:prstDash val="solid"/>
-                      <a:round/>
-                      <a:headEnd len="sm" w="sm" type="none"/>
-                      <a:tailEnd len="sm" w="sm" type="none"/>
-                    </a:lnT>
-                    <a:lnB cap="flat" cmpd="sng" w="38100">
-                      <a:solidFill>
-                        <a:schemeClr val="dk1"/>
-                      </a:solidFill>
-                      <a:prstDash val="solid"/>
-                      <a:round/>
-                      <a:headEnd len="sm" w="sm" type="none"/>
-                      <a:tailEnd len="sm" w="sm" type="none"/>
-                    </a:lnB>
-                  </a:tcPr>
-                </a:tc>
-                <a:tc>
-                  <a:txBody>
-                    <a:bodyPr/>
-                    <a:lstStyle/>
-                    <a:p>
-                      <a:pPr indent="0" lvl="0" marL="0" rtl="0" algn="l">
-                        <a:lnSpc>
-                          <a:spcPct val="115000"/>
-                        </a:lnSpc>
-                        <a:spcBef>
-                          <a:spcPts val="0"/>
-                        </a:spcBef>
-                        <a:spcAft>
-                          <a:spcPts val="0"/>
-                        </a:spcAft>
-                        <a:buClr>
-                          <a:schemeClr val="dk1"/>
-                        </a:buClr>
-                        <a:buSzPts val="1100"/>
-                        <a:buFont typeface="Arial"/>
-                        <a:buNone/>
-                      </a:pPr>
-                      <a:r>
-                        <a:rPr lang="en-US" sz="1900">
-                          <a:solidFill>
-                            <a:schemeClr val="dk1"/>
-                          </a:solidFill>
-                        </a:rPr>
-                        <a:t>0.0875</a:t>
-                      </a:r>
-                      <a:r>
-                        <a:rPr lang="en-US" sz="1900">
-                          <a:solidFill>
-                            <a:schemeClr val="dk1"/>
-                          </a:solidFill>
-                        </a:rPr>
-                        <a:t>m</a:t>
-                      </a:r>
-                      <a:r>
-                        <a:rPr baseline="30000" lang="en-US" sz="1900">
-                          <a:solidFill>
-                            <a:schemeClr val="dk1"/>
-                          </a:solidFill>
-                        </a:rPr>
-                        <a:t>2</a:t>
-                      </a:r>
-                      <a:endParaRPr/>
-                    </a:p>
-                  </a:txBody>
-                  <a:tcPr marT="91425" marB="91425" marR="91425" marL="91425">
-                    <a:lnL cap="flat" cmpd="sng" w="38100">
-                      <a:solidFill>
-                        <a:schemeClr val="dk1"/>
-                      </a:solidFill>
-                      <a:prstDash val="solid"/>
-                      <a:round/>
-                      <a:headEnd len="sm" w="sm" type="none"/>
-                      <a:tailEnd len="sm" w="sm" type="none"/>
-                    </a:lnL>
-                    <a:lnR cap="flat" cmpd="sng" w="38100">
-                      <a:solidFill>
-                        <a:schemeClr val="dk1"/>
-                      </a:solidFill>
-                      <a:prstDash val="solid"/>
-                      <a:round/>
-                      <a:headEnd len="sm" w="sm" type="none"/>
-                      <a:tailEnd len="sm" w="sm" type="none"/>
-                    </a:lnR>
-                    <a:lnT cap="flat" cmpd="sng" w="38100">
-                      <a:solidFill>
-                        <a:schemeClr val="dk1"/>
-                      </a:solidFill>
-                      <a:prstDash val="solid"/>
-                      <a:round/>
-                      <a:headEnd len="sm" w="sm" type="none"/>
-                      <a:tailEnd len="sm" w="sm" type="none"/>
-                    </a:lnT>
-                    <a:lnB cap="flat" cmpd="sng" w="38100">
-                      <a:solidFill>
-                        <a:schemeClr val="dk1"/>
-                      </a:solidFill>
-                      <a:prstDash val="solid"/>
-                      <a:round/>
-                      <a:headEnd len="sm" w="sm" type="none"/>
-                      <a:tailEnd len="sm" w="sm" type="none"/>
-                    </a:lnB>
-                  </a:tcPr>
-                </a:tc>
-                <a:tc>
-                  <a:txBody>
-                    <a:bodyPr/>
-                    <a:lstStyle/>
-                    <a:p>
-                      <a:pPr indent="0" lvl="0" marL="0" rtl="0" algn="l">
-                        <a:spcBef>
-                          <a:spcPts val="0"/>
-                        </a:spcBef>
-                        <a:spcAft>
-                          <a:spcPts val="0"/>
-                        </a:spcAft>
-                        <a:buNone/>
-                      </a:pPr>
-                      <a:r>
-                        <a:rPr lang="en-US" sz="1900"/>
-                        <a:t>25%</a:t>
-                      </a:r>
-                      <a:endParaRPr sz="1900"/>
-                    </a:p>
-                  </a:txBody>
-                  <a:tcPr marT="91425" marB="91425" marR="91425" marL="91425">
-                    <a:lnL cap="flat" cmpd="sng" w="38100">
-                      <a:solidFill>
-                        <a:schemeClr val="dk1"/>
-                      </a:solidFill>
-                      <a:prstDash val="solid"/>
-                      <a:round/>
-                      <a:headEnd len="sm" w="sm" type="none"/>
-                      <a:tailEnd len="sm" w="sm" type="none"/>
-                    </a:lnL>
-                    <a:lnR cap="flat" cmpd="sng" w="38100">
-                      <a:solidFill>
-                        <a:schemeClr val="dk1"/>
-                      </a:solidFill>
-                      <a:prstDash val="solid"/>
-                      <a:round/>
-                      <a:headEnd len="sm" w="sm" type="none"/>
-                      <a:tailEnd len="sm" w="sm" type="none"/>
-                    </a:lnR>
-                    <a:lnT cap="flat" cmpd="sng" w="38100">
-                      <a:solidFill>
-                        <a:schemeClr val="dk1"/>
-                      </a:solidFill>
-                      <a:prstDash val="solid"/>
-                      <a:round/>
-                      <a:headEnd len="sm" w="sm" type="none"/>
-                      <a:tailEnd len="sm" w="sm" type="none"/>
-                    </a:lnT>
-                    <a:lnB cap="flat" cmpd="sng" w="38100">
-                      <a:solidFill>
-                        <a:schemeClr val="dk1"/>
-                      </a:solidFill>
-                      <a:prstDash val="solid"/>
-                      <a:round/>
-                      <a:headEnd len="sm" w="sm" type="none"/>
-                      <a:tailEnd len="sm" w="sm" type="none"/>
-                    </a:lnB>
-                  </a:tcPr>
+                  <a:tcPr marT="91425" marB="91425" marR="91425" marL="91425"/>
                 </a:tc>
               </a:tr>
             </a:tbl>
@@ -11412,7 +9464,41 @@
       </p:graphicFrame>
       <p:pic>
         <p:nvPicPr>
-          <p:cNvPr id="34" name="Google Shape;34;p1" title="cd_cartographer_run2.png"/>
+          <p:cNvPr id="36" name="Google Shape;36;p1" title="aligned_cartographer.png"/>
+          <p:cNvPicPr preferRelativeResize="0"/>
+          <p:nvPr/>
+        </p:nvPicPr>
+        <p:blipFill>
+          <a:blip r:embed="rId10">
+            <a:alphaModFix/>
+          </a:blip>
+          <a:stretch>
+            <a:fillRect/>
+          </a:stretch>
+        </p:blipFill>
+        <p:spPr>
+          <a:xfrm>
+            <a:off x="24964738" y="9821888"/>
+            <a:ext cx="4613500" cy="2933768"/>
+          </a:xfrm>
+          <a:prstGeom prst="rect">
+            <a:avLst/>
+          </a:prstGeom>
+          <a:noFill/>
+          <a:ln cap="flat" cmpd="sng" w="19050">
+            <a:solidFill>
+              <a:srgbClr val="595959"/>
+            </a:solidFill>
+            <a:prstDash val="solid"/>
+            <a:round/>
+            <a:headEnd len="sm" w="sm" type="none"/>
+            <a:tailEnd len="sm" w="sm" type="none"/>
+          </a:ln>
+        </p:spPr>
+      </p:pic>
+      <p:pic>
+        <p:nvPicPr>
+          <p:cNvPr id="37" name="Google Shape;37;p1" title="aligned_slam.png"/>
           <p:cNvPicPr preferRelativeResize="0"/>
           <p:nvPr/>
         </p:nvPicPr>
@@ -11426,26 +9512,32 @@
         </p:blipFill>
         <p:spPr>
           <a:xfrm>
-            <a:off x="13711977" y="14363013"/>
-            <a:ext cx="9151695" cy="4772901"/>
+            <a:off x="30487070" y="9869950"/>
+            <a:ext cx="4613515" cy="2837640"/>
           </a:xfrm>
           <a:prstGeom prst="rect">
             <a:avLst/>
           </a:prstGeom>
           <a:noFill/>
-          <a:ln>
-            <a:noFill/>
+          <a:ln cap="flat" cmpd="sng" w="19050">
+            <a:solidFill>
+              <a:srgbClr val="595959"/>
+            </a:solidFill>
+            <a:prstDash val="solid"/>
+            <a:round/>
+            <a:headEnd len="sm" w="sm" type="none"/>
+            <a:tailEnd len="sm" w="sm" type="none"/>
           </a:ln>
         </p:spPr>
       </p:pic>
       <p:pic>
         <p:nvPicPr>
-          <p:cNvPr id="35" name="Google Shape;35;p1" title="cd_slam_tool_run2.png"/>
+          <p:cNvPr id="38" name="Google Shape;38;p1" title="aligned_overlay_preview.png"/>
           <p:cNvPicPr preferRelativeResize="0"/>
           <p:nvPr/>
         </p:nvPicPr>
         <p:blipFill>
-          <a:blip r:embed="rId10">
+          <a:blip r:embed="rId11">
             <a:alphaModFix/>
           </a:blip>
           <a:stretch>
@@ -11454,14 +9546,14 @@
         </p:blipFill>
         <p:spPr>
           <a:xfrm>
-            <a:off x="13826225" y="8480975"/>
-            <a:ext cx="9151700" cy="4950743"/>
+            <a:off x="15981075" y="16493688"/>
+            <a:ext cx="4613500" cy="4613526"/>
           </a:xfrm>
           <a:prstGeom prst="rect">
             <a:avLst/>
           </a:prstGeom>
           <a:noFill/>
-          <a:ln cap="flat" cmpd="sng" w="9525">
+          <a:ln cap="flat" cmpd="sng" w="19050">
             <a:solidFill>
               <a:srgbClr val="595959"/>
             </a:solidFill>
@@ -11481,6 +9573,285 @@
 </file>
 
 <file path=ppt/theme/theme1.xml><?xml version="1.0" encoding="utf-8"?>
+<a:theme xmlns:a="http://schemas.openxmlformats.org/drawingml/2006/main" xmlns:r="http://schemas.openxmlformats.org/officeDocument/2006/relationships" name="Office Theme">
+  <a:themeElements>
+    <a:clrScheme name="Office Theme">
+      <a:dk1>
+        <a:srgbClr val="000000"/>
+      </a:dk1>
+      <a:lt1>
+        <a:srgbClr val="FFFFFF"/>
+      </a:lt1>
+      <a:dk2>
+        <a:srgbClr val="44546A"/>
+      </a:dk2>
+      <a:lt2>
+        <a:srgbClr val="E7E6E6"/>
+      </a:lt2>
+      <a:accent1>
+        <a:srgbClr val="4472C4"/>
+      </a:accent1>
+      <a:accent2>
+        <a:srgbClr val="ED7D31"/>
+      </a:accent2>
+      <a:accent3>
+        <a:srgbClr val="A5A5A5"/>
+      </a:accent3>
+      <a:accent4>
+        <a:srgbClr val="FFC000"/>
+      </a:accent4>
+      <a:accent5>
+        <a:srgbClr val="5B9BD5"/>
+      </a:accent5>
+      <a:accent6>
+        <a:srgbClr val="70AD47"/>
+      </a:accent6>
+      <a:hlink>
+        <a:srgbClr val="0563C1"/>
+      </a:hlink>
+      <a:folHlink>
+        <a:srgbClr val="954F72"/>
+      </a:folHlink>
+    </a:clrScheme>
+    <a:fontScheme name="Office">
+      <a:majorFont>
+        <a:latin typeface="Arial"/>
+        <a:ea typeface=""/>
+        <a:cs typeface=""/>
+        <a:font script="Jpan" typeface="ＭＳ Ｐゴシック"/>
+        <a:font script="Hang" typeface="맑은 고딕"/>
+        <a:font script="Hans" typeface="宋体"/>
+        <a:font script="Hant" typeface="新細明體"/>
+        <a:font script="Arab" typeface="Times New Roman"/>
+        <a:font script="Hebr" typeface="Times New Roman"/>
+        <a:font script="Thai" typeface="Angsana New"/>
+        <a:font script="Ethi" typeface="Nyala"/>
+        <a:font script="Beng" typeface="Vrinda"/>
+        <a:font script="Gujr" typeface="Shruti"/>
+        <a:font script="Khmr" typeface="MoolBoran"/>
+        <a:font script="Knda" typeface="Tunga"/>
+        <a:font script="Guru" typeface="Raavi"/>
+        <a:font script="Cans" typeface="Euphemia"/>
+        <a:font script="Cher" typeface="Plantagenet Cherokee"/>
+        <a:font script="Yiii" typeface="Microsoft Yi Baiti"/>
+        <a:font script="Tibt" typeface="Microsoft Himalaya"/>
+        <a:font script="Thaa" typeface="MV Boli"/>
+        <a:font script="Deva" typeface="Mangal"/>
+        <a:font script="Telu" typeface="Gautami"/>
+        <a:font script="Taml" typeface="Latha"/>
+        <a:font script="Syrc" typeface="Estrangelo Edessa"/>
+        <a:font script="Orya" typeface="Kalinga"/>
+        <a:font script="Mlym" typeface="Kartika"/>
+        <a:font script="Laoo" typeface="DokChampa"/>
+        <a:font script="Sinh" typeface="Iskoola Pota"/>
+        <a:font script="Mong" typeface="Mongolian Baiti"/>
+        <a:font script="Viet" typeface="Times New Roman"/>
+        <a:font script="Uigh" typeface="Microsoft Uighur"/>
+        <a:font script="Geor" typeface="Sylfaen"/>
+      </a:majorFont>
+      <a:minorFont>
+        <a:latin typeface="Arial"/>
+        <a:ea typeface=""/>
+        <a:cs typeface=""/>
+        <a:font script="Jpan" typeface="ＭＳ Ｐゴシック"/>
+        <a:font script="Hang" typeface="맑은 고딕"/>
+        <a:font script="Hans" typeface="宋体"/>
+        <a:font script="Hant" typeface="新細明體"/>
+        <a:font script="Arab" typeface="Arial"/>
+        <a:font script="Hebr" typeface="Arial"/>
+        <a:font script="Thai" typeface="Cordia New"/>
+        <a:font script="Ethi" typeface="Nyala"/>
+        <a:font script="Beng" typeface="Vrinda"/>
+        <a:font script="Gujr" typeface="Shruti"/>
+        <a:font script="Khmr" typeface="DaunPenh"/>
+        <a:font script="Knda" typeface="Tunga"/>
+        <a:font script="Guru" typeface="Raavi"/>
+        <a:font script="Cans" typeface="Euphemia"/>
+        <a:font script="Cher" typeface="Plantagenet Cherokee"/>
+        <a:font script="Yiii" typeface="Microsoft Yi Baiti"/>
+        <a:font script="Tibt" typeface="Microsoft Himalaya"/>
+        <a:font script="Thaa" typeface="MV Boli"/>
+        <a:font script="Deva" typeface="Mangal"/>
+        <a:font script="Telu" typeface="Gautami"/>
+        <a:font script="Taml" typeface="Latha"/>
+        <a:font script="Syrc" typeface="Estrangelo Edessa"/>
+        <a:font script="Orya" typeface="Kalinga"/>
+        <a:font script="Mlym" typeface="Kartika"/>
+        <a:font script="Laoo" typeface="DokChampa"/>
+        <a:font script="Sinh" typeface="Iskoola Pota"/>
+        <a:font script="Mong" typeface="Mongolian Baiti"/>
+        <a:font script="Viet" typeface="Arial"/>
+        <a:font script="Uigh" typeface="Microsoft Uighur"/>
+        <a:font script="Geor" typeface="Sylfaen"/>
+      </a:minorFont>
+    </a:fontScheme>
+    <a:fmtScheme name="Office">
+      <a:fillStyleLst>
+        <a:solidFill>
+          <a:schemeClr val="phClr"/>
+        </a:solidFill>
+        <a:gradFill rotWithShape="1">
+          <a:gsLst>
+            <a:gs pos="0">
+              <a:schemeClr val="phClr">
+                <a:tint val="50000"/>
+                <a:satMod val="300000"/>
+              </a:schemeClr>
+            </a:gs>
+            <a:gs pos="35000">
+              <a:schemeClr val="phClr">
+                <a:tint val="37000"/>
+                <a:satMod val="300000"/>
+              </a:schemeClr>
+            </a:gs>
+            <a:gs pos="100000">
+              <a:schemeClr val="phClr">
+                <a:tint val="15000"/>
+                <a:satMod val="350000"/>
+              </a:schemeClr>
+            </a:gs>
+          </a:gsLst>
+          <a:lin ang="16200000" scaled="1"/>
+        </a:gradFill>
+        <a:gradFill rotWithShape="1">
+          <a:gsLst>
+            <a:gs pos="0">
+              <a:schemeClr val="phClr">
+                <a:tint val="100000"/>
+                <a:shade val="100000"/>
+                <a:satMod val="130000"/>
+              </a:schemeClr>
+            </a:gs>
+            <a:gs pos="100000">
+              <a:schemeClr val="phClr">
+                <a:tint val="50000"/>
+                <a:shade val="100000"/>
+                <a:satMod val="350000"/>
+              </a:schemeClr>
+            </a:gs>
+          </a:gsLst>
+          <a:lin ang="16200000" scaled="0"/>
+        </a:gradFill>
+      </a:fillStyleLst>
+      <a:lnStyleLst>
+        <a:ln w="9525" cap="flat" cmpd="sng" algn="ctr">
+          <a:solidFill>
+            <a:schemeClr val="phClr">
+              <a:shade val="95000"/>
+              <a:satMod val="105000"/>
+            </a:schemeClr>
+          </a:solidFill>
+          <a:prstDash val="solid"/>
+        </a:ln>
+        <a:ln w="25400" cap="flat" cmpd="sng" algn="ctr">
+          <a:solidFill>
+            <a:schemeClr val="phClr"/>
+          </a:solidFill>
+          <a:prstDash val="solid"/>
+        </a:ln>
+        <a:ln w="38100" cap="flat" cmpd="sng" algn="ctr">
+          <a:solidFill>
+            <a:schemeClr val="phClr"/>
+          </a:solidFill>
+          <a:prstDash val="solid"/>
+        </a:ln>
+      </a:lnStyleLst>
+      <a:effectStyleLst>
+        <a:effectStyle>
+          <a:effectLst>
+            <a:outerShdw blurRad="40000" dist="20000" dir="5400000" rotWithShape="0">
+              <a:srgbClr val="000000">
+                <a:alpha val="38000"/>
+              </a:srgbClr>
+            </a:outerShdw>
+          </a:effectLst>
+        </a:effectStyle>
+        <a:effectStyle>
+          <a:effectLst>
+            <a:outerShdw blurRad="40000" dist="23000" dir="5400000" rotWithShape="0">
+              <a:srgbClr val="000000">
+                <a:alpha val="35000"/>
+              </a:srgbClr>
+            </a:outerShdw>
+          </a:effectLst>
+        </a:effectStyle>
+        <a:effectStyle>
+          <a:effectLst>
+            <a:outerShdw blurRad="40000" dist="23000" dir="5400000" rotWithShape="0">
+              <a:srgbClr val="000000">
+                <a:alpha val="35000"/>
+              </a:srgbClr>
+            </a:outerShdw>
+          </a:effectLst>
+          <a:scene3d>
+            <a:camera prst="orthographicFront">
+              <a:rot lat="0" lon="0" rev="0"/>
+            </a:camera>
+            <a:lightRig rig="threePt" dir="t">
+              <a:rot lat="0" lon="0" rev="1200000"/>
+            </a:lightRig>
+          </a:scene3d>
+          <a:sp3d>
+            <a:bevelT w="63500" h="25400"/>
+          </a:sp3d>
+        </a:effectStyle>
+      </a:effectStyleLst>
+      <a:bgFillStyleLst>
+        <a:solidFill>
+          <a:schemeClr val="phClr"/>
+        </a:solidFill>
+        <a:gradFill rotWithShape="1">
+          <a:gsLst>
+            <a:gs pos="0">
+              <a:schemeClr val="phClr">
+                <a:tint val="40000"/>
+                <a:satMod val="350000"/>
+              </a:schemeClr>
+            </a:gs>
+            <a:gs pos="40000">
+              <a:schemeClr val="phClr">
+                <a:tint val="45000"/>
+                <a:shade val="99000"/>
+                <a:satMod val="350000"/>
+              </a:schemeClr>
+            </a:gs>
+            <a:gs pos="100000">
+              <a:schemeClr val="phClr">
+                <a:shade val="20000"/>
+                <a:satMod val="255000"/>
+              </a:schemeClr>
+            </a:gs>
+          </a:gsLst>
+          <a:path path="circle">
+            <a:fillToRect l="50000" t="-80000" r="50000" b="180000"/>
+          </a:path>
+        </a:gradFill>
+        <a:gradFill rotWithShape="1">
+          <a:gsLst>
+            <a:gs pos="0">
+              <a:schemeClr val="phClr">
+                <a:tint val="80000"/>
+                <a:satMod val="300000"/>
+              </a:schemeClr>
+            </a:gs>
+            <a:gs pos="100000">
+              <a:schemeClr val="phClr">
+                <a:shade val="30000"/>
+                <a:satMod val="200000"/>
+              </a:schemeClr>
+            </a:gs>
+          </a:gsLst>
+          <a:path path="circle">
+            <a:fillToRect l="50000" t="50000" r="50000" b="50000"/>
+          </a:path>
+        </a:gradFill>
+      </a:bgFillStyleLst>
+    </a:fmtScheme>
+  </a:themeElements>
+</a:theme>
+</file>
+
+<file path=ppt/theme/theme2.xml><?xml version="1.0" encoding="utf-8"?>
 <a:theme xmlns:a="http://schemas.openxmlformats.org/drawingml/2006/main" xmlns:r="http://schemas.openxmlformats.org/officeDocument/2006/relationships">
   <a:themeElements>
     <a:clrScheme name="Default">
@@ -11757,283 +10128,4 @@
     </a:fmtScheme>
   </a:themeElements>
 </a:theme>
-</file>
-
-<file path=ppt/theme/theme2.xml><?xml version="1.0" encoding="utf-8"?>
-<a:theme xmlns:a="http://schemas.openxmlformats.org/drawingml/2006/main" xmlns:r="http://schemas.openxmlformats.org/officeDocument/2006/relationships" name="Office Theme">
-  <a:themeElements>
-    <a:clrScheme name="Office Theme">
-      <a:dk1>
-        <a:srgbClr val="000000"/>
-      </a:dk1>
-      <a:lt1>
-        <a:srgbClr val="FFFFFF"/>
-      </a:lt1>
-      <a:dk2>
-        <a:srgbClr val="44546A"/>
-      </a:dk2>
-      <a:lt2>
-        <a:srgbClr val="E7E6E6"/>
-      </a:lt2>
-      <a:accent1>
-        <a:srgbClr val="4472C4"/>
-      </a:accent1>
-      <a:accent2>
-        <a:srgbClr val="ED7D31"/>
-      </a:accent2>
-      <a:accent3>
-        <a:srgbClr val="A5A5A5"/>
-      </a:accent3>
-      <a:accent4>
-        <a:srgbClr val="FFC000"/>
-      </a:accent4>
-      <a:accent5>
-        <a:srgbClr val="5B9BD5"/>
-      </a:accent5>
-      <a:accent6>
-        <a:srgbClr val="70AD47"/>
-      </a:accent6>
-      <a:hlink>
-        <a:srgbClr val="0563C1"/>
-      </a:hlink>
-      <a:folHlink>
-        <a:srgbClr val="954F72"/>
-      </a:folHlink>
-    </a:clrScheme>
-    <a:fontScheme name="Office">
-      <a:majorFont>
-        <a:latin typeface="Arial"/>
-        <a:ea typeface=""/>
-        <a:cs typeface=""/>
-        <a:font script="Jpan" typeface="ＭＳ Ｐゴシック"/>
-        <a:font script="Hang" typeface="맑은 고딕"/>
-        <a:font script="Hans" typeface="宋体"/>
-        <a:font script="Hant" typeface="新細明體"/>
-        <a:font script="Arab" typeface="Times New Roman"/>
-        <a:font script="Hebr" typeface="Times New Roman"/>
-        <a:font script="Thai" typeface="Angsana New"/>
-        <a:font script="Ethi" typeface="Nyala"/>
-        <a:font script="Beng" typeface="Vrinda"/>
-        <a:font script="Gujr" typeface="Shruti"/>
-        <a:font script="Khmr" typeface="MoolBoran"/>
-        <a:font script="Knda" typeface="Tunga"/>
-        <a:font script="Guru" typeface="Raavi"/>
-        <a:font script="Cans" typeface="Euphemia"/>
-        <a:font script="Cher" typeface="Plantagenet Cherokee"/>
-        <a:font script="Yiii" typeface="Microsoft Yi Baiti"/>
-        <a:font script="Tibt" typeface="Microsoft Himalaya"/>
-        <a:font script="Thaa" typeface="MV Boli"/>
-        <a:font script="Deva" typeface="Mangal"/>
-        <a:font script="Telu" typeface="Gautami"/>
-        <a:font script="Taml" typeface="Latha"/>
-        <a:font script="Syrc" typeface="Estrangelo Edessa"/>
-        <a:font script="Orya" typeface="Kalinga"/>
-        <a:font script="Mlym" typeface="Kartika"/>
-        <a:font script="Laoo" typeface="DokChampa"/>
-        <a:font script="Sinh" typeface="Iskoola Pota"/>
-        <a:font script="Mong" typeface="Mongolian Baiti"/>
-        <a:font script="Viet" typeface="Times New Roman"/>
-        <a:font script="Uigh" typeface="Microsoft Uighur"/>
-        <a:font script="Geor" typeface="Sylfaen"/>
-      </a:majorFont>
-      <a:minorFont>
-        <a:latin typeface="Arial"/>
-        <a:ea typeface=""/>
-        <a:cs typeface=""/>
-        <a:font script="Jpan" typeface="ＭＳ Ｐゴシック"/>
-        <a:font script="Hang" typeface="맑은 고딕"/>
-        <a:font script="Hans" typeface="宋体"/>
-        <a:font script="Hant" typeface="新細明體"/>
-        <a:font script="Arab" typeface="Arial"/>
-        <a:font script="Hebr" typeface="Arial"/>
-        <a:font script="Thai" typeface="Cordia New"/>
-        <a:font script="Ethi" typeface="Nyala"/>
-        <a:font script="Beng" typeface="Vrinda"/>
-        <a:font script="Gujr" typeface="Shruti"/>
-        <a:font script="Khmr" typeface="DaunPenh"/>
-        <a:font script="Knda" typeface="Tunga"/>
-        <a:font script="Guru" typeface="Raavi"/>
-        <a:font script="Cans" typeface="Euphemia"/>
-        <a:font script="Cher" typeface="Plantagenet Cherokee"/>
-        <a:font script="Yiii" typeface="Microsoft Yi Baiti"/>
-        <a:font script="Tibt" typeface="Microsoft Himalaya"/>
-        <a:font script="Thaa" typeface="MV Boli"/>
-        <a:font script="Deva" typeface="Mangal"/>
-        <a:font script="Telu" typeface="Gautami"/>
-        <a:font script="Taml" typeface="Latha"/>
-        <a:font script="Syrc" typeface="Estrangelo Edessa"/>
-        <a:font script="Orya" typeface="Kalinga"/>
-        <a:font script="Mlym" typeface="Kartika"/>
-        <a:font script="Laoo" typeface="DokChampa"/>
-        <a:font script="Sinh" typeface="Iskoola Pota"/>
-        <a:font script="Mong" typeface="Mongolian Baiti"/>
-        <a:font script="Viet" typeface="Arial"/>
-        <a:font script="Uigh" typeface="Microsoft Uighur"/>
-        <a:font script="Geor" typeface="Sylfaen"/>
-      </a:minorFont>
-    </a:fontScheme>
-    <a:fmtScheme name="Office">
-      <a:fillStyleLst>
-        <a:solidFill>
-          <a:schemeClr val="phClr"/>
-        </a:solidFill>
-        <a:gradFill rotWithShape="1">
-          <a:gsLst>
-            <a:gs pos="0">
-              <a:schemeClr val="phClr">
-                <a:tint val="50000"/>
-                <a:satMod val="300000"/>
-              </a:schemeClr>
-            </a:gs>
-            <a:gs pos="35000">
-              <a:schemeClr val="phClr">
-                <a:tint val="37000"/>
-                <a:satMod val="300000"/>
-              </a:schemeClr>
-            </a:gs>
-            <a:gs pos="100000">
-              <a:schemeClr val="phClr">
-                <a:tint val="15000"/>
-                <a:satMod val="350000"/>
-              </a:schemeClr>
-            </a:gs>
-          </a:gsLst>
-          <a:lin ang="16200000" scaled="1"/>
-        </a:gradFill>
-        <a:gradFill rotWithShape="1">
-          <a:gsLst>
-            <a:gs pos="0">
-              <a:schemeClr val="phClr">
-                <a:tint val="100000"/>
-                <a:shade val="100000"/>
-                <a:satMod val="130000"/>
-              </a:schemeClr>
-            </a:gs>
-            <a:gs pos="100000">
-              <a:schemeClr val="phClr">
-                <a:tint val="50000"/>
-                <a:shade val="100000"/>
-                <a:satMod val="350000"/>
-              </a:schemeClr>
-            </a:gs>
-          </a:gsLst>
-          <a:lin ang="16200000" scaled="0"/>
-        </a:gradFill>
-      </a:fillStyleLst>
-      <a:lnStyleLst>
-        <a:ln w="9525" cap="flat" cmpd="sng" algn="ctr">
-          <a:solidFill>
-            <a:schemeClr val="phClr">
-              <a:shade val="95000"/>
-              <a:satMod val="105000"/>
-            </a:schemeClr>
-          </a:solidFill>
-          <a:prstDash val="solid"/>
-        </a:ln>
-        <a:ln w="25400" cap="flat" cmpd="sng" algn="ctr">
-          <a:solidFill>
-            <a:schemeClr val="phClr"/>
-          </a:solidFill>
-          <a:prstDash val="solid"/>
-        </a:ln>
-        <a:ln w="38100" cap="flat" cmpd="sng" algn="ctr">
-          <a:solidFill>
-            <a:schemeClr val="phClr"/>
-          </a:solidFill>
-          <a:prstDash val="solid"/>
-        </a:ln>
-      </a:lnStyleLst>
-      <a:effectStyleLst>
-        <a:effectStyle>
-          <a:effectLst>
-            <a:outerShdw blurRad="40000" dist="20000" dir="5400000" rotWithShape="0">
-              <a:srgbClr val="000000">
-                <a:alpha val="38000"/>
-              </a:srgbClr>
-            </a:outerShdw>
-          </a:effectLst>
-        </a:effectStyle>
-        <a:effectStyle>
-          <a:effectLst>
-            <a:outerShdw blurRad="40000" dist="23000" dir="5400000" rotWithShape="0">
-              <a:srgbClr val="000000">
-                <a:alpha val="35000"/>
-              </a:srgbClr>
-            </a:outerShdw>
-          </a:effectLst>
-        </a:effectStyle>
-        <a:effectStyle>
-          <a:effectLst>
-            <a:outerShdw blurRad="40000" dist="23000" dir="5400000" rotWithShape="0">
-              <a:srgbClr val="000000">
-                <a:alpha val="35000"/>
-              </a:srgbClr>
-            </a:outerShdw>
-          </a:effectLst>
-          <a:scene3d>
-            <a:camera prst="orthographicFront">
-              <a:rot lat="0" lon="0" rev="0"/>
-            </a:camera>
-            <a:lightRig rig="threePt" dir="t">
-              <a:rot lat="0" lon="0" rev="1200000"/>
-            </a:lightRig>
-          </a:scene3d>
-          <a:sp3d>
-            <a:bevelT w="63500" h="25400"/>
-          </a:sp3d>
-        </a:effectStyle>
-      </a:effectStyleLst>
-      <a:bgFillStyleLst>
-        <a:solidFill>
-          <a:schemeClr val="phClr"/>
-        </a:solidFill>
-        <a:gradFill rotWithShape="1">
-          <a:gsLst>
-            <a:gs pos="0">
-              <a:schemeClr val="phClr">
-                <a:tint val="40000"/>
-                <a:satMod val="350000"/>
-              </a:schemeClr>
-            </a:gs>
-            <a:gs pos="40000">
-              <a:schemeClr val="phClr">
-                <a:tint val="45000"/>
-                <a:shade val="99000"/>
-                <a:satMod val="350000"/>
-              </a:schemeClr>
-            </a:gs>
-            <a:gs pos="100000">
-              <a:schemeClr val="phClr">
-                <a:shade val="20000"/>
-                <a:satMod val="255000"/>
-              </a:schemeClr>
-            </a:gs>
-          </a:gsLst>
-          <a:path path="circle">
-            <a:fillToRect l="50000" t="-80000" r="50000" b="180000"/>
-          </a:path>
-        </a:gradFill>
-        <a:gradFill rotWithShape="1">
-          <a:gsLst>
-            <a:gs pos="0">
-              <a:schemeClr val="phClr">
-                <a:tint val="80000"/>
-                <a:satMod val="300000"/>
-              </a:schemeClr>
-            </a:gs>
-            <a:gs pos="100000">
-              <a:schemeClr val="phClr">
-                <a:shade val="30000"/>
-                <a:satMod val="200000"/>
-              </a:schemeClr>
-            </a:gs>
-          </a:gsLst>
-          <a:path path="circle">
-            <a:fillToRect l="50000" t="50000" r="50000" b="50000"/>
-          </a:path>
-        </a:gradFill>
-      </a:bgFillStyleLst>
-    </a:fmtScheme>
-  </a:themeElements>
-</a:theme>
 </file>